--- a/PPT - Contx 50%.pptx
+++ b/PPT - Contx 50%.pptx
@@ -1,27 +1,26 @@
 
 <file path=ppt/presentation.xml><?xml version="1.0" encoding="utf-8"?>
-<p:presentation xmlns:a="http://schemas.openxmlformats.org/drawingml/2006/main" xmlns:r="http://schemas.openxmlformats.org/officeDocument/2006/relationships" xmlns:p="http://schemas.openxmlformats.org/presentationml/2006/main" saveSubsetFonts="1" embedTrueTypeFonts="true">
+<p:presentation xmlns:a="http://schemas.openxmlformats.org/drawingml/2006/main" xmlns:r="http://schemas.openxmlformats.org/officeDocument/2006/relationships" xmlns:p="http://schemas.openxmlformats.org/presentationml/2006/main" embedTrueTypeFonts="1" saveSubsetFonts="1">
   <p:sldMasterIdLst>
     <p:sldMasterId id="2147483648" r:id="rId1"/>
   </p:sldMasterIdLst>
   <p:sldIdLst>
-    <p:sldId id="256" r:id="rId6"/>
-    <p:sldId id="257" r:id="rId7"/>
-    <p:sldId id="258" r:id="rId8"/>
-    <p:sldId id="259" r:id="rId9"/>
-    <p:sldId id="260" r:id="rId10"/>
-    <p:sldId id="261" r:id="rId11"/>
+    <p:sldId id="256" r:id="rId2"/>
+    <p:sldId id="257" r:id="rId3"/>
+    <p:sldId id="258" r:id="rId4"/>
+    <p:sldId id="260" r:id="rId5"/>
+    <p:sldId id="261" r:id="rId6"/>
   </p:sldIdLst>
   <p:sldSz cx="18288000" cy="10287000"/>
   <p:notesSz cx="6858000" cy="9144000"/>
   <p:embeddedFontLst>
     <p:embeddedFont>
-      <p:font typeface="Calibri (MS) Bold" charset="1" panose="020F0702030404030204"/>
-      <p:regular r:id="rId12"/>
+      <p:font typeface="Calibri (MS)" panose="020B0604020202020204" charset="0"/>
+      <p:regular r:id="rId7"/>
     </p:embeddedFont>
     <p:embeddedFont>
-      <p:font typeface="Calibri (MS)" charset="1" panose="020F0502020204030204"/>
-      <p:regular r:id="rId13"/>
+      <p:font typeface="Calibri (MS) Bold" panose="020B0604020202020204" charset="0"/>
+      <p:regular r:id="rId8"/>
     </p:embeddedFont>
   </p:embeddedFontLst>
   <p:defaultTextStyle>
@@ -119,6 +118,22 @@
       </a:defRPr>
     </a:lvl9pPr>
   </p:defaultTextStyle>
+  <p:extLst>
+    <p:ext uri="{EFAFB233-063F-42B5-8137-9DF3F51BA10A}">
+      <p15:sldGuideLst xmlns:p15="http://schemas.microsoft.com/office/powerpoint/2012/main">
+        <p15:guide id="1" orient="horz" pos="2160">
+          <p15:clr>
+            <a:srgbClr val="A4A3A4"/>
+          </p15:clr>
+        </p15:guide>
+        <p15:guide id="2" pos="2880">
+          <p15:clr>
+            <a:srgbClr val="A4A3A4"/>
+          </p15:clr>
+        </p15:guide>
+      </p15:sldGuideLst>
+    </p:ext>
+  </p:extLst>
 </p:presentation>
 </file>
 
@@ -160,10 +175,9 @@
           <a:lstStyle/>
           <a:p>
             <a:r>
-              <a:rPr lang="en-US" smtClean="0"/>
+              <a:rPr lang="en-US"/>
               <a:t>Click to edit Master title style</a:t>
             </a:r>
-            <a:endParaRPr lang="en-US"/>
           </a:p>
         </p:txBody>
       </p:sp>
@@ -279,10 +293,9 @@
           </a:lstStyle>
           <a:p>
             <a:r>
-              <a:rPr lang="en-US" smtClean="0"/>
+              <a:rPr lang="en-US"/>
               <a:t>Click to edit Master subtitle style</a:t>
             </a:r>
-            <a:endParaRPr lang="en-US"/>
           </a:p>
         </p:txBody>
       </p:sp>
@@ -304,7 +317,7 @@
             <a:fld id="{1D8BD707-D9CF-40AE-B4C6-C98DA3205C09}" type="datetimeFigureOut">
               <a:rPr lang="en-US" smtClean="0"/>
               <a:pPr/>
-              <a:t>8/1/2011</a:t>
+              <a:t>7/21/2026</a:t>
             </a:fld>
             <a:endParaRPr lang="en-US"/>
           </a:p>
@@ -394,10 +407,9 @@
           <a:lstStyle/>
           <a:p>
             <a:r>
-              <a:rPr lang="en-US" smtClean="0"/>
+              <a:rPr lang="en-US"/>
               <a:t>Click to edit Master title style</a:t>
             </a:r>
-            <a:endParaRPr lang="en-US"/>
           </a:p>
         </p:txBody>
       </p:sp>
@@ -418,38 +430,37 @@
           <a:p>
             <a:pPr lvl="0"/>
             <a:r>
-              <a:rPr lang="en-US" smtClean="0"/>
+              <a:rPr lang="en-US"/>
               <a:t>Click to edit Master text styles</a:t>
             </a:r>
           </a:p>
           <a:p>
             <a:pPr lvl="1"/>
             <a:r>
-              <a:rPr lang="en-US" smtClean="0"/>
+              <a:rPr lang="en-US"/>
               <a:t>Second level</a:t>
             </a:r>
           </a:p>
           <a:p>
             <a:pPr lvl="2"/>
             <a:r>
-              <a:rPr lang="en-US" smtClean="0"/>
+              <a:rPr lang="en-US"/>
               <a:t>Third level</a:t>
             </a:r>
           </a:p>
           <a:p>
             <a:pPr lvl="3"/>
             <a:r>
-              <a:rPr lang="en-US" smtClean="0"/>
+              <a:rPr lang="en-US"/>
               <a:t>Fourth level</a:t>
             </a:r>
           </a:p>
           <a:p>
             <a:pPr lvl="4"/>
             <a:r>
-              <a:rPr lang="en-US" smtClean="0"/>
+              <a:rPr lang="en-US"/>
               <a:t>Fifth level</a:t>
             </a:r>
-            <a:endParaRPr lang="en-US"/>
           </a:p>
         </p:txBody>
       </p:sp>
@@ -471,7 +482,7 @@
             <a:fld id="{1D8BD707-D9CF-40AE-B4C6-C98DA3205C09}" type="datetimeFigureOut">
               <a:rPr lang="en-US" smtClean="0"/>
               <a:pPr/>
-              <a:t>8/1/2011</a:t>
+              <a:t>7/21/2026</a:t>
             </a:fld>
             <a:endParaRPr lang="en-US"/>
           </a:p>
@@ -566,10 +577,9 @@
           <a:lstStyle/>
           <a:p>
             <a:r>
-              <a:rPr lang="en-US" smtClean="0"/>
+              <a:rPr lang="en-US"/>
               <a:t>Click to edit Master title style</a:t>
             </a:r>
-            <a:endParaRPr lang="en-US"/>
           </a:p>
         </p:txBody>
       </p:sp>
@@ -595,38 +605,37 @@
           <a:p>
             <a:pPr lvl="0"/>
             <a:r>
-              <a:rPr lang="en-US" smtClean="0"/>
+              <a:rPr lang="en-US"/>
               <a:t>Click to edit Master text styles</a:t>
             </a:r>
           </a:p>
           <a:p>
             <a:pPr lvl="1"/>
             <a:r>
-              <a:rPr lang="en-US" smtClean="0"/>
+              <a:rPr lang="en-US"/>
               <a:t>Second level</a:t>
             </a:r>
           </a:p>
           <a:p>
             <a:pPr lvl="2"/>
             <a:r>
-              <a:rPr lang="en-US" smtClean="0"/>
+              <a:rPr lang="en-US"/>
               <a:t>Third level</a:t>
             </a:r>
           </a:p>
           <a:p>
             <a:pPr lvl="3"/>
             <a:r>
-              <a:rPr lang="en-US" smtClean="0"/>
+              <a:rPr lang="en-US"/>
               <a:t>Fourth level</a:t>
             </a:r>
           </a:p>
           <a:p>
             <a:pPr lvl="4"/>
             <a:r>
-              <a:rPr lang="en-US" smtClean="0"/>
+              <a:rPr lang="en-US"/>
               <a:t>Fifth level</a:t>
             </a:r>
-            <a:endParaRPr lang="en-US"/>
           </a:p>
         </p:txBody>
       </p:sp>
@@ -648,7 +657,7 @@
             <a:fld id="{1D8BD707-D9CF-40AE-B4C6-C98DA3205C09}" type="datetimeFigureOut">
               <a:rPr lang="en-US" smtClean="0"/>
               <a:pPr/>
-              <a:t>8/1/2011</a:t>
+              <a:t>7/21/2026</a:t>
             </a:fld>
             <a:endParaRPr lang="en-US"/>
           </a:p>
@@ -738,10 +747,9 @@
           <a:lstStyle/>
           <a:p>
             <a:r>
-              <a:rPr lang="en-US" smtClean="0"/>
+              <a:rPr lang="en-US"/>
               <a:t>Click to edit Master title style</a:t>
             </a:r>
-            <a:endParaRPr lang="en-US"/>
           </a:p>
         </p:txBody>
       </p:sp>
@@ -762,38 +770,37 @@
           <a:p>
             <a:pPr lvl="0"/>
             <a:r>
-              <a:rPr lang="en-US" smtClean="0"/>
+              <a:rPr lang="en-US"/>
               <a:t>Click to edit Master text styles</a:t>
             </a:r>
           </a:p>
           <a:p>
             <a:pPr lvl="1"/>
             <a:r>
-              <a:rPr lang="en-US" smtClean="0"/>
+              <a:rPr lang="en-US"/>
               <a:t>Second level</a:t>
             </a:r>
           </a:p>
           <a:p>
             <a:pPr lvl="2"/>
             <a:r>
-              <a:rPr lang="en-US" smtClean="0"/>
+              <a:rPr lang="en-US"/>
               <a:t>Third level</a:t>
             </a:r>
           </a:p>
           <a:p>
             <a:pPr lvl="3"/>
             <a:r>
-              <a:rPr lang="en-US" smtClean="0"/>
+              <a:rPr lang="en-US"/>
               <a:t>Fourth level</a:t>
             </a:r>
           </a:p>
           <a:p>
             <a:pPr lvl="4"/>
             <a:r>
-              <a:rPr lang="en-US" smtClean="0"/>
+              <a:rPr lang="en-US"/>
               <a:t>Fifth level</a:t>
             </a:r>
-            <a:endParaRPr lang="en-US"/>
           </a:p>
         </p:txBody>
       </p:sp>
@@ -815,7 +822,7 @@
             <a:fld id="{1D8BD707-D9CF-40AE-B4C6-C98DA3205C09}" type="datetimeFigureOut">
               <a:rPr lang="en-US" smtClean="0"/>
               <a:pPr/>
-              <a:t>8/1/2011</a:t>
+              <a:t>7/21/2026</a:t>
             </a:fld>
             <a:endParaRPr lang="en-US"/>
           </a:p>
@@ -914,10 +921,9 @@
           </a:lstStyle>
           <a:p>
             <a:r>
-              <a:rPr lang="en-US" smtClean="0"/>
+              <a:rPr lang="en-US"/>
               <a:t>Click to edit Master title style</a:t>
             </a:r>
-            <a:endParaRPr lang="en-US"/>
           </a:p>
         </p:txBody>
       </p:sp>
@@ -1034,7 +1040,7 @@
           <a:p>
             <a:pPr lvl="0"/>
             <a:r>
-              <a:rPr lang="en-US" smtClean="0"/>
+              <a:rPr lang="en-US"/>
               <a:t>Click to edit Master text styles</a:t>
             </a:r>
           </a:p>
@@ -1058,7 +1064,7 @@
             <a:fld id="{1D8BD707-D9CF-40AE-B4C6-C98DA3205C09}" type="datetimeFigureOut">
               <a:rPr lang="en-US" smtClean="0"/>
               <a:pPr/>
-              <a:t>8/1/2011</a:t>
+              <a:t>7/21/2026</a:t>
             </a:fld>
             <a:endParaRPr lang="en-US"/>
           </a:p>
@@ -1148,10 +1154,9 @@
           <a:lstStyle/>
           <a:p>
             <a:r>
-              <a:rPr lang="en-US" smtClean="0"/>
+              <a:rPr lang="en-US"/>
               <a:t>Click to edit Master title style</a:t>
             </a:r>
-            <a:endParaRPr lang="en-US"/>
           </a:p>
         </p:txBody>
       </p:sp>
@@ -1205,38 +1210,37 @@
           <a:p>
             <a:pPr lvl="0"/>
             <a:r>
-              <a:rPr lang="en-US" smtClean="0"/>
+              <a:rPr lang="en-US"/>
               <a:t>Click to edit Master text styles</a:t>
             </a:r>
           </a:p>
           <a:p>
             <a:pPr lvl="1"/>
             <a:r>
-              <a:rPr lang="en-US" smtClean="0"/>
+              <a:rPr lang="en-US"/>
               <a:t>Second level</a:t>
             </a:r>
           </a:p>
           <a:p>
             <a:pPr lvl="2"/>
             <a:r>
-              <a:rPr lang="en-US" smtClean="0"/>
+              <a:rPr lang="en-US"/>
               <a:t>Third level</a:t>
             </a:r>
           </a:p>
           <a:p>
             <a:pPr lvl="3"/>
             <a:r>
-              <a:rPr lang="en-US" smtClean="0"/>
+              <a:rPr lang="en-US"/>
               <a:t>Fourth level</a:t>
             </a:r>
           </a:p>
           <a:p>
             <a:pPr lvl="4"/>
             <a:r>
-              <a:rPr lang="en-US" smtClean="0"/>
+              <a:rPr lang="en-US"/>
               <a:t>Fifth level</a:t>
             </a:r>
-            <a:endParaRPr lang="en-US"/>
           </a:p>
         </p:txBody>
       </p:sp>
@@ -1290,38 +1294,37 @@
           <a:p>
             <a:pPr lvl="0"/>
             <a:r>
-              <a:rPr lang="en-US" smtClean="0"/>
+              <a:rPr lang="en-US"/>
               <a:t>Click to edit Master text styles</a:t>
             </a:r>
           </a:p>
           <a:p>
             <a:pPr lvl="1"/>
             <a:r>
-              <a:rPr lang="en-US" smtClean="0"/>
+              <a:rPr lang="en-US"/>
               <a:t>Second level</a:t>
             </a:r>
           </a:p>
           <a:p>
             <a:pPr lvl="2"/>
             <a:r>
-              <a:rPr lang="en-US" smtClean="0"/>
+              <a:rPr lang="en-US"/>
               <a:t>Third level</a:t>
             </a:r>
           </a:p>
           <a:p>
             <a:pPr lvl="3"/>
             <a:r>
-              <a:rPr lang="en-US" smtClean="0"/>
+              <a:rPr lang="en-US"/>
               <a:t>Fourth level</a:t>
             </a:r>
           </a:p>
           <a:p>
             <a:pPr lvl="4"/>
             <a:r>
-              <a:rPr lang="en-US" smtClean="0"/>
+              <a:rPr lang="en-US"/>
               <a:t>Fifth level</a:t>
             </a:r>
-            <a:endParaRPr lang="en-US"/>
           </a:p>
         </p:txBody>
       </p:sp>
@@ -1343,7 +1346,7 @@
             <a:fld id="{1D8BD707-D9CF-40AE-B4C6-C98DA3205C09}" type="datetimeFigureOut">
               <a:rPr lang="en-US" smtClean="0"/>
               <a:pPr/>
-              <a:t>8/1/2011</a:t>
+              <a:t>7/21/2026</a:t>
             </a:fld>
             <a:endParaRPr lang="en-US"/>
           </a:p>
@@ -1437,10 +1440,9 @@
           </a:lstStyle>
           <a:p>
             <a:r>
-              <a:rPr lang="en-US" smtClean="0"/>
+              <a:rPr lang="en-US"/>
               <a:t>Click to edit Master title style</a:t>
             </a:r>
-            <a:endParaRPr lang="en-US"/>
           </a:p>
         </p:txBody>
       </p:sp>
@@ -1503,7 +1505,7 @@
           <a:p>
             <a:pPr lvl="0"/>
             <a:r>
-              <a:rPr lang="en-US" smtClean="0"/>
+              <a:rPr lang="en-US"/>
               <a:t>Click to edit Master text styles</a:t>
             </a:r>
           </a:p>
@@ -1559,38 +1561,37 @@
           <a:p>
             <a:pPr lvl="0"/>
             <a:r>
-              <a:rPr lang="en-US" smtClean="0"/>
+              <a:rPr lang="en-US"/>
               <a:t>Click to edit Master text styles</a:t>
             </a:r>
           </a:p>
           <a:p>
             <a:pPr lvl="1"/>
             <a:r>
-              <a:rPr lang="en-US" smtClean="0"/>
+              <a:rPr lang="en-US"/>
               <a:t>Second level</a:t>
             </a:r>
           </a:p>
           <a:p>
             <a:pPr lvl="2"/>
             <a:r>
-              <a:rPr lang="en-US" smtClean="0"/>
+              <a:rPr lang="en-US"/>
               <a:t>Third level</a:t>
             </a:r>
           </a:p>
           <a:p>
             <a:pPr lvl="3"/>
             <a:r>
-              <a:rPr lang="en-US" smtClean="0"/>
+              <a:rPr lang="en-US"/>
               <a:t>Fourth level</a:t>
             </a:r>
           </a:p>
           <a:p>
             <a:pPr lvl="4"/>
             <a:r>
-              <a:rPr lang="en-US" smtClean="0"/>
+              <a:rPr lang="en-US"/>
               <a:t>Fifth level</a:t>
             </a:r>
-            <a:endParaRPr lang="en-US"/>
           </a:p>
         </p:txBody>
       </p:sp>
@@ -1653,7 +1654,7 @@
           <a:p>
             <a:pPr lvl="0"/>
             <a:r>
-              <a:rPr lang="en-US" smtClean="0"/>
+              <a:rPr lang="en-US"/>
               <a:t>Click to edit Master text styles</a:t>
             </a:r>
           </a:p>
@@ -1709,38 +1710,37 @@
           <a:p>
             <a:pPr lvl="0"/>
             <a:r>
-              <a:rPr lang="en-US" smtClean="0"/>
+              <a:rPr lang="en-US"/>
               <a:t>Click to edit Master text styles</a:t>
             </a:r>
           </a:p>
           <a:p>
             <a:pPr lvl="1"/>
             <a:r>
-              <a:rPr lang="en-US" smtClean="0"/>
+              <a:rPr lang="en-US"/>
               <a:t>Second level</a:t>
             </a:r>
           </a:p>
           <a:p>
             <a:pPr lvl="2"/>
             <a:r>
-              <a:rPr lang="en-US" smtClean="0"/>
+              <a:rPr lang="en-US"/>
               <a:t>Third level</a:t>
             </a:r>
           </a:p>
           <a:p>
             <a:pPr lvl="3"/>
             <a:r>
-              <a:rPr lang="en-US" smtClean="0"/>
+              <a:rPr lang="en-US"/>
               <a:t>Fourth level</a:t>
             </a:r>
           </a:p>
           <a:p>
             <a:pPr lvl="4"/>
             <a:r>
-              <a:rPr lang="en-US" smtClean="0"/>
+              <a:rPr lang="en-US"/>
               <a:t>Fifth level</a:t>
             </a:r>
-            <a:endParaRPr lang="en-US"/>
           </a:p>
         </p:txBody>
       </p:sp>
@@ -1762,7 +1762,7 @@
             <a:fld id="{1D8BD707-D9CF-40AE-B4C6-C98DA3205C09}" type="datetimeFigureOut">
               <a:rPr lang="en-US" smtClean="0"/>
               <a:pPr/>
-              <a:t>8/1/2011</a:t>
+              <a:t>7/21/2026</a:t>
             </a:fld>
             <a:endParaRPr lang="en-US"/>
           </a:p>
@@ -1852,10 +1852,9 @@
           <a:lstStyle/>
           <a:p>
             <a:r>
-              <a:rPr lang="en-US" smtClean="0"/>
+              <a:rPr lang="en-US"/>
               <a:t>Click to edit Master title style</a:t>
             </a:r>
-            <a:endParaRPr lang="en-US"/>
           </a:p>
         </p:txBody>
       </p:sp>
@@ -1877,7 +1876,7 @@
             <a:fld id="{1D8BD707-D9CF-40AE-B4C6-C98DA3205C09}" type="datetimeFigureOut">
               <a:rPr lang="en-US" smtClean="0"/>
               <a:pPr/>
-              <a:t>8/1/2011</a:t>
+              <a:t>7/21/2026</a:t>
             </a:fld>
             <a:endParaRPr lang="en-US"/>
           </a:p>
@@ -1969,7 +1968,7 @@
             <a:fld id="{1D8BD707-D9CF-40AE-B4C6-C98DA3205C09}" type="datetimeFigureOut">
               <a:rPr lang="en-US" smtClean="0"/>
               <a:pPr/>
-              <a:t>8/1/2011</a:t>
+              <a:t>7/21/2026</a:t>
             </a:fld>
             <a:endParaRPr lang="en-US"/>
           </a:p>
@@ -2068,10 +2067,9 @@
           </a:lstStyle>
           <a:p>
             <a:r>
-              <a:rPr lang="en-US" smtClean="0"/>
+              <a:rPr lang="en-US"/>
               <a:t>Click to edit Master title style</a:t>
             </a:r>
-            <a:endParaRPr lang="en-US"/>
           </a:p>
         </p:txBody>
       </p:sp>
@@ -2125,38 +2123,37 @@
           <a:p>
             <a:pPr lvl="0"/>
             <a:r>
-              <a:rPr lang="en-US" smtClean="0"/>
+              <a:rPr lang="en-US"/>
               <a:t>Click to edit Master text styles</a:t>
             </a:r>
           </a:p>
           <a:p>
             <a:pPr lvl="1"/>
             <a:r>
-              <a:rPr lang="en-US" smtClean="0"/>
+              <a:rPr lang="en-US"/>
               <a:t>Second level</a:t>
             </a:r>
           </a:p>
           <a:p>
             <a:pPr lvl="2"/>
             <a:r>
-              <a:rPr lang="en-US" smtClean="0"/>
+              <a:rPr lang="en-US"/>
               <a:t>Third level</a:t>
             </a:r>
           </a:p>
           <a:p>
             <a:pPr lvl="3"/>
             <a:r>
-              <a:rPr lang="en-US" smtClean="0"/>
+              <a:rPr lang="en-US"/>
               <a:t>Fourth level</a:t>
             </a:r>
           </a:p>
           <a:p>
             <a:pPr lvl="4"/>
             <a:r>
-              <a:rPr lang="en-US" smtClean="0"/>
+              <a:rPr lang="en-US"/>
               <a:t>Fifth level</a:t>
             </a:r>
-            <a:endParaRPr lang="en-US"/>
           </a:p>
         </p:txBody>
       </p:sp>
@@ -2219,7 +2216,7 @@
           <a:p>
             <a:pPr lvl="0"/>
             <a:r>
-              <a:rPr lang="en-US" smtClean="0"/>
+              <a:rPr lang="en-US"/>
               <a:t>Click to edit Master text styles</a:t>
             </a:r>
           </a:p>
@@ -2243,7 +2240,7 @@
             <a:fld id="{1D8BD707-D9CF-40AE-B4C6-C98DA3205C09}" type="datetimeFigureOut">
               <a:rPr lang="en-US" smtClean="0"/>
               <a:pPr/>
-              <a:t>8/1/2011</a:t>
+              <a:t>7/21/2026</a:t>
             </a:fld>
             <a:endParaRPr lang="en-US"/>
           </a:p>
@@ -2342,10 +2339,9 @@
           </a:lstStyle>
           <a:p>
             <a:r>
-              <a:rPr lang="en-US" smtClean="0"/>
+              <a:rPr lang="en-US"/>
               <a:t>Click to edit Master title style</a:t>
             </a:r>
-            <a:endParaRPr lang="en-US"/>
           </a:p>
         </p:txBody>
       </p:sp>
@@ -2469,7 +2465,7 @@
           <a:p>
             <a:pPr lvl="0"/>
             <a:r>
-              <a:rPr lang="en-US" smtClean="0"/>
+              <a:rPr lang="en-US"/>
               <a:t>Click to edit Master text styles</a:t>
             </a:r>
           </a:p>
@@ -2493,7 +2489,7 @@
             <a:fld id="{1D8BD707-D9CF-40AE-B4C6-C98DA3205C09}" type="datetimeFigureOut">
               <a:rPr lang="en-US" smtClean="0"/>
               <a:pPr/>
-              <a:t>8/1/2011</a:t>
+              <a:t>7/21/2026</a:t>
             </a:fld>
             <a:endParaRPr lang="en-US"/>
           </a:p>
@@ -2598,10 +2594,9 @@
           <a:lstStyle/>
           <a:p>
             <a:r>
-              <a:rPr lang="en-US" smtClean="0"/>
+              <a:rPr lang="en-US"/>
               <a:t>Click to edit Master title style</a:t>
             </a:r>
-            <a:endParaRPr lang="en-US"/>
           </a:p>
         </p:txBody>
       </p:sp>
@@ -2632,38 +2627,37 @@
           <a:p>
             <a:pPr lvl="0"/>
             <a:r>
-              <a:rPr lang="en-US" smtClean="0"/>
+              <a:rPr lang="en-US"/>
               <a:t>Click to edit Master text styles</a:t>
             </a:r>
           </a:p>
           <a:p>
             <a:pPr lvl="1"/>
             <a:r>
-              <a:rPr lang="en-US" smtClean="0"/>
+              <a:rPr lang="en-US"/>
               <a:t>Second level</a:t>
             </a:r>
           </a:p>
           <a:p>
             <a:pPr lvl="2"/>
             <a:r>
-              <a:rPr lang="en-US" smtClean="0"/>
+              <a:rPr lang="en-US"/>
               <a:t>Third level</a:t>
             </a:r>
           </a:p>
           <a:p>
             <a:pPr lvl="3"/>
             <a:r>
-              <a:rPr lang="en-US" smtClean="0"/>
+              <a:rPr lang="en-US"/>
               <a:t>Fourth level</a:t>
             </a:r>
           </a:p>
           <a:p>
             <a:pPr lvl="4"/>
             <a:r>
-              <a:rPr lang="en-US" smtClean="0"/>
+              <a:rPr lang="en-US"/>
               <a:t>Fifth level</a:t>
             </a:r>
-            <a:endParaRPr lang="en-US"/>
           </a:p>
         </p:txBody>
       </p:sp>
@@ -2703,7 +2697,7 @@
             <a:fld id="{1D8BD707-D9CF-40AE-B4C6-C98DA3205C09}" type="datetimeFigureOut">
               <a:rPr lang="en-US" smtClean="0"/>
               <a:pPr/>
-              <a:t>8/1/2011</a:t>
+              <a:t>7/21/2026</a:t>
             </a:fld>
             <a:endParaRPr lang="en-US"/>
           </a:p>
@@ -3058,7 +3052,7 @@
 </file>
 
 <file path=ppt/slides/slide1.xml><?xml version="1.0" encoding="utf-8"?>
-<p:sld xmlns:p="http://schemas.openxmlformats.org/presentationml/2006/main" xmlns:a="http://schemas.openxmlformats.org/drawingml/2006/main" xmlns:r="http://schemas.openxmlformats.org/officeDocument/2006/relationships">
+<p:sld xmlns:a="http://schemas.openxmlformats.org/drawingml/2006/main" xmlns:r="http://schemas.openxmlformats.org/officeDocument/2006/relationships" xmlns:p="http://schemas.openxmlformats.org/presentationml/2006/main">
   <p:cSld>
     <p:spTree>
       <p:nvGrpSpPr>
@@ -3076,12 +3070,12 @@
       </p:grpSpPr>
       <p:grpSp>
         <p:nvGrpSpPr>
-          <p:cNvPr name="Group 2" id="2"/>
+          <p:cNvPr id="2" name="Group 2"/>
           <p:cNvGrpSpPr/>
           <p:nvPr/>
         </p:nvGrpSpPr>
         <p:grpSpPr>
-          <a:xfrm rot="0">
+          <a:xfrm>
             <a:off x="-12697" y="-12697"/>
             <a:ext cx="665483" cy="10312403"/>
             <a:chOff x="0" y="0"/>
@@ -3090,12 +3084,12 @@
         </p:grpSpPr>
         <p:sp>
           <p:nvSpPr>
-            <p:cNvPr name="Freeform 3" id="3"/>
+            <p:cNvPr id="3" name="Freeform 3"/>
             <p:cNvSpPr/>
             <p:nvPr/>
           </p:nvSpPr>
           <p:spPr>
-            <a:xfrm flipH="false" flipV="false" rot="0">
+            <a:xfrm>
               <a:off x="0" y="0"/>
               <a:ext cx="887349" cy="13749910"/>
             </a:xfrm>
@@ -3104,9 +3098,9 @@
               <a:gdLst/>
               <a:ahLst/>
               <a:cxnLst/>
-              <a:rect r="r" b="b" t="t" l="l"/>
+              <a:rect l="l" t="t" r="r" b="b"/>
               <a:pathLst>
-                <a:path h="13749910" w="887349">
+                <a:path w="887349" h="13749910">
                   <a:moveTo>
                     <a:pt x="0" y="0"/>
                   </a:moveTo>
@@ -3138,12 +3132,12 @@
       </p:grpSp>
       <p:grpSp>
         <p:nvGrpSpPr>
-          <p:cNvPr name="Group 4" id="4"/>
+          <p:cNvPr id="4" name="Group 4"/>
           <p:cNvGrpSpPr/>
           <p:nvPr/>
         </p:nvGrpSpPr>
         <p:grpSpPr>
-          <a:xfrm rot="0">
+          <a:xfrm>
             <a:off x="1188720" y="2691433"/>
             <a:ext cx="10972800" cy="2194560"/>
             <a:chOff x="0" y="0"/>
@@ -3152,12 +3146,12 @@
         </p:grpSpPr>
         <p:sp>
           <p:nvSpPr>
-            <p:cNvPr name="Freeform 5" id="5"/>
+            <p:cNvPr id="5" name="Freeform 5"/>
             <p:cNvSpPr/>
             <p:nvPr/>
           </p:nvSpPr>
           <p:spPr>
-            <a:xfrm flipH="false" flipV="false" rot="0">
+            <a:xfrm>
               <a:off x="0" y="0"/>
               <a:ext cx="14630400" cy="2926080"/>
             </a:xfrm>
@@ -3166,9 +3160,9 @@
               <a:gdLst/>
               <a:ahLst/>
               <a:cxnLst/>
-              <a:rect r="r" b="b" t="t" l="l"/>
+              <a:rect l="l" t="t" r="r" b="b"/>
               <a:pathLst>
-                <a:path h="2926080" w="14630400">
+                <a:path w="14630400" h="2926080">
                   <a:moveTo>
                     <a:pt x="0" y="0"/>
                   </a:moveTo>
@@ -3190,15 +3184,15 @@
                 <a:alphaModFix amt="0"/>
               </a:blip>
               <a:stretch>
-                <a:fillRect l="0" t="-47425" r="0" b="-47425"/>
+                <a:fillRect t="-47425" b="-47425"/>
               </a:stretch>
             </a:blipFill>
           </p:spPr>
         </p:sp>
         <p:sp>
           <p:nvSpPr>
-            <p:cNvPr name="TextBox 6" id="6"/>
-            <p:cNvSpPr txBox="true"/>
+            <p:cNvPr id="6" name="TextBox 6"/>
+            <p:cNvSpPr txBox="1"/>
             <p:nvPr/>
           </p:nvSpPr>
           <p:spPr>
@@ -3211,7 +3205,7 @@
             </a:prstGeom>
           </p:spPr>
           <p:txBody>
-            <a:bodyPr anchor="ctr" rtlCol="false" tIns="0" lIns="0" bIns="0" rIns="0"/>
+            <a:bodyPr lIns="0" tIns="0" rIns="0" bIns="0" rtlCol="0" anchor="ctr"/>
             <a:lstStyle/>
             <a:p>
               <a:pPr algn="l">
@@ -3220,7 +3214,7 @@
                 </a:lnSpc>
               </a:pPr>
               <a:r>
-                <a:rPr lang="en-US" sz="10800" b="true">
+                <a:rPr lang="en-US" sz="10800" b="1">
                   <a:solidFill>
                     <a:srgbClr val="1A1A2E"/>
                   </a:solidFill>
@@ -3237,12 +3231,12 @@
       </p:grpSp>
       <p:grpSp>
         <p:nvGrpSpPr>
-          <p:cNvPr name="Group 7" id="7"/>
+          <p:cNvPr id="7" name="Group 7"/>
           <p:cNvGrpSpPr/>
           <p:nvPr/>
         </p:nvGrpSpPr>
         <p:grpSpPr>
-          <a:xfrm rot="0">
+          <a:xfrm>
             <a:off x="1176023" y="4981763"/>
             <a:ext cx="9417033" cy="1828800"/>
             <a:chOff x="0" y="0"/>
@@ -3251,12 +3245,12 @@
         </p:grpSpPr>
         <p:sp>
           <p:nvSpPr>
-            <p:cNvPr name="Freeform 8" id="8"/>
+            <p:cNvPr id="8" name="Freeform 8"/>
             <p:cNvSpPr/>
             <p:nvPr/>
           </p:nvSpPr>
           <p:spPr>
-            <a:xfrm flipH="false" flipV="false" rot="0">
+            <a:xfrm>
               <a:off x="0" y="0"/>
               <a:ext cx="12556044" cy="2438400"/>
             </a:xfrm>
@@ -3265,9 +3259,9 @@
               <a:gdLst/>
               <a:ahLst/>
               <a:cxnLst/>
-              <a:rect r="r" b="b" t="t" l="l"/>
+              <a:rect l="l" t="t" r="r" b="b"/>
               <a:pathLst>
-                <a:path h="2438400" w="12556044">
+                <a:path w="12556044" h="2438400">
                   <a:moveTo>
                     <a:pt x="0" y="0"/>
                   </a:moveTo>
@@ -3289,15 +3283,15 @@
                 <a:alphaModFix amt="0"/>
               </a:blip>
               <a:stretch>
-                <a:fillRect l="0" t="-96137" r="-45650" b="-96137"/>
+                <a:fillRect t="-96137" r="-45650" b="-96137"/>
               </a:stretch>
             </a:blipFill>
           </p:spPr>
         </p:sp>
         <p:sp>
           <p:nvSpPr>
-            <p:cNvPr name="TextBox 9" id="9"/>
-            <p:cNvSpPr txBox="true"/>
+            <p:cNvPr id="9" name="TextBox 9"/>
+            <p:cNvSpPr txBox="1"/>
             <p:nvPr/>
           </p:nvSpPr>
           <p:spPr>
@@ -3310,7 +3304,7 @@
             </a:prstGeom>
           </p:spPr>
           <p:txBody>
-            <a:bodyPr anchor="ctr" rtlCol="false" tIns="0" lIns="0" bIns="0" rIns="0"/>
+            <a:bodyPr lIns="0" tIns="0" rIns="0" bIns="0" rtlCol="0" anchor="ctr"/>
             <a:lstStyle/>
             <a:p>
               <a:pPr algn="l">
@@ -3328,19 +3322,7 @@
                   <a:cs typeface="Calibri (MS)"/>
                   <a:sym typeface="Calibri (MS)"/>
                 </a:rPr>
-                <a:t>A Low-Lev</a:t>
-              </a:r>
-              <a:r>
-                <a:rPr lang="en-US" sz="3600">
-                  <a:solidFill>
-                    <a:srgbClr val="6B7280"/>
-                  </a:solidFill>
-                  <a:latin typeface="Calibri (MS)"/>
-                  <a:ea typeface="Calibri (MS)"/>
-                  <a:cs typeface="Calibri (MS)"/>
-                  <a:sym typeface="Calibri (MS)"/>
-                </a:rPr>
-                <a:t>el Keyboard-Hook Lockdown and On-Device Compiler-Based Assessment Engine for Secure Programming Exams</a:t>
+                <a:t>A Low-Level Keyboard-Hook Lockdown and On-Device Compiler-Based Assessment Engine for Secure Programming Exams</a:t>
               </a:r>
             </a:p>
           </p:txBody>
@@ -3348,12 +3330,12 @@
       </p:grpSp>
       <p:grpSp>
         <p:nvGrpSpPr>
-          <p:cNvPr name="Group 10" id="10"/>
+          <p:cNvPr id="10" name="Group 10"/>
           <p:cNvGrpSpPr/>
           <p:nvPr/>
         </p:nvGrpSpPr>
         <p:grpSpPr>
-          <a:xfrm rot="0">
+          <a:xfrm>
             <a:off x="1188720" y="7914850"/>
             <a:ext cx="10083803" cy="1488443"/>
             <a:chOff x="0" y="0"/>
@@ -3362,12 +3344,12 @@
         </p:grpSpPr>
         <p:sp>
           <p:nvSpPr>
-            <p:cNvPr name="Freeform 11" id="11"/>
+            <p:cNvPr id="11" name="Freeform 11"/>
             <p:cNvSpPr/>
             <p:nvPr/>
           </p:nvSpPr>
           <p:spPr>
-            <a:xfrm flipH="false" flipV="false" rot="0">
+            <a:xfrm>
               <a:off x="0" y="0"/>
               <a:ext cx="13445110" cy="1984629"/>
             </a:xfrm>
@@ -3376,9 +3358,9 @@
               <a:gdLst/>
               <a:ahLst/>
               <a:cxnLst/>
-              <a:rect r="r" b="b" t="t" l="l"/>
+              <a:rect l="l" t="t" r="r" b="b"/>
               <a:pathLst>
-                <a:path h="1984629" w="13445110">
+                <a:path w="13445110" h="1984629">
                   <a:moveTo>
                     <a:pt x="0" y="198501"/>
                   </a:moveTo>
@@ -3430,12 +3412,12 @@
       </p:grpSp>
       <p:grpSp>
         <p:nvGrpSpPr>
-          <p:cNvPr name="Group 12" id="12"/>
+          <p:cNvPr id="12" name="Group 12"/>
           <p:cNvGrpSpPr/>
           <p:nvPr/>
         </p:nvGrpSpPr>
         <p:grpSpPr>
-          <a:xfrm rot="0">
+          <a:xfrm>
             <a:off x="1201417" y="7927547"/>
             <a:ext cx="10058400" cy="1463040"/>
             <a:chOff x="0" y="0"/>
@@ -3444,12 +3426,12 @@
         </p:grpSpPr>
         <p:sp>
           <p:nvSpPr>
-            <p:cNvPr name="Freeform 13" id="13"/>
+            <p:cNvPr id="13" name="Freeform 13"/>
             <p:cNvSpPr/>
             <p:nvPr/>
           </p:nvSpPr>
           <p:spPr>
-            <a:xfrm flipH="false" flipV="false" rot="0">
+            <a:xfrm>
               <a:off x="0" y="0"/>
               <a:ext cx="13411200" cy="1950720"/>
             </a:xfrm>
@@ -3458,9 +3440,9 @@
               <a:gdLst/>
               <a:ahLst/>
               <a:cxnLst/>
-              <a:rect r="r" b="b" t="t" l="l"/>
+              <a:rect l="l" t="t" r="r" b="b"/>
               <a:pathLst>
-                <a:path h="1950720" w="13411200">
+                <a:path w="13411200" h="1950720">
                   <a:moveTo>
                     <a:pt x="0" y="0"/>
                   </a:moveTo>
@@ -3482,15 +3464,15 @@
                 <a:alphaModFix amt="0"/>
               </a:blip>
               <a:stretch>
-                <a:fillRect l="0" t="-83959" r="0" b="-83959"/>
+                <a:fillRect t="-83959" b="-83959"/>
               </a:stretch>
             </a:blipFill>
           </p:spPr>
         </p:sp>
         <p:sp>
           <p:nvSpPr>
-            <p:cNvPr name="TextBox 14" id="14"/>
-            <p:cNvSpPr txBox="true"/>
+            <p:cNvPr id="14" name="TextBox 14"/>
+            <p:cNvSpPr txBox="1"/>
             <p:nvPr/>
           </p:nvSpPr>
           <p:spPr>
@@ -3503,7 +3485,7 @@
             </a:prstGeom>
           </p:spPr>
           <p:txBody>
-            <a:bodyPr anchor="ctr" rtlCol="false" tIns="0" lIns="0" bIns="0" rIns="0"/>
+            <a:bodyPr lIns="0" tIns="0" rIns="0" bIns="0" rtlCol="0" anchor="ctr"/>
             <a:lstStyle/>
             <a:p>
               <a:pPr algn="ctr">
@@ -3529,12 +3511,12 @@
       </p:grpSp>
       <p:sp>
         <p:nvSpPr>
-          <p:cNvPr name="Freeform 15" id="15"/>
+          <p:cNvPr id="15" name="Freeform 15"/>
           <p:cNvSpPr/>
           <p:nvPr/>
         </p:nvSpPr>
         <p:spPr>
-          <a:xfrm flipH="false" flipV="false" rot="0">
+          <a:xfrm>
             <a:off x="11433393" y="658072"/>
             <a:ext cx="6480805" cy="7256778"/>
           </a:xfrm>
@@ -3543,9 +3525,9 @@
             <a:gdLst/>
             <a:ahLst/>
             <a:cxnLst/>
-            <a:rect r="r" b="b" t="t" l="l"/>
+            <a:rect l="l" t="t" r="r" b="b"/>
             <a:pathLst>
-              <a:path h="7256778" w="6480805">
+              <a:path w="6480805" h="7256778">
                 <a:moveTo>
                   <a:pt x="0" y="0"/>
                 </a:moveTo>
@@ -3568,7 +3550,7 @@
           <a:blipFill>
             <a:blip r:embed="rId3"/>
             <a:stretch>
-              <a:fillRect l="0" t="0" r="0" b="0"/>
+              <a:fillRect/>
             </a:stretch>
           </a:blipFill>
         </p:spPr>
@@ -3582,7 +3564,7 @@
 </file>
 
 <file path=ppt/slides/slide2.xml><?xml version="1.0" encoding="utf-8"?>
-<p:sld xmlns:p="http://schemas.openxmlformats.org/presentationml/2006/main" xmlns:a="http://schemas.openxmlformats.org/drawingml/2006/main" xmlns:r="http://schemas.openxmlformats.org/officeDocument/2006/relationships">
+<p:sld xmlns:a="http://schemas.openxmlformats.org/drawingml/2006/main" xmlns:r="http://schemas.openxmlformats.org/officeDocument/2006/relationships" xmlns:p="http://schemas.openxmlformats.org/presentationml/2006/main">
   <p:cSld>
     <p:spTree>
       <p:nvGrpSpPr>
@@ -3600,12 +3582,12 @@
       </p:grpSpPr>
       <p:grpSp>
         <p:nvGrpSpPr>
-          <p:cNvPr name="Group 2" id="2"/>
+          <p:cNvPr id="2" name="Group 2"/>
           <p:cNvGrpSpPr/>
           <p:nvPr/>
         </p:nvGrpSpPr>
         <p:grpSpPr>
-          <a:xfrm rot="0">
+          <a:xfrm>
             <a:off x="914400" y="548640"/>
             <a:ext cx="16459200" cy="1280160"/>
             <a:chOff x="0" y="0"/>
@@ -3614,12 +3596,12 @@
         </p:grpSpPr>
         <p:sp>
           <p:nvSpPr>
-            <p:cNvPr name="Freeform 3" id="3"/>
+            <p:cNvPr id="3" name="Freeform 3"/>
             <p:cNvSpPr/>
             <p:nvPr/>
           </p:nvSpPr>
           <p:spPr>
-            <a:xfrm flipH="false" flipV="false" rot="0">
+            <a:xfrm>
               <a:off x="0" y="0"/>
               <a:ext cx="21945600" cy="1706880"/>
             </a:xfrm>
@@ -3628,9 +3610,9 @@
               <a:gdLst/>
               <a:ahLst/>
               <a:cxnLst/>
-              <a:rect r="r" b="b" t="t" l="l"/>
+              <a:rect l="l" t="t" r="r" b="b"/>
               <a:pathLst>
-                <a:path h="1706880" w="21945600">
+                <a:path w="21945600" h="1706880">
                   <a:moveTo>
                     <a:pt x="0" y="0"/>
                   </a:moveTo>
@@ -3652,15 +3634,15 @@
                 <a:alphaModFix amt="0"/>
               </a:blip>
               <a:stretch>
-                <a:fillRect l="0" t="-200521" r="0" b="-200521"/>
+                <a:fillRect t="-200521" b="-200521"/>
               </a:stretch>
             </a:blipFill>
           </p:spPr>
         </p:sp>
         <p:sp>
           <p:nvSpPr>
-            <p:cNvPr name="TextBox 4" id="4"/>
-            <p:cNvSpPr txBox="true"/>
+            <p:cNvPr id="4" name="TextBox 4"/>
+            <p:cNvSpPr txBox="1"/>
             <p:nvPr/>
           </p:nvSpPr>
           <p:spPr>
@@ -3673,7 +3655,7 @@
             </a:prstGeom>
           </p:spPr>
           <p:txBody>
-            <a:bodyPr anchor="ctr" rtlCol="false" tIns="0" lIns="0" bIns="0" rIns="0"/>
+            <a:bodyPr lIns="0" tIns="0" rIns="0" bIns="0" rtlCol="0" anchor="ctr"/>
             <a:lstStyle/>
             <a:p>
               <a:pPr algn="l">
@@ -3682,7 +3664,7 @@
                 </a:lnSpc>
               </a:pPr>
               <a:r>
-                <a:rPr lang="en-US" sz="6400" b="true">
+                <a:rPr lang="en-US" sz="6400" b="1">
                   <a:solidFill>
                     <a:srgbClr val="1A1A2E"/>
                   </a:solidFill>
@@ -3699,12 +3681,12 @@
       </p:grpSp>
       <p:grpSp>
         <p:nvGrpSpPr>
-          <p:cNvPr name="Group 5" id="5"/>
+          <p:cNvPr id="5" name="Group 5"/>
           <p:cNvGrpSpPr/>
           <p:nvPr/>
         </p:nvGrpSpPr>
         <p:grpSpPr>
-          <a:xfrm rot="0">
+          <a:xfrm>
             <a:off x="901703" y="1998983"/>
             <a:ext cx="16484603" cy="98555"/>
             <a:chOff x="0" y="0"/>
@@ -3713,12 +3695,12 @@
         </p:grpSpPr>
         <p:sp>
           <p:nvSpPr>
-            <p:cNvPr name="Freeform 6" id="6"/>
+            <p:cNvPr id="6" name="Freeform 6"/>
             <p:cNvSpPr/>
             <p:nvPr/>
           </p:nvSpPr>
           <p:spPr>
-            <a:xfrm flipH="false" flipV="false" rot="0">
+            <a:xfrm>
               <a:off x="0" y="0"/>
               <a:ext cx="21979510" cy="131445"/>
             </a:xfrm>
@@ -3727,9 +3709,9 @@
               <a:gdLst/>
               <a:ahLst/>
               <a:cxnLst/>
-              <a:rect r="r" b="b" t="t" l="l"/>
+              <a:rect l="l" t="t" r="r" b="b"/>
               <a:pathLst>
-                <a:path h="131445" w="21979510">
+                <a:path w="21979510" h="131445">
                   <a:moveTo>
                     <a:pt x="0" y="0"/>
                   </a:moveTo>
@@ -3761,12 +3743,12 @@
       </p:grpSp>
       <p:grpSp>
         <p:nvGrpSpPr>
-          <p:cNvPr name="Group 7" id="7"/>
+          <p:cNvPr id="7" name="Group 7"/>
           <p:cNvGrpSpPr/>
           <p:nvPr/>
         </p:nvGrpSpPr>
         <p:grpSpPr>
-          <a:xfrm rot="0">
+          <a:xfrm>
             <a:off x="901703" y="2456183"/>
             <a:ext cx="8072123" cy="2951483"/>
             <a:chOff x="0" y="0"/>
@@ -3775,12 +3757,12 @@
         </p:grpSpPr>
         <p:sp>
           <p:nvSpPr>
-            <p:cNvPr name="Freeform 8" id="8"/>
+            <p:cNvPr id="8" name="Freeform 8"/>
             <p:cNvSpPr/>
             <p:nvPr/>
           </p:nvSpPr>
           <p:spPr>
-            <a:xfrm flipH="false" flipV="false" rot="0">
+            <a:xfrm>
               <a:off x="0" y="0"/>
               <a:ext cx="10762869" cy="3935349"/>
             </a:xfrm>
@@ -3789,9 +3771,9 @@
               <a:gdLst/>
               <a:ahLst/>
               <a:cxnLst/>
-              <a:rect r="r" b="b" t="t" l="l"/>
+              <a:rect l="l" t="t" r="r" b="b"/>
               <a:pathLst>
-                <a:path h="3935349" w="10762869">
+                <a:path w="10762869" h="3935349">
                   <a:moveTo>
                     <a:pt x="0" y="295148"/>
                   </a:moveTo>
@@ -3843,12 +3825,12 @@
       </p:grpSp>
       <p:grpSp>
         <p:nvGrpSpPr>
-          <p:cNvPr name="Group 9" id="9"/>
+          <p:cNvPr id="9" name="Group 9"/>
           <p:cNvGrpSpPr/>
           <p:nvPr/>
         </p:nvGrpSpPr>
         <p:grpSpPr>
-          <a:xfrm rot="0">
+          <a:xfrm>
             <a:off x="1291590" y="3213624"/>
             <a:ext cx="822960" cy="822960"/>
             <a:chOff x="0" y="0"/>
@@ -3857,12 +3839,12 @@
         </p:grpSpPr>
         <p:sp>
           <p:nvSpPr>
-            <p:cNvPr name="Freeform 10" id="10" descr="preencoded.png"/>
+            <p:cNvPr id="10" name="Freeform 10" descr="preencoded.png"/>
             <p:cNvSpPr/>
             <p:nvPr/>
           </p:nvSpPr>
           <p:spPr>
-            <a:xfrm flipH="false" flipV="false" rot="0">
+            <a:xfrm>
               <a:off x="0" y="0"/>
               <a:ext cx="1097280" cy="1097280"/>
             </a:xfrm>
@@ -3871,9 +3853,9 @@
               <a:gdLst/>
               <a:ahLst/>
               <a:cxnLst/>
-              <a:rect r="r" b="b" t="t" l="l"/>
+              <a:rect l="l" t="t" r="r" b="b"/>
               <a:pathLst>
-                <a:path h="1097280" w="1097280">
+                <a:path w="1097280" h="1097280">
                   <a:moveTo>
                     <a:pt x="0" y="0"/>
                   </a:moveTo>
@@ -3896,7 +3878,7 @@
             <a:blipFill>
               <a:blip r:embed="rId3"/>
               <a:stretch>
-                <a:fillRect l="0" t="0" r="0" b="0"/>
+                <a:fillRect/>
               </a:stretch>
             </a:blipFill>
           </p:spPr>
@@ -3904,12 +3886,12 @@
       </p:grpSp>
       <p:grpSp>
         <p:nvGrpSpPr>
-          <p:cNvPr name="Group 11" id="11"/>
+          <p:cNvPr id="11" name="Group 11"/>
           <p:cNvGrpSpPr/>
           <p:nvPr/>
         </p:nvGrpSpPr>
         <p:grpSpPr>
-          <a:xfrm rot="0">
+          <a:xfrm>
             <a:off x="2286000" y="2990095"/>
             <a:ext cx="6400800" cy="1883659"/>
             <a:chOff x="0" y="0"/>
@@ -3918,12 +3900,12 @@
         </p:grpSpPr>
         <p:grpSp>
           <p:nvGrpSpPr>
-            <p:cNvPr name="Group 12" id="12"/>
+            <p:cNvPr id="12" name="Group 12"/>
             <p:cNvGrpSpPr/>
             <p:nvPr/>
           </p:nvGrpSpPr>
           <p:grpSpPr>
-            <a:xfrm rot="0">
+            <a:xfrm>
               <a:off x="0" y="0"/>
               <a:ext cx="8534400" cy="926592"/>
               <a:chOff x="0" y="0"/>
@@ -3932,12 +3914,12 @@
           </p:grpSpPr>
           <p:sp>
             <p:nvSpPr>
-              <p:cNvPr name="Freeform 13" id="13"/>
+              <p:cNvPr id="13" name="Freeform 13"/>
               <p:cNvSpPr/>
               <p:nvPr/>
             </p:nvSpPr>
             <p:spPr>
-              <a:xfrm flipH="false" flipV="false" rot="0">
+              <a:xfrm>
                 <a:off x="0" y="0"/>
                 <a:ext cx="8534400" cy="926592"/>
               </a:xfrm>
@@ -3946,9 +3928,9 @@
                 <a:gdLst/>
                 <a:ahLst/>
                 <a:cxnLst/>
-                <a:rect r="r" b="b" t="t" l="l"/>
+                <a:rect l="l" t="t" r="r" b="b"/>
                 <a:pathLst>
-                  <a:path h="926592" w="8534400">
+                  <a:path w="8534400" h="926592">
                     <a:moveTo>
                       <a:pt x="0" y="0"/>
                     </a:moveTo>
@@ -3970,15 +3952,15 @@
                   <a:alphaModFix amt="0"/>
                 </a:blip>
                 <a:stretch>
-                  <a:fillRect l="0" t="-129467" r="0" b="-129467"/>
+                  <a:fillRect t="-129467" b="-129467"/>
                 </a:stretch>
               </a:blipFill>
             </p:spPr>
           </p:sp>
           <p:sp>
             <p:nvSpPr>
-              <p:cNvPr name="TextBox 14" id="14"/>
-              <p:cNvSpPr txBox="true"/>
+              <p:cNvPr id="14" name="TextBox 14"/>
+              <p:cNvSpPr txBox="1"/>
               <p:nvPr/>
             </p:nvSpPr>
             <p:spPr>
@@ -3991,7 +3973,7 @@
               </a:prstGeom>
             </p:spPr>
             <p:txBody>
-              <a:bodyPr anchor="ctr" rtlCol="false" tIns="0" lIns="0" bIns="0" rIns="0"/>
+              <a:bodyPr lIns="0" tIns="0" rIns="0" bIns="0" rtlCol="0" anchor="ctr"/>
               <a:lstStyle/>
               <a:p>
                 <a:pPr algn="l">
@@ -4000,7 +3982,7 @@
                   </a:lnSpc>
                 </a:pPr>
                 <a:r>
-                  <a:rPr lang="en-US" sz="2600" b="true">
+                  <a:rPr lang="en-US" sz="2600" b="1">
                     <a:solidFill>
                       <a:srgbClr val="1A1A2E"/>
                     </a:solidFill>
@@ -4017,12 +3999,12 @@
         </p:grpSp>
         <p:grpSp>
           <p:nvGrpSpPr>
-            <p:cNvPr name="Group 15" id="15"/>
+            <p:cNvPr id="15" name="Group 15"/>
             <p:cNvGrpSpPr/>
             <p:nvPr/>
           </p:nvGrpSpPr>
           <p:grpSpPr>
-            <a:xfrm rot="0">
+            <a:xfrm>
               <a:off x="0" y="438906"/>
               <a:ext cx="8534400" cy="2072640"/>
               <a:chOff x="0" y="0"/>
@@ -4031,12 +4013,12 @@
           </p:grpSpPr>
           <p:sp>
             <p:nvSpPr>
-              <p:cNvPr name="Freeform 16" id="16"/>
+              <p:cNvPr id="16" name="Freeform 16"/>
               <p:cNvSpPr/>
               <p:nvPr/>
             </p:nvSpPr>
             <p:spPr>
-              <a:xfrm flipH="false" flipV="false" rot="0">
+              <a:xfrm>
                 <a:off x="0" y="0"/>
                 <a:ext cx="8534400" cy="2072640"/>
               </a:xfrm>
@@ -4045,9 +4027,9 @@
                 <a:gdLst/>
                 <a:ahLst/>
                 <a:cxnLst/>
-                <a:rect r="r" b="b" t="t" l="l"/>
+                <a:rect l="l" t="t" r="r" b="b"/>
                 <a:pathLst>
-                  <a:path h="2072640" w="8534400">
+                  <a:path w="8534400" h="2072640">
                     <a:moveTo>
                       <a:pt x="0" y="0"/>
                     </a:moveTo>
@@ -4069,15 +4051,15 @@
                   <a:alphaModFix amt="0"/>
                 </a:blip>
                 <a:stretch>
-                  <a:fillRect l="0" t="-30232" r="0" b="-30232"/>
+                  <a:fillRect t="-30232" b="-30232"/>
                 </a:stretch>
               </a:blipFill>
             </p:spPr>
           </p:sp>
           <p:sp>
             <p:nvSpPr>
-              <p:cNvPr name="TextBox 17" id="17"/>
-              <p:cNvSpPr txBox="true"/>
+              <p:cNvPr id="17" name="TextBox 17"/>
+              <p:cNvSpPr txBox="1"/>
               <p:nvPr/>
             </p:nvSpPr>
             <p:spPr>
@@ -4090,7 +4072,7 @@
               </a:prstGeom>
             </p:spPr>
             <p:txBody>
-              <a:bodyPr anchor="ctr" rtlCol="false" tIns="0" lIns="0" bIns="0" rIns="0"/>
+              <a:bodyPr lIns="0" tIns="0" rIns="0" bIns="0" rtlCol="0" anchor="ctr"/>
               <a:lstStyle/>
               <a:p>
                 <a:pPr algn="l">
@@ -4117,12 +4099,12 @@
       </p:grpSp>
       <p:grpSp>
         <p:nvGrpSpPr>
-          <p:cNvPr name="Group 18" id="18"/>
+          <p:cNvPr id="18" name="Group 18"/>
           <p:cNvGrpSpPr/>
           <p:nvPr/>
         </p:nvGrpSpPr>
         <p:grpSpPr>
-          <a:xfrm rot="0">
+          <a:xfrm>
             <a:off x="9588503" y="2456183"/>
             <a:ext cx="8072123" cy="2951483"/>
             <a:chOff x="0" y="0"/>
@@ -4131,12 +4113,12 @@
         </p:grpSpPr>
         <p:sp>
           <p:nvSpPr>
-            <p:cNvPr name="Freeform 19" id="19"/>
+            <p:cNvPr id="19" name="Freeform 19"/>
             <p:cNvSpPr/>
             <p:nvPr/>
           </p:nvSpPr>
           <p:spPr>
-            <a:xfrm flipH="false" flipV="false" rot="0">
+            <a:xfrm>
               <a:off x="0" y="0"/>
               <a:ext cx="10762869" cy="3935349"/>
             </a:xfrm>
@@ -4145,9 +4127,9 @@
               <a:gdLst/>
               <a:ahLst/>
               <a:cxnLst/>
-              <a:rect r="r" b="b" t="t" l="l"/>
+              <a:rect l="l" t="t" r="r" b="b"/>
               <a:pathLst>
-                <a:path h="3935349" w="10762869">
+                <a:path w="10762869" h="3935349">
                   <a:moveTo>
                     <a:pt x="0" y="295148"/>
                   </a:moveTo>
@@ -4199,12 +4181,12 @@
       </p:grpSp>
       <p:grpSp>
         <p:nvGrpSpPr>
-          <p:cNvPr name="Group 20" id="20"/>
+          <p:cNvPr id="20" name="Group 20"/>
           <p:cNvGrpSpPr/>
           <p:nvPr/>
         </p:nvGrpSpPr>
         <p:grpSpPr>
-          <a:xfrm rot="0">
+          <a:xfrm>
             <a:off x="9966960" y="3213624"/>
             <a:ext cx="822960" cy="822960"/>
             <a:chOff x="0" y="0"/>
@@ -4213,12 +4195,12 @@
         </p:grpSpPr>
         <p:sp>
           <p:nvSpPr>
-            <p:cNvPr name="Freeform 21" id="21" descr="preencoded.png"/>
+            <p:cNvPr id="21" name="Freeform 21" descr="preencoded.png"/>
             <p:cNvSpPr/>
             <p:nvPr/>
           </p:nvSpPr>
           <p:spPr>
-            <a:xfrm flipH="false" flipV="false" rot="0">
+            <a:xfrm>
               <a:off x="0" y="0"/>
               <a:ext cx="1097280" cy="1097280"/>
             </a:xfrm>
@@ -4227,9 +4209,9 @@
               <a:gdLst/>
               <a:ahLst/>
               <a:cxnLst/>
-              <a:rect r="r" b="b" t="t" l="l"/>
+              <a:rect l="l" t="t" r="r" b="b"/>
               <a:pathLst>
-                <a:path h="1097280" w="1097280">
+                <a:path w="1097280" h="1097280">
                   <a:moveTo>
                     <a:pt x="0" y="0"/>
                   </a:moveTo>
@@ -4252,7 +4234,7 @@
             <a:blipFill>
               <a:blip r:embed="rId4"/>
               <a:stretch>
-                <a:fillRect l="0" t="0" r="0" b="0"/>
+                <a:fillRect/>
               </a:stretch>
             </a:blipFill>
           </p:spPr>
@@ -4260,12 +4242,12 @@
       </p:grpSp>
       <p:grpSp>
         <p:nvGrpSpPr>
-          <p:cNvPr name="Group 22" id="22"/>
+          <p:cNvPr id="22" name="Group 22"/>
           <p:cNvGrpSpPr/>
           <p:nvPr/>
         </p:nvGrpSpPr>
         <p:grpSpPr>
-          <a:xfrm rot="0">
+          <a:xfrm>
             <a:off x="10960094" y="2860296"/>
             <a:ext cx="6402705" cy="1947672"/>
             <a:chOff x="0" y="0"/>
@@ -4274,12 +4256,12 @@
         </p:grpSpPr>
         <p:grpSp>
           <p:nvGrpSpPr>
-            <p:cNvPr name="Group 23" id="23"/>
+            <p:cNvPr id="23" name="Group 23"/>
             <p:cNvGrpSpPr/>
             <p:nvPr/>
           </p:nvGrpSpPr>
           <p:grpSpPr>
-            <a:xfrm rot="0">
+            <a:xfrm>
               <a:off x="0" y="0"/>
               <a:ext cx="8534400" cy="926592"/>
               <a:chOff x="0" y="0"/>
@@ -4288,12 +4270,12 @@
           </p:grpSpPr>
           <p:sp>
             <p:nvSpPr>
-              <p:cNvPr name="Freeform 24" id="24"/>
+              <p:cNvPr id="24" name="Freeform 24"/>
               <p:cNvSpPr/>
               <p:nvPr/>
             </p:nvSpPr>
             <p:spPr>
-              <a:xfrm flipH="false" flipV="false" rot="0">
+              <a:xfrm>
                 <a:off x="0" y="0"/>
                 <a:ext cx="8534400" cy="926592"/>
               </a:xfrm>
@@ -4302,9 +4284,9 @@
                 <a:gdLst/>
                 <a:ahLst/>
                 <a:cxnLst/>
-                <a:rect r="r" b="b" t="t" l="l"/>
+                <a:rect l="l" t="t" r="r" b="b"/>
                 <a:pathLst>
-                  <a:path h="926592" w="8534400">
+                  <a:path w="8534400" h="926592">
                     <a:moveTo>
                       <a:pt x="0" y="0"/>
                     </a:moveTo>
@@ -4326,15 +4308,15 @@
                   <a:alphaModFix amt="0"/>
                 </a:blip>
                 <a:stretch>
-                  <a:fillRect l="0" t="-129467" r="0" b="-129467"/>
+                  <a:fillRect t="-129467" b="-129467"/>
                 </a:stretch>
               </a:blipFill>
             </p:spPr>
           </p:sp>
           <p:sp>
             <p:nvSpPr>
-              <p:cNvPr name="TextBox 25" id="25"/>
-              <p:cNvSpPr txBox="true"/>
+              <p:cNvPr id="25" name="TextBox 25"/>
+              <p:cNvSpPr txBox="1"/>
               <p:nvPr/>
             </p:nvSpPr>
             <p:spPr>
@@ -4347,7 +4329,7 @@
               </a:prstGeom>
             </p:spPr>
             <p:txBody>
-              <a:bodyPr anchor="ctr" rtlCol="false" tIns="0" lIns="0" bIns="0" rIns="0"/>
+              <a:bodyPr lIns="0" tIns="0" rIns="0" bIns="0" rtlCol="0" anchor="ctr"/>
               <a:lstStyle/>
               <a:p>
                 <a:pPr algn="l">
@@ -4356,7 +4338,7 @@
                   </a:lnSpc>
                 </a:pPr>
                 <a:r>
-                  <a:rPr lang="en-US" sz="2600" b="true">
+                  <a:rPr lang="en-US" sz="2600" b="1">
                     <a:solidFill>
                       <a:srgbClr val="1A1A2E"/>
                     </a:solidFill>
@@ -4373,12 +4355,12 @@
         </p:grpSp>
         <p:grpSp>
           <p:nvGrpSpPr>
-            <p:cNvPr name="Group 26" id="26"/>
+            <p:cNvPr id="26" name="Group 26"/>
             <p:cNvGrpSpPr/>
             <p:nvPr/>
           </p:nvGrpSpPr>
           <p:grpSpPr>
-            <a:xfrm rot="0">
+            <a:xfrm>
               <a:off x="2540" y="524256"/>
               <a:ext cx="8534400" cy="2072640"/>
               <a:chOff x="0" y="0"/>
@@ -4387,12 +4369,12 @@
           </p:grpSpPr>
           <p:sp>
             <p:nvSpPr>
-              <p:cNvPr name="Freeform 27" id="27"/>
+              <p:cNvPr id="27" name="Freeform 27"/>
               <p:cNvSpPr/>
               <p:nvPr/>
             </p:nvSpPr>
             <p:spPr>
-              <a:xfrm flipH="false" flipV="false" rot="0">
+              <a:xfrm>
                 <a:off x="0" y="0"/>
                 <a:ext cx="8534400" cy="2072640"/>
               </a:xfrm>
@@ -4401,9 +4383,9 @@
                 <a:gdLst/>
                 <a:ahLst/>
                 <a:cxnLst/>
-                <a:rect r="r" b="b" t="t" l="l"/>
+                <a:rect l="l" t="t" r="r" b="b"/>
                 <a:pathLst>
-                  <a:path h="2072640" w="8534400">
+                  <a:path w="8534400" h="2072640">
                     <a:moveTo>
                       <a:pt x="0" y="0"/>
                     </a:moveTo>
@@ -4425,15 +4407,15 @@
                   <a:alphaModFix amt="0"/>
                 </a:blip>
                 <a:stretch>
-                  <a:fillRect l="0" t="-30232" r="0" b="-30232"/>
+                  <a:fillRect t="-30232" b="-30232"/>
                 </a:stretch>
               </a:blipFill>
             </p:spPr>
           </p:sp>
           <p:sp>
             <p:nvSpPr>
-              <p:cNvPr name="TextBox 28" id="28"/>
-              <p:cNvSpPr txBox="true"/>
+              <p:cNvPr id="28" name="TextBox 28"/>
+              <p:cNvSpPr txBox="1"/>
               <p:nvPr/>
             </p:nvSpPr>
             <p:spPr>
@@ -4446,7 +4428,7 @@
               </a:prstGeom>
             </p:spPr>
             <p:txBody>
-              <a:bodyPr anchor="ctr" rtlCol="false" tIns="0" lIns="0" bIns="0" rIns="0"/>
+              <a:bodyPr lIns="0" tIns="0" rIns="0" bIns="0" rtlCol="0" anchor="ctr"/>
               <a:lstStyle/>
               <a:p>
                 <a:pPr algn="l">
@@ -4473,12 +4455,12 @@
       </p:grpSp>
       <p:grpSp>
         <p:nvGrpSpPr>
-          <p:cNvPr name="Group 29" id="29"/>
+          <p:cNvPr id="29" name="Group 29"/>
           <p:cNvGrpSpPr/>
           <p:nvPr/>
         </p:nvGrpSpPr>
         <p:grpSpPr>
-          <a:xfrm rot="0">
+          <a:xfrm>
             <a:off x="901703" y="5839463"/>
             <a:ext cx="8072123" cy="2951483"/>
             <a:chOff x="0" y="0"/>
@@ -4487,12 +4469,12 @@
         </p:grpSpPr>
         <p:sp>
           <p:nvSpPr>
-            <p:cNvPr name="Freeform 30" id="30"/>
+            <p:cNvPr id="30" name="Freeform 30"/>
             <p:cNvSpPr/>
             <p:nvPr/>
           </p:nvSpPr>
           <p:spPr>
-            <a:xfrm flipH="false" flipV="false" rot="0">
+            <a:xfrm>
               <a:off x="0" y="0"/>
               <a:ext cx="10762869" cy="3935349"/>
             </a:xfrm>
@@ -4501,9 +4483,9 @@
               <a:gdLst/>
               <a:ahLst/>
               <a:cxnLst/>
-              <a:rect r="r" b="b" t="t" l="l"/>
+              <a:rect l="l" t="t" r="r" b="b"/>
               <a:pathLst>
-                <a:path h="3935349" w="10762869">
+                <a:path w="10762869" h="3935349">
                   <a:moveTo>
                     <a:pt x="0" y="295148"/>
                   </a:moveTo>
@@ -4555,12 +4537,12 @@
       </p:grpSp>
       <p:grpSp>
         <p:nvGrpSpPr>
-          <p:cNvPr name="Group 31" id="31"/>
+          <p:cNvPr id="31" name="Group 31"/>
           <p:cNvGrpSpPr/>
           <p:nvPr/>
         </p:nvGrpSpPr>
         <p:grpSpPr>
-          <a:xfrm rot="0">
+          <a:xfrm>
             <a:off x="1280160" y="6684016"/>
             <a:ext cx="822960" cy="822960"/>
             <a:chOff x="0" y="0"/>
@@ -4569,12 +4551,12 @@
         </p:grpSpPr>
         <p:sp>
           <p:nvSpPr>
-            <p:cNvPr name="Freeform 32" id="32" descr="preencoded.png"/>
+            <p:cNvPr id="32" name="Freeform 32" descr="preencoded.png"/>
             <p:cNvSpPr/>
             <p:nvPr/>
           </p:nvSpPr>
           <p:spPr>
-            <a:xfrm flipH="false" flipV="false" rot="0">
+            <a:xfrm>
               <a:off x="0" y="0"/>
               <a:ext cx="1097280" cy="1097280"/>
             </a:xfrm>
@@ -4583,9 +4565,9 @@
               <a:gdLst/>
               <a:ahLst/>
               <a:cxnLst/>
-              <a:rect r="r" b="b" t="t" l="l"/>
+              <a:rect l="l" t="t" r="r" b="b"/>
               <a:pathLst>
-                <a:path h="1097280" w="1097280">
+                <a:path w="1097280" h="1097280">
                   <a:moveTo>
                     <a:pt x="0" y="0"/>
                   </a:moveTo>
@@ -4608,7 +4590,7 @@
             <a:blipFill>
               <a:blip r:embed="rId5"/>
               <a:stretch>
-                <a:fillRect l="0" t="0" r="0" b="0"/>
+                <a:fillRect/>
               </a:stretch>
             </a:blipFill>
           </p:spPr>
@@ -4616,12 +4598,12 @@
       </p:grpSp>
       <p:grpSp>
         <p:nvGrpSpPr>
-          <p:cNvPr name="Group 33" id="33"/>
+          <p:cNvPr id="33" name="Group 33"/>
           <p:cNvGrpSpPr/>
           <p:nvPr/>
         </p:nvGrpSpPr>
         <p:grpSpPr>
-          <a:xfrm rot="0">
+          <a:xfrm>
             <a:off x="2286000" y="6373370"/>
             <a:ext cx="6400800" cy="1883659"/>
             <a:chOff x="0" y="0"/>
@@ -4630,12 +4612,12 @@
         </p:grpSpPr>
         <p:grpSp>
           <p:nvGrpSpPr>
-            <p:cNvPr name="Group 34" id="34"/>
+            <p:cNvPr id="34" name="Group 34"/>
             <p:cNvGrpSpPr/>
             <p:nvPr/>
           </p:nvGrpSpPr>
           <p:grpSpPr>
-            <a:xfrm rot="0">
+            <a:xfrm>
               <a:off x="0" y="0"/>
               <a:ext cx="8534400" cy="926592"/>
               <a:chOff x="0" y="0"/>
@@ -4644,12 +4626,12 @@
           </p:grpSpPr>
           <p:sp>
             <p:nvSpPr>
-              <p:cNvPr name="Freeform 35" id="35"/>
+              <p:cNvPr id="35" name="Freeform 35"/>
               <p:cNvSpPr/>
               <p:nvPr/>
             </p:nvSpPr>
             <p:spPr>
-              <a:xfrm flipH="false" flipV="false" rot="0">
+              <a:xfrm>
                 <a:off x="0" y="0"/>
                 <a:ext cx="8534400" cy="926592"/>
               </a:xfrm>
@@ -4658,9 +4640,9 @@
                 <a:gdLst/>
                 <a:ahLst/>
                 <a:cxnLst/>
-                <a:rect r="r" b="b" t="t" l="l"/>
+                <a:rect l="l" t="t" r="r" b="b"/>
                 <a:pathLst>
-                  <a:path h="926592" w="8534400">
+                  <a:path w="8534400" h="926592">
                     <a:moveTo>
                       <a:pt x="0" y="0"/>
                     </a:moveTo>
@@ -4682,15 +4664,15 @@
                   <a:alphaModFix amt="0"/>
                 </a:blip>
                 <a:stretch>
-                  <a:fillRect l="0" t="-129467" r="0" b="-129467"/>
+                  <a:fillRect t="-129467" b="-129467"/>
                 </a:stretch>
               </a:blipFill>
             </p:spPr>
           </p:sp>
           <p:sp>
             <p:nvSpPr>
-              <p:cNvPr name="TextBox 36" id="36"/>
-              <p:cNvSpPr txBox="true"/>
+              <p:cNvPr id="36" name="TextBox 36"/>
+              <p:cNvSpPr txBox="1"/>
               <p:nvPr/>
             </p:nvSpPr>
             <p:spPr>
@@ -4703,7 +4685,7 @@
               </a:prstGeom>
             </p:spPr>
             <p:txBody>
-              <a:bodyPr anchor="ctr" rtlCol="false" tIns="0" lIns="0" bIns="0" rIns="0"/>
+              <a:bodyPr lIns="0" tIns="0" rIns="0" bIns="0" rtlCol="0" anchor="ctr"/>
               <a:lstStyle/>
               <a:p>
                 <a:pPr algn="l">
@@ -4712,7 +4694,7 @@
                   </a:lnSpc>
                 </a:pPr>
                 <a:r>
-                  <a:rPr lang="en-US" sz="2600" b="true">
+                  <a:rPr lang="en-US" sz="2600" b="1">
                     <a:solidFill>
                       <a:srgbClr val="1A1A2E"/>
                     </a:solidFill>
@@ -4729,12 +4711,12 @@
         </p:grpSp>
         <p:grpSp>
           <p:nvGrpSpPr>
-            <p:cNvPr name="Group 37" id="37"/>
+            <p:cNvPr id="37" name="Group 37"/>
             <p:cNvGrpSpPr/>
             <p:nvPr/>
           </p:nvGrpSpPr>
           <p:grpSpPr>
-            <a:xfrm rot="0">
+            <a:xfrm>
               <a:off x="0" y="438906"/>
               <a:ext cx="8534400" cy="2072640"/>
               <a:chOff x="0" y="0"/>
@@ -4743,12 +4725,12 @@
           </p:grpSpPr>
           <p:sp>
             <p:nvSpPr>
-              <p:cNvPr name="Freeform 38" id="38"/>
+              <p:cNvPr id="38" name="Freeform 38"/>
               <p:cNvSpPr/>
               <p:nvPr/>
             </p:nvSpPr>
             <p:spPr>
-              <a:xfrm flipH="false" flipV="false" rot="0">
+              <a:xfrm>
                 <a:off x="0" y="0"/>
                 <a:ext cx="8534400" cy="2072640"/>
               </a:xfrm>
@@ -4757,9 +4739,9 @@
                 <a:gdLst/>
                 <a:ahLst/>
                 <a:cxnLst/>
-                <a:rect r="r" b="b" t="t" l="l"/>
+                <a:rect l="l" t="t" r="r" b="b"/>
                 <a:pathLst>
-                  <a:path h="2072640" w="8534400">
+                  <a:path w="8534400" h="2072640">
                     <a:moveTo>
                       <a:pt x="0" y="0"/>
                     </a:moveTo>
@@ -4781,15 +4763,15 @@
                   <a:alphaModFix amt="0"/>
                 </a:blip>
                 <a:stretch>
-                  <a:fillRect l="0" t="-30232" r="0" b="-30232"/>
+                  <a:fillRect t="-30232" b="-30232"/>
                 </a:stretch>
               </a:blipFill>
             </p:spPr>
           </p:sp>
           <p:sp>
             <p:nvSpPr>
-              <p:cNvPr name="TextBox 39" id="39"/>
-              <p:cNvSpPr txBox="true"/>
+              <p:cNvPr id="39" name="TextBox 39"/>
+              <p:cNvSpPr txBox="1"/>
               <p:nvPr/>
             </p:nvSpPr>
             <p:spPr>
@@ -4802,7 +4784,7 @@
               </a:prstGeom>
             </p:spPr>
             <p:txBody>
-              <a:bodyPr anchor="ctr" rtlCol="false" tIns="0" lIns="0" bIns="0" rIns="0"/>
+              <a:bodyPr lIns="0" tIns="0" rIns="0" bIns="0" rtlCol="0" anchor="ctr"/>
               <a:lstStyle/>
               <a:p>
                 <a:pPr algn="l">
@@ -4829,12 +4811,12 @@
       </p:grpSp>
       <p:grpSp>
         <p:nvGrpSpPr>
-          <p:cNvPr name="Group 40" id="40"/>
+          <p:cNvPr id="40" name="Group 40"/>
           <p:cNvGrpSpPr/>
           <p:nvPr/>
         </p:nvGrpSpPr>
         <p:grpSpPr>
-          <a:xfrm rot="0">
+          <a:xfrm>
             <a:off x="9588503" y="5839463"/>
             <a:ext cx="8072123" cy="2951483"/>
             <a:chOff x="0" y="0"/>
@@ -4843,12 +4825,12 @@
         </p:grpSpPr>
         <p:sp>
           <p:nvSpPr>
-            <p:cNvPr name="Freeform 41" id="41"/>
+            <p:cNvPr id="41" name="Freeform 41"/>
             <p:cNvSpPr/>
             <p:nvPr/>
           </p:nvSpPr>
           <p:spPr>
-            <a:xfrm flipH="false" flipV="false" rot="0">
+            <a:xfrm>
               <a:off x="0" y="0"/>
               <a:ext cx="10762869" cy="3935349"/>
             </a:xfrm>
@@ -4857,9 +4839,9 @@
               <a:gdLst/>
               <a:ahLst/>
               <a:cxnLst/>
-              <a:rect r="r" b="b" t="t" l="l"/>
+              <a:rect l="l" t="t" r="r" b="b"/>
               <a:pathLst>
-                <a:path h="3935349" w="10762869">
+                <a:path w="10762869" h="3935349">
                   <a:moveTo>
                     <a:pt x="0" y="295148"/>
                   </a:moveTo>
@@ -4911,12 +4893,12 @@
       </p:grpSp>
       <p:grpSp>
         <p:nvGrpSpPr>
-          <p:cNvPr name="Group 42" id="42"/>
+          <p:cNvPr id="42" name="Group 42"/>
           <p:cNvGrpSpPr/>
           <p:nvPr/>
         </p:nvGrpSpPr>
         <p:grpSpPr>
-          <a:xfrm rot="0">
+          <a:xfrm>
             <a:off x="9966960" y="6684016"/>
             <a:ext cx="822960" cy="822960"/>
             <a:chOff x="0" y="0"/>
@@ -4925,12 +4907,12 @@
         </p:grpSpPr>
         <p:sp>
           <p:nvSpPr>
-            <p:cNvPr name="Freeform 43" id="43" descr="preencoded.png"/>
+            <p:cNvPr id="43" name="Freeform 43" descr="preencoded.png"/>
             <p:cNvSpPr/>
             <p:nvPr/>
           </p:nvSpPr>
           <p:spPr>
-            <a:xfrm flipH="false" flipV="false" rot="0">
+            <a:xfrm>
               <a:off x="0" y="0"/>
               <a:ext cx="1097280" cy="1097280"/>
             </a:xfrm>
@@ -4939,9 +4921,9 @@
               <a:gdLst/>
               <a:ahLst/>
               <a:cxnLst/>
-              <a:rect r="r" b="b" t="t" l="l"/>
+              <a:rect l="l" t="t" r="r" b="b"/>
               <a:pathLst>
-                <a:path h="1097280" w="1097280">
+                <a:path w="1097280" h="1097280">
                   <a:moveTo>
                     <a:pt x="0" y="0"/>
                   </a:moveTo>
@@ -4964,7 +4946,7 @@
             <a:blipFill>
               <a:blip r:embed="rId6"/>
               <a:stretch>
-                <a:fillRect l="0" t="0" r="0" b="0"/>
+                <a:fillRect/>
               </a:stretch>
             </a:blipFill>
           </p:spPr>
@@ -4972,12 +4954,12 @@
       </p:grpSp>
       <p:grpSp>
         <p:nvGrpSpPr>
-          <p:cNvPr name="Group 44" id="44"/>
+          <p:cNvPr id="44" name="Group 44"/>
           <p:cNvGrpSpPr/>
           <p:nvPr/>
         </p:nvGrpSpPr>
         <p:grpSpPr>
-          <a:xfrm rot="0">
+          <a:xfrm>
             <a:off x="10960094" y="6373370"/>
             <a:ext cx="6413506" cy="1883659"/>
             <a:chOff x="0" y="0"/>
@@ -4986,12 +4968,12 @@
         </p:grpSpPr>
         <p:grpSp>
           <p:nvGrpSpPr>
-            <p:cNvPr name="Group 45" id="45"/>
+            <p:cNvPr id="45" name="Group 45"/>
             <p:cNvGrpSpPr/>
             <p:nvPr/>
           </p:nvGrpSpPr>
           <p:grpSpPr>
-            <a:xfrm rot="0">
+            <a:xfrm>
               <a:off x="16942" y="0"/>
               <a:ext cx="8534400" cy="926592"/>
               <a:chOff x="0" y="0"/>
@@ -5000,12 +4982,12 @@
           </p:grpSpPr>
           <p:sp>
             <p:nvSpPr>
-              <p:cNvPr name="Freeform 46" id="46"/>
+              <p:cNvPr id="46" name="Freeform 46"/>
               <p:cNvSpPr/>
               <p:nvPr/>
             </p:nvSpPr>
             <p:spPr>
-              <a:xfrm flipH="false" flipV="false" rot="0">
+              <a:xfrm>
                 <a:off x="0" y="0"/>
                 <a:ext cx="8534400" cy="926592"/>
               </a:xfrm>
@@ -5014,9 +4996,9 @@
                 <a:gdLst/>
                 <a:ahLst/>
                 <a:cxnLst/>
-                <a:rect r="r" b="b" t="t" l="l"/>
+                <a:rect l="l" t="t" r="r" b="b"/>
                 <a:pathLst>
-                  <a:path h="926592" w="8534400">
+                  <a:path w="8534400" h="926592">
                     <a:moveTo>
                       <a:pt x="0" y="0"/>
                     </a:moveTo>
@@ -5038,15 +5020,15 @@
                   <a:alphaModFix amt="0"/>
                 </a:blip>
                 <a:stretch>
-                  <a:fillRect l="0" t="-129467" r="0" b="-129467"/>
+                  <a:fillRect t="-129467" b="-129467"/>
                 </a:stretch>
               </a:blipFill>
             </p:spPr>
           </p:sp>
           <p:sp>
             <p:nvSpPr>
-              <p:cNvPr name="TextBox 47" id="47"/>
-              <p:cNvSpPr txBox="true"/>
+              <p:cNvPr id="47" name="TextBox 47"/>
+              <p:cNvSpPr txBox="1"/>
               <p:nvPr/>
             </p:nvSpPr>
             <p:spPr>
@@ -5059,7 +5041,7 @@
               </a:prstGeom>
             </p:spPr>
             <p:txBody>
-              <a:bodyPr anchor="ctr" rtlCol="false" tIns="0" lIns="0" bIns="0" rIns="0"/>
+              <a:bodyPr lIns="0" tIns="0" rIns="0" bIns="0" rtlCol="0" anchor="ctr"/>
               <a:lstStyle/>
               <a:p>
                 <a:pPr algn="l">
@@ -5068,7 +5050,7 @@
                   </a:lnSpc>
                 </a:pPr>
                 <a:r>
-                  <a:rPr lang="en-US" sz="2600" b="true">
+                  <a:rPr lang="en-US" sz="2600" b="1">
                     <a:solidFill>
                       <a:srgbClr val="1A1A2E"/>
                     </a:solidFill>
@@ -5085,12 +5067,12 @@
         </p:grpSp>
         <p:grpSp>
           <p:nvGrpSpPr>
-            <p:cNvPr name="Group 48" id="48"/>
+            <p:cNvPr id="48" name="Group 48"/>
             <p:cNvGrpSpPr/>
             <p:nvPr/>
           </p:nvGrpSpPr>
           <p:grpSpPr>
-            <a:xfrm rot="0">
+            <a:xfrm>
               <a:off x="0" y="438906"/>
               <a:ext cx="8534400" cy="2072640"/>
               <a:chOff x="0" y="0"/>
@@ -5099,12 +5081,12 @@
           </p:grpSpPr>
           <p:sp>
             <p:nvSpPr>
-              <p:cNvPr name="Freeform 49" id="49"/>
+              <p:cNvPr id="49" name="Freeform 49"/>
               <p:cNvSpPr/>
               <p:nvPr/>
             </p:nvSpPr>
             <p:spPr>
-              <a:xfrm flipH="false" flipV="false" rot="0">
+              <a:xfrm>
                 <a:off x="0" y="0"/>
                 <a:ext cx="8534400" cy="2072640"/>
               </a:xfrm>
@@ -5113,9 +5095,9 @@
                 <a:gdLst/>
                 <a:ahLst/>
                 <a:cxnLst/>
-                <a:rect r="r" b="b" t="t" l="l"/>
+                <a:rect l="l" t="t" r="r" b="b"/>
                 <a:pathLst>
-                  <a:path h="2072640" w="8534400">
+                  <a:path w="8534400" h="2072640">
                     <a:moveTo>
                       <a:pt x="0" y="0"/>
                     </a:moveTo>
@@ -5137,15 +5119,15 @@
                   <a:alphaModFix amt="0"/>
                 </a:blip>
                 <a:stretch>
-                  <a:fillRect l="0" t="-30232" r="0" b="-30232"/>
+                  <a:fillRect t="-30232" b="-30232"/>
                 </a:stretch>
               </a:blipFill>
             </p:spPr>
           </p:sp>
           <p:sp>
             <p:nvSpPr>
-              <p:cNvPr name="TextBox 50" id="50"/>
-              <p:cNvSpPr txBox="true"/>
+              <p:cNvPr id="50" name="TextBox 50"/>
+              <p:cNvSpPr txBox="1"/>
               <p:nvPr/>
             </p:nvSpPr>
             <p:spPr>
@@ -5158,7 +5140,7 @@
               </a:prstGeom>
             </p:spPr>
             <p:txBody>
-              <a:bodyPr anchor="ctr" rtlCol="false" tIns="0" lIns="0" bIns="0" rIns="0"/>
+              <a:bodyPr lIns="0" tIns="0" rIns="0" bIns="0" rtlCol="0" anchor="ctr"/>
               <a:lstStyle/>
               <a:p>
                 <a:pPr algn="l">
@@ -5192,7 +5174,7 @@
 </file>
 
 <file path=ppt/slides/slide3.xml><?xml version="1.0" encoding="utf-8"?>
-<p:sld xmlns:p="http://schemas.openxmlformats.org/presentationml/2006/main" xmlns:a="http://schemas.openxmlformats.org/drawingml/2006/main" xmlns:r="http://schemas.openxmlformats.org/officeDocument/2006/relationships">
+<p:sld xmlns:a="http://schemas.openxmlformats.org/drawingml/2006/main" xmlns:r="http://schemas.openxmlformats.org/officeDocument/2006/relationships" xmlns:p="http://schemas.openxmlformats.org/presentationml/2006/main">
   <p:cSld>
     <p:spTree>
       <p:nvGrpSpPr>
@@ -5210,12 +5192,12 @@
       </p:grpSpPr>
       <p:grpSp>
         <p:nvGrpSpPr>
-          <p:cNvPr name="Group 2" id="2"/>
+          <p:cNvPr id="2" name="Group 2"/>
           <p:cNvGrpSpPr/>
           <p:nvPr/>
         </p:nvGrpSpPr>
         <p:grpSpPr>
-          <a:xfrm rot="0">
+          <a:xfrm>
             <a:off x="914400" y="548640"/>
             <a:ext cx="9144000" cy="1280160"/>
             <a:chOff x="0" y="0"/>
@@ -5224,12 +5206,12 @@
         </p:grpSpPr>
         <p:sp>
           <p:nvSpPr>
-            <p:cNvPr name="Freeform 3" id="3"/>
+            <p:cNvPr id="3" name="Freeform 3"/>
             <p:cNvSpPr/>
             <p:nvPr/>
           </p:nvSpPr>
           <p:spPr>
-            <a:xfrm flipH="false" flipV="false" rot="0">
+            <a:xfrm>
               <a:off x="0" y="0"/>
               <a:ext cx="12192000" cy="1706880"/>
             </a:xfrm>
@@ -5238,9 +5220,9 @@
               <a:gdLst/>
               <a:ahLst/>
               <a:cxnLst/>
-              <a:rect r="r" b="b" t="t" l="l"/>
+              <a:rect l="l" t="t" r="r" b="b"/>
               <a:pathLst>
-                <a:path h="1706880" w="12192000">
+                <a:path w="12192000" h="1706880">
                   <a:moveTo>
                     <a:pt x="0" y="0"/>
                   </a:moveTo>
@@ -5262,15 +5244,15 @@
                 <a:alphaModFix amt="0"/>
               </a:blip>
               <a:stretch>
-                <a:fillRect l="0" t="-89178" r="0" b="-89178"/>
+                <a:fillRect t="-89178" b="-89178"/>
               </a:stretch>
             </a:blipFill>
           </p:spPr>
         </p:sp>
         <p:sp>
           <p:nvSpPr>
-            <p:cNvPr name="TextBox 4" id="4"/>
-            <p:cNvSpPr txBox="true"/>
+            <p:cNvPr id="4" name="TextBox 4"/>
+            <p:cNvSpPr txBox="1"/>
             <p:nvPr/>
           </p:nvSpPr>
           <p:spPr>
@@ -5283,7 +5265,7 @@
             </a:prstGeom>
           </p:spPr>
           <p:txBody>
-            <a:bodyPr anchor="ctr" rtlCol="false" tIns="0" lIns="0" bIns="0" rIns="0"/>
+            <a:bodyPr lIns="0" tIns="0" rIns="0" bIns="0" rtlCol="0" anchor="ctr"/>
             <a:lstStyle/>
             <a:p>
               <a:pPr algn="l">
@@ -5292,7 +5274,7 @@
                 </a:lnSpc>
               </a:pPr>
               <a:r>
-                <a:rPr lang="en-US" sz="6400" b="true">
+                <a:rPr lang="en-US" sz="6400" b="1">
                   <a:solidFill>
                     <a:srgbClr val="1A1A2E"/>
                   </a:solidFill>
@@ -5309,12 +5291,12 @@
       </p:grpSp>
       <p:grpSp>
         <p:nvGrpSpPr>
-          <p:cNvPr name="Group 5" id="5"/>
+          <p:cNvPr id="5" name="Group 5"/>
           <p:cNvGrpSpPr/>
           <p:nvPr/>
         </p:nvGrpSpPr>
         <p:grpSpPr>
-          <a:xfrm rot="0">
+          <a:xfrm>
             <a:off x="11521440" y="548640"/>
             <a:ext cx="5852160" cy="1287093"/>
             <a:chOff x="0" y="0"/>
@@ -5323,12 +5305,12 @@
         </p:grpSpPr>
         <p:sp>
           <p:nvSpPr>
-            <p:cNvPr name="Freeform 6" id="6"/>
+            <p:cNvPr id="6" name="Freeform 6"/>
             <p:cNvSpPr/>
             <p:nvPr/>
           </p:nvSpPr>
           <p:spPr>
-            <a:xfrm flipH="false" flipV="false" rot="0">
+            <a:xfrm>
               <a:off x="0" y="0"/>
               <a:ext cx="7802880" cy="1716124"/>
             </a:xfrm>
@@ -5337,9 +5319,9 @@
               <a:gdLst/>
               <a:ahLst/>
               <a:cxnLst/>
-              <a:rect r="r" b="b" t="t" l="l"/>
+              <a:rect l="l" t="t" r="r" b="b"/>
               <a:pathLst>
-                <a:path h="1716124" w="7802880">
+                <a:path w="7802880" h="1716124">
                   <a:moveTo>
                     <a:pt x="0" y="0"/>
                   </a:moveTo>
@@ -5361,15 +5343,15 @@
                 <a:alphaModFix amt="0"/>
               </a:blip>
               <a:stretch>
-                <a:fillRect l="0" t="-38863" r="0" b="-38325"/>
+                <a:fillRect t="-38863" b="-38325"/>
               </a:stretch>
             </a:blipFill>
           </p:spPr>
         </p:sp>
         <p:sp>
           <p:nvSpPr>
-            <p:cNvPr name="TextBox 7" id="7"/>
-            <p:cNvSpPr txBox="true"/>
+            <p:cNvPr id="7" name="TextBox 7"/>
+            <p:cNvSpPr txBox="1"/>
             <p:nvPr/>
           </p:nvSpPr>
           <p:spPr>
@@ -5382,7 +5364,7 @@
             </a:prstGeom>
           </p:spPr>
           <p:txBody>
-            <a:bodyPr anchor="ctr" rtlCol="false" tIns="0" lIns="0" bIns="0" rIns="0"/>
+            <a:bodyPr lIns="0" tIns="0" rIns="0" bIns="0" rtlCol="0" anchor="ctr"/>
             <a:lstStyle/>
             <a:p>
               <a:pPr algn="r">
@@ -5391,7 +5373,7 @@
                 </a:lnSpc>
               </a:pPr>
               <a:r>
-                <a:rPr lang="en-US" sz="6400" b="true">
+                <a:rPr lang="en-US" sz="6400" b="1">
                   <a:solidFill>
                     <a:srgbClr val="2563EB"/>
                   </a:solidFill>
@@ -5408,12 +5390,12 @@
       </p:grpSp>
       <p:grpSp>
         <p:nvGrpSpPr>
-          <p:cNvPr name="Group 8" id="8"/>
+          <p:cNvPr id="8" name="Group 8"/>
           <p:cNvGrpSpPr/>
           <p:nvPr/>
         </p:nvGrpSpPr>
         <p:grpSpPr>
-          <a:xfrm rot="0">
+          <a:xfrm>
             <a:off x="901703" y="1962407"/>
             <a:ext cx="16484603" cy="98555"/>
             <a:chOff x="0" y="0"/>
@@ -5422,12 +5404,12 @@
         </p:grpSpPr>
         <p:sp>
           <p:nvSpPr>
-            <p:cNvPr name="Freeform 9" id="9"/>
+            <p:cNvPr id="9" name="Freeform 9"/>
             <p:cNvSpPr/>
             <p:nvPr/>
           </p:nvSpPr>
           <p:spPr>
-            <a:xfrm flipH="false" flipV="false" rot="0">
+            <a:xfrm>
               <a:off x="0" y="0"/>
               <a:ext cx="21979510" cy="131445"/>
             </a:xfrm>
@@ -5436,9 +5418,9 @@
               <a:gdLst/>
               <a:ahLst/>
               <a:cxnLst/>
-              <a:rect r="r" b="b" t="t" l="l"/>
+              <a:rect l="l" t="t" r="r" b="b"/>
               <a:pathLst>
-                <a:path h="131445" w="21979510">
+                <a:path w="21979510" h="131445">
                   <a:moveTo>
                     <a:pt x="0" y="0"/>
                   </a:moveTo>
@@ -5470,12 +5452,12 @@
       </p:grpSp>
       <p:grpSp>
         <p:nvGrpSpPr>
-          <p:cNvPr name="Group 10" id="10"/>
+          <p:cNvPr id="10" name="Group 10"/>
           <p:cNvGrpSpPr/>
           <p:nvPr/>
         </p:nvGrpSpPr>
         <p:grpSpPr>
-          <a:xfrm rot="0">
+          <a:xfrm>
             <a:off x="914400" y="2194560"/>
             <a:ext cx="16459200" cy="1371600"/>
             <a:chOff x="0" y="0"/>
@@ -5484,12 +5466,12 @@
         </p:grpSpPr>
         <p:sp>
           <p:nvSpPr>
-            <p:cNvPr name="Freeform 11" id="11"/>
+            <p:cNvPr id="11" name="Freeform 11"/>
             <p:cNvSpPr/>
             <p:nvPr/>
           </p:nvSpPr>
           <p:spPr>
-            <a:xfrm flipH="false" flipV="false" rot="0">
+            <a:xfrm>
               <a:off x="0" y="0"/>
               <a:ext cx="21945600" cy="1828800"/>
             </a:xfrm>
@@ -5498,9 +5480,9 @@
               <a:gdLst/>
               <a:ahLst/>
               <a:cxnLst/>
-              <a:rect r="r" b="b" t="t" l="l"/>
+              <a:rect l="l" t="t" r="r" b="b"/>
               <a:pathLst>
-                <a:path h="1828800" w="21945600">
+                <a:path w="21945600" h="1828800">
                   <a:moveTo>
                     <a:pt x="0" y="0"/>
                   </a:moveTo>
@@ -5522,15 +5504,15 @@
                 <a:alphaModFix amt="0"/>
               </a:blip>
               <a:stretch>
-                <a:fillRect l="0" t="-183820" r="0" b="-183820"/>
+                <a:fillRect t="-183820" b="-183820"/>
               </a:stretch>
             </a:blipFill>
           </p:spPr>
         </p:sp>
         <p:sp>
           <p:nvSpPr>
-            <p:cNvPr name="TextBox 12" id="12"/>
-            <p:cNvSpPr txBox="true"/>
+            <p:cNvPr id="12" name="TextBox 12"/>
+            <p:cNvSpPr txBox="1"/>
             <p:nvPr/>
           </p:nvSpPr>
           <p:spPr>
@@ -5543,7 +5525,7 @@
             </a:prstGeom>
           </p:spPr>
           <p:txBody>
-            <a:bodyPr anchor="ctr" rtlCol="false" tIns="0" lIns="0" bIns="0" rIns="0"/>
+            <a:bodyPr lIns="0" tIns="0" rIns="0" bIns="0" rtlCol="0" anchor="ctr"/>
             <a:lstStyle/>
             <a:p>
               <a:pPr algn="l">
@@ -5569,12 +5551,12 @@
       </p:grpSp>
       <p:grpSp>
         <p:nvGrpSpPr>
-          <p:cNvPr name="Group 13" id="13"/>
+          <p:cNvPr id="13" name="Group 13"/>
           <p:cNvGrpSpPr/>
           <p:nvPr/>
         </p:nvGrpSpPr>
         <p:grpSpPr>
-          <a:xfrm rot="0">
+          <a:xfrm>
             <a:off x="901703" y="3827783"/>
             <a:ext cx="5328923" cy="2677163"/>
             <a:chOff x="0" y="0"/>
@@ -5583,12 +5565,12 @@
         </p:grpSpPr>
         <p:sp>
           <p:nvSpPr>
-            <p:cNvPr name="Freeform 14" id="14"/>
+            <p:cNvPr id="14" name="Freeform 14"/>
             <p:cNvSpPr/>
             <p:nvPr/>
           </p:nvSpPr>
           <p:spPr>
-            <a:xfrm flipH="false" flipV="false" rot="0">
+            <a:xfrm>
               <a:off x="0" y="0"/>
               <a:ext cx="7105397" cy="3569716"/>
             </a:xfrm>
@@ -5597,9 +5579,9 @@
               <a:gdLst/>
               <a:ahLst/>
               <a:cxnLst/>
-              <a:rect r="r" b="b" t="t" l="l"/>
+              <a:rect l="l" t="t" r="r" b="b"/>
               <a:pathLst>
-                <a:path h="3569716" w="7105397">
+                <a:path w="7105397" h="3569716">
                   <a:moveTo>
                     <a:pt x="0" y="246253"/>
                   </a:moveTo>
@@ -5651,12 +5633,12 @@
       </p:grpSp>
       <p:grpSp>
         <p:nvGrpSpPr>
-          <p:cNvPr name="Group 15" id="15"/>
+          <p:cNvPr id="15" name="Group 15"/>
           <p:cNvGrpSpPr/>
           <p:nvPr/>
         </p:nvGrpSpPr>
         <p:grpSpPr>
-          <a:xfrm rot="0">
+          <a:xfrm>
             <a:off x="1225296" y="4389120"/>
             <a:ext cx="694944" cy="694944"/>
             <a:chOff x="0" y="0"/>
@@ -5665,12 +5647,12 @@
         </p:grpSpPr>
         <p:sp>
           <p:nvSpPr>
-            <p:cNvPr name="Freeform 16" id="16" descr="preencoded.png"/>
+            <p:cNvPr id="16" name="Freeform 16" descr="preencoded.png"/>
             <p:cNvSpPr/>
             <p:nvPr/>
           </p:nvSpPr>
           <p:spPr>
-            <a:xfrm flipH="false" flipV="false" rot="0">
+            <a:xfrm>
               <a:off x="0" y="0"/>
               <a:ext cx="926592" cy="926592"/>
             </a:xfrm>
@@ -5679,9 +5661,9 @@
               <a:gdLst/>
               <a:ahLst/>
               <a:cxnLst/>
-              <a:rect r="r" b="b" t="t" l="l"/>
+              <a:rect l="l" t="t" r="r" b="b"/>
               <a:pathLst>
-                <a:path h="926592" w="926592">
+                <a:path w="926592" h="926592">
                   <a:moveTo>
                     <a:pt x="0" y="0"/>
                   </a:moveTo>
@@ -5704,7 +5686,7 @@
             <a:blipFill>
               <a:blip r:embed="rId3"/>
               <a:stretch>
-                <a:fillRect l="0" t="0" r="0" b="0"/>
+                <a:fillRect/>
               </a:stretch>
             </a:blipFill>
           </p:spPr>
@@ -5712,12 +5694,12 @@
       </p:grpSp>
       <p:grpSp>
         <p:nvGrpSpPr>
-          <p:cNvPr name="Group 17" id="17"/>
+          <p:cNvPr id="17" name="Group 17"/>
           <p:cNvGrpSpPr/>
           <p:nvPr/>
         </p:nvGrpSpPr>
         <p:grpSpPr>
-          <a:xfrm rot="0">
+          <a:xfrm>
             <a:off x="2103120" y="4059936"/>
             <a:ext cx="3840480" cy="694944"/>
             <a:chOff x="0" y="0"/>
@@ -5726,12 +5708,12 @@
         </p:grpSpPr>
         <p:sp>
           <p:nvSpPr>
-            <p:cNvPr name="Freeform 18" id="18"/>
+            <p:cNvPr id="18" name="Freeform 18"/>
             <p:cNvSpPr/>
             <p:nvPr/>
           </p:nvSpPr>
           <p:spPr>
-            <a:xfrm flipH="false" flipV="false" rot="0">
+            <a:xfrm>
               <a:off x="0" y="0"/>
               <a:ext cx="5120640" cy="926592"/>
             </a:xfrm>
@@ -5740,9 +5722,9 @@
               <a:gdLst/>
               <a:ahLst/>
               <a:cxnLst/>
-              <a:rect r="r" b="b" t="t" l="l"/>
+              <a:rect l="l" t="t" r="r" b="b"/>
               <a:pathLst>
-                <a:path h="926592" w="5120640">
+                <a:path w="5120640" h="926592">
                   <a:moveTo>
                     <a:pt x="0" y="0"/>
                   </a:moveTo>
@@ -5764,15 +5746,15 @@
                 <a:alphaModFix amt="0"/>
               </a:blip>
               <a:stretch>
-                <a:fillRect l="0" t="-57680" r="0" b="-57680"/>
+                <a:fillRect t="-57680" b="-57680"/>
               </a:stretch>
             </a:blipFill>
           </p:spPr>
         </p:sp>
         <p:sp>
           <p:nvSpPr>
-            <p:cNvPr name="TextBox 19" id="19"/>
-            <p:cNvSpPr txBox="true"/>
+            <p:cNvPr id="19" name="TextBox 19"/>
+            <p:cNvSpPr txBox="1"/>
             <p:nvPr/>
           </p:nvSpPr>
           <p:spPr>
@@ -5785,7 +5767,7 @@
             </a:prstGeom>
           </p:spPr>
           <p:txBody>
-            <a:bodyPr anchor="ctr" rtlCol="false" tIns="0" lIns="0" bIns="0" rIns="0"/>
+            <a:bodyPr lIns="0" tIns="0" rIns="0" bIns="0" rtlCol="0" anchor="ctr"/>
             <a:lstStyle/>
             <a:p>
               <a:pPr algn="l">
@@ -5794,7 +5776,7 @@
                 </a:lnSpc>
               </a:pPr>
               <a:r>
-                <a:rPr lang="en-US" sz="2300" b="true">
+                <a:rPr lang="en-US" sz="2300" b="1">
                   <a:solidFill>
                     <a:srgbClr val="1A1A2E"/>
                   </a:solidFill>
@@ -5811,12 +5793,12 @@
       </p:grpSp>
       <p:grpSp>
         <p:nvGrpSpPr>
-          <p:cNvPr name="Group 20" id="20"/>
+          <p:cNvPr id="20" name="Group 20"/>
           <p:cNvGrpSpPr/>
           <p:nvPr/>
         </p:nvGrpSpPr>
         <p:grpSpPr>
-          <a:xfrm rot="0">
+          <a:xfrm>
             <a:off x="2103120" y="4791456"/>
             <a:ext cx="3840480" cy="1463040"/>
             <a:chOff x="0" y="0"/>
@@ -5825,12 +5807,12 @@
         </p:grpSpPr>
         <p:sp>
           <p:nvSpPr>
-            <p:cNvPr name="Freeform 21" id="21"/>
+            <p:cNvPr id="21" name="Freeform 21"/>
             <p:cNvSpPr/>
             <p:nvPr/>
           </p:nvSpPr>
           <p:spPr>
-            <a:xfrm flipH="false" flipV="false" rot="0">
+            <a:xfrm>
               <a:off x="0" y="0"/>
               <a:ext cx="5120640" cy="1950720"/>
             </a:xfrm>
@@ -5839,9 +5821,9 @@
               <a:gdLst/>
               <a:ahLst/>
               <a:cxnLst/>
-              <a:rect r="r" b="b" t="t" l="l"/>
+              <a:rect l="l" t="t" r="r" b="b"/>
               <a:pathLst>
-                <a:path h="1950720" w="5120640">
+                <a:path w="5120640" h="1950720">
                   <a:moveTo>
                     <a:pt x="0" y="0"/>
                   </a:moveTo>
@@ -5863,15 +5845,15 @@
                 <a:alphaModFix amt="0"/>
               </a:blip>
               <a:stretch>
-                <a:fillRect l="0" t="-1148" r="0" b="-1148"/>
+                <a:fillRect t="-1148" b="-1148"/>
               </a:stretch>
             </a:blipFill>
           </p:spPr>
         </p:sp>
         <p:sp>
           <p:nvSpPr>
-            <p:cNvPr name="TextBox 22" id="22"/>
-            <p:cNvSpPr txBox="true"/>
+            <p:cNvPr id="22" name="TextBox 22"/>
+            <p:cNvSpPr txBox="1"/>
             <p:nvPr/>
           </p:nvSpPr>
           <p:spPr>
@@ -5884,7 +5866,7 @@
             </a:prstGeom>
           </p:spPr>
           <p:txBody>
-            <a:bodyPr anchor="ctr" rtlCol="false" tIns="0" lIns="0" bIns="0" rIns="0"/>
+            <a:bodyPr lIns="0" tIns="0" rIns="0" bIns="0" rtlCol="0" anchor="ctr"/>
             <a:lstStyle/>
             <a:p>
               <a:pPr algn="l">
@@ -5910,12 +5892,12 @@
       </p:grpSp>
       <p:grpSp>
         <p:nvGrpSpPr>
-          <p:cNvPr name="Group 23" id="23"/>
+          <p:cNvPr id="23" name="Group 23"/>
           <p:cNvGrpSpPr/>
           <p:nvPr/>
         </p:nvGrpSpPr>
         <p:grpSpPr>
-          <a:xfrm rot="0">
+          <a:xfrm>
             <a:off x="6570983" y="3827783"/>
             <a:ext cx="5328923" cy="2677163"/>
             <a:chOff x="0" y="0"/>
@@ -5924,12 +5906,12 @@
         </p:grpSpPr>
         <p:sp>
           <p:nvSpPr>
-            <p:cNvPr name="Freeform 24" id="24"/>
+            <p:cNvPr id="24" name="Freeform 24"/>
             <p:cNvSpPr/>
             <p:nvPr/>
           </p:nvSpPr>
           <p:spPr>
-            <a:xfrm flipH="false" flipV="false" rot="0">
+            <a:xfrm>
               <a:off x="0" y="0"/>
               <a:ext cx="7105397" cy="3569716"/>
             </a:xfrm>
@@ -5938,9 +5920,9 @@
               <a:gdLst/>
               <a:ahLst/>
               <a:cxnLst/>
-              <a:rect r="r" b="b" t="t" l="l"/>
+              <a:rect l="l" t="t" r="r" b="b"/>
               <a:pathLst>
-                <a:path h="3569716" w="7105397">
+                <a:path w="7105397" h="3569716">
                   <a:moveTo>
                     <a:pt x="0" y="246253"/>
                   </a:moveTo>
@@ -5992,12 +5974,12 @@
       </p:grpSp>
       <p:grpSp>
         <p:nvGrpSpPr>
-          <p:cNvPr name="Group 25" id="25"/>
+          <p:cNvPr id="25" name="Group 25"/>
           <p:cNvGrpSpPr/>
           <p:nvPr/>
         </p:nvGrpSpPr>
         <p:grpSpPr>
-          <a:xfrm rot="0">
+          <a:xfrm>
             <a:off x="6894576" y="4389120"/>
             <a:ext cx="694944" cy="694944"/>
             <a:chOff x="0" y="0"/>
@@ -6006,12 +5988,12 @@
         </p:grpSpPr>
         <p:sp>
           <p:nvSpPr>
-            <p:cNvPr name="Freeform 26" id="26" descr="preencoded.png"/>
+            <p:cNvPr id="26" name="Freeform 26" descr="preencoded.png"/>
             <p:cNvSpPr/>
             <p:nvPr/>
           </p:nvSpPr>
           <p:spPr>
-            <a:xfrm flipH="false" flipV="false" rot="0">
+            <a:xfrm>
               <a:off x="0" y="0"/>
               <a:ext cx="926592" cy="926592"/>
             </a:xfrm>
@@ -6020,9 +6002,9 @@
               <a:gdLst/>
               <a:ahLst/>
               <a:cxnLst/>
-              <a:rect r="r" b="b" t="t" l="l"/>
+              <a:rect l="l" t="t" r="r" b="b"/>
               <a:pathLst>
-                <a:path h="926592" w="926592">
+                <a:path w="926592" h="926592">
                   <a:moveTo>
                     <a:pt x="0" y="0"/>
                   </a:moveTo>
@@ -6045,7 +6027,7 @@
             <a:blipFill>
               <a:blip r:embed="rId4"/>
               <a:stretch>
-                <a:fillRect l="0" t="0" r="0" b="0"/>
+                <a:fillRect/>
               </a:stretch>
             </a:blipFill>
           </p:spPr>
@@ -6053,12 +6035,12 @@
       </p:grpSp>
       <p:grpSp>
         <p:nvGrpSpPr>
-          <p:cNvPr name="Group 27" id="27"/>
+          <p:cNvPr id="27" name="Group 27"/>
           <p:cNvGrpSpPr/>
           <p:nvPr/>
         </p:nvGrpSpPr>
         <p:grpSpPr>
-          <a:xfrm rot="0">
+          <a:xfrm>
             <a:off x="7772400" y="4059936"/>
             <a:ext cx="3840480" cy="694944"/>
             <a:chOff x="0" y="0"/>
@@ -6067,12 +6049,12 @@
         </p:grpSpPr>
         <p:sp>
           <p:nvSpPr>
-            <p:cNvPr name="Freeform 28" id="28"/>
+            <p:cNvPr id="28" name="Freeform 28"/>
             <p:cNvSpPr/>
             <p:nvPr/>
           </p:nvSpPr>
           <p:spPr>
-            <a:xfrm flipH="false" flipV="false" rot="0">
+            <a:xfrm>
               <a:off x="0" y="0"/>
               <a:ext cx="5120640" cy="926592"/>
             </a:xfrm>
@@ -6081,9 +6063,9 @@
               <a:gdLst/>
               <a:ahLst/>
               <a:cxnLst/>
-              <a:rect r="r" b="b" t="t" l="l"/>
+              <a:rect l="l" t="t" r="r" b="b"/>
               <a:pathLst>
-                <a:path h="926592" w="5120640">
+                <a:path w="5120640" h="926592">
                   <a:moveTo>
                     <a:pt x="0" y="0"/>
                   </a:moveTo>
@@ -6105,15 +6087,15 @@
                 <a:alphaModFix amt="0"/>
               </a:blip>
               <a:stretch>
-                <a:fillRect l="0" t="-57680" r="0" b="-57680"/>
+                <a:fillRect t="-57680" b="-57680"/>
               </a:stretch>
             </a:blipFill>
           </p:spPr>
         </p:sp>
         <p:sp>
           <p:nvSpPr>
-            <p:cNvPr name="TextBox 29" id="29"/>
-            <p:cNvSpPr txBox="true"/>
+            <p:cNvPr id="29" name="TextBox 29"/>
+            <p:cNvSpPr txBox="1"/>
             <p:nvPr/>
           </p:nvSpPr>
           <p:spPr>
@@ -6126,7 +6108,7 @@
             </a:prstGeom>
           </p:spPr>
           <p:txBody>
-            <a:bodyPr anchor="ctr" rtlCol="false" tIns="0" lIns="0" bIns="0" rIns="0"/>
+            <a:bodyPr lIns="0" tIns="0" rIns="0" bIns="0" rtlCol="0" anchor="ctr"/>
             <a:lstStyle/>
             <a:p>
               <a:pPr algn="l">
@@ -6135,7 +6117,7 @@
                 </a:lnSpc>
               </a:pPr>
               <a:r>
-                <a:rPr lang="en-US" sz="2300" b="true">
+                <a:rPr lang="en-US" sz="2300" b="1">
                   <a:solidFill>
                     <a:srgbClr val="1A1A2E"/>
                   </a:solidFill>
@@ -6152,12 +6134,12 @@
       </p:grpSp>
       <p:grpSp>
         <p:nvGrpSpPr>
-          <p:cNvPr name="Group 30" id="30"/>
+          <p:cNvPr id="30" name="Group 30"/>
           <p:cNvGrpSpPr/>
           <p:nvPr/>
         </p:nvGrpSpPr>
         <p:grpSpPr>
-          <a:xfrm rot="0">
+          <a:xfrm>
             <a:off x="7772400" y="4791456"/>
             <a:ext cx="3840480" cy="1463040"/>
             <a:chOff x="0" y="0"/>
@@ -6166,12 +6148,12 @@
         </p:grpSpPr>
         <p:sp>
           <p:nvSpPr>
-            <p:cNvPr name="Freeform 31" id="31"/>
+            <p:cNvPr id="31" name="Freeform 31"/>
             <p:cNvSpPr/>
             <p:nvPr/>
           </p:nvSpPr>
           <p:spPr>
-            <a:xfrm flipH="false" flipV="false" rot="0">
+            <a:xfrm>
               <a:off x="0" y="0"/>
               <a:ext cx="5120640" cy="1950720"/>
             </a:xfrm>
@@ -6180,9 +6162,9 @@
               <a:gdLst/>
               <a:ahLst/>
               <a:cxnLst/>
-              <a:rect r="r" b="b" t="t" l="l"/>
+              <a:rect l="l" t="t" r="r" b="b"/>
               <a:pathLst>
-                <a:path h="1950720" w="5120640">
+                <a:path w="5120640" h="1950720">
                   <a:moveTo>
                     <a:pt x="0" y="0"/>
                   </a:moveTo>
@@ -6204,15 +6186,15 @@
                 <a:alphaModFix amt="0"/>
               </a:blip>
               <a:stretch>
-                <a:fillRect l="0" t="-1148" r="0" b="-1148"/>
+                <a:fillRect t="-1148" b="-1148"/>
               </a:stretch>
             </a:blipFill>
           </p:spPr>
         </p:sp>
         <p:sp>
           <p:nvSpPr>
-            <p:cNvPr name="TextBox 32" id="32"/>
-            <p:cNvSpPr txBox="true"/>
+            <p:cNvPr id="32" name="TextBox 32"/>
+            <p:cNvSpPr txBox="1"/>
             <p:nvPr/>
           </p:nvSpPr>
           <p:spPr>
@@ -6225,7 +6207,7 @@
             </a:prstGeom>
           </p:spPr>
           <p:txBody>
-            <a:bodyPr anchor="ctr" rtlCol="false" tIns="0" lIns="0" bIns="0" rIns="0"/>
+            <a:bodyPr lIns="0" tIns="0" rIns="0" bIns="0" rtlCol="0" anchor="ctr"/>
             <a:lstStyle/>
             <a:p>
               <a:pPr algn="l">
@@ -6251,12 +6233,12 @@
       </p:grpSp>
       <p:grpSp>
         <p:nvGrpSpPr>
-          <p:cNvPr name="Group 33" id="33"/>
+          <p:cNvPr id="33" name="Group 33"/>
           <p:cNvGrpSpPr/>
           <p:nvPr/>
         </p:nvGrpSpPr>
         <p:grpSpPr>
-          <a:xfrm rot="0">
+          <a:xfrm>
             <a:off x="12240263" y="3827783"/>
             <a:ext cx="5328923" cy="2677163"/>
             <a:chOff x="0" y="0"/>
@@ -6265,12 +6247,12 @@
         </p:grpSpPr>
         <p:sp>
           <p:nvSpPr>
-            <p:cNvPr name="Freeform 34" id="34"/>
+            <p:cNvPr id="34" name="Freeform 34"/>
             <p:cNvSpPr/>
             <p:nvPr/>
           </p:nvSpPr>
           <p:spPr>
-            <a:xfrm flipH="false" flipV="false" rot="0">
+            <a:xfrm>
               <a:off x="0" y="0"/>
               <a:ext cx="7105397" cy="3569716"/>
             </a:xfrm>
@@ -6279,9 +6261,9 @@
               <a:gdLst/>
               <a:ahLst/>
               <a:cxnLst/>
-              <a:rect r="r" b="b" t="t" l="l"/>
+              <a:rect l="l" t="t" r="r" b="b"/>
               <a:pathLst>
-                <a:path h="3569716" w="7105397">
+                <a:path w="7105397" h="3569716">
                   <a:moveTo>
                     <a:pt x="0" y="246253"/>
                   </a:moveTo>
@@ -6333,12 +6315,12 @@
       </p:grpSp>
       <p:grpSp>
         <p:nvGrpSpPr>
-          <p:cNvPr name="Group 35" id="35"/>
+          <p:cNvPr id="35" name="Group 35"/>
           <p:cNvGrpSpPr/>
           <p:nvPr/>
         </p:nvGrpSpPr>
         <p:grpSpPr>
-          <a:xfrm rot="0">
+          <a:xfrm>
             <a:off x="12563856" y="4389120"/>
             <a:ext cx="694944" cy="694944"/>
             <a:chOff x="0" y="0"/>
@@ -6347,12 +6329,12 @@
         </p:grpSpPr>
         <p:sp>
           <p:nvSpPr>
-            <p:cNvPr name="Freeform 36" id="36" descr="preencoded.png"/>
+            <p:cNvPr id="36" name="Freeform 36" descr="preencoded.png"/>
             <p:cNvSpPr/>
             <p:nvPr/>
           </p:nvSpPr>
           <p:spPr>
-            <a:xfrm flipH="false" flipV="false" rot="0">
+            <a:xfrm>
               <a:off x="0" y="0"/>
               <a:ext cx="926592" cy="926592"/>
             </a:xfrm>
@@ -6361,9 +6343,9 @@
               <a:gdLst/>
               <a:ahLst/>
               <a:cxnLst/>
-              <a:rect r="r" b="b" t="t" l="l"/>
+              <a:rect l="l" t="t" r="r" b="b"/>
               <a:pathLst>
-                <a:path h="926592" w="926592">
+                <a:path w="926592" h="926592">
                   <a:moveTo>
                     <a:pt x="0" y="0"/>
                   </a:moveTo>
@@ -6386,7 +6368,7 @@
             <a:blipFill>
               <a:blip r:embed="rId5"/>
               <a:stretch>
-                <a:fillRect l="0" t="0" r="0" b="0"/>
+                <a:fillRect/>
               </a:stretch>
             </a:blipFill>
           </p:spPr>
@@ -6394,12 +6376,12 @@
       </p:grpSp>
       <p:grpSp>
         <p:nvGrpSpPr>
-          <p:cNvPr name="Group 37" id="37"/>
+          <p:cNvPr id="37" name="Group 37"/>
           <p:cNvGrpSpPr/>
           <p:nvPr/>
         </p:nvGrpSpPr>
         <p:grpSpPr>
-          <a:xfrm rot="0">
+          <a:xfrm>
             <a:off x="13441680" y="4059936"/>
             <a:ext cx="3840480" cy="694944"/>
             <a:chOff x="0" y="0"/>
@@ -6408,12 +6390,12 @@
         </p:grpSpPr>
         <p:sp>
           <p:nvSpPr>
-            <p:cNvPr name="Freeform 38" id="38"/>
+            <p:cNvPr id="38" name="Freeform 38"/>
             <p:cNvSpPr/>
             <p:nvPr/>
           </p:nvSpPr>
           <p:spPr>
-            <a:xfrm flipH="false" flipV="false" rot="0">
+            <a:xfrm>
               <a:off x="0" y="0"/>
               <a:ext cx="5120640" cy="926592"/>
             </a:xfrm>
@@ -6422,9 +6404,9 @@
               <a:gdLst/>
               <a:ahLst/>
               <a:cxnLst/>
-              <a:rect r="r" b="b" t="t" l="l"/>
+              <a:rect l="l" t="t" r="r" b="b"/>
               <a:pathLst>
-                <a:path h="926592" w="5120640">
+                <a:path w="5120640" h="926592">
                   <a:moveTo>
                     <a:pt x="0" y="0"/>
                   </a:moveTo>
@@ -6446,15 +6428,15 @@
                 <a:alphaModFix amt="0"/>
               </a:blip>
               <a:stretch>
-                <a:fillRect l="0" t="-57680" r="0" b="-57680"/>
+                <a:fillRect t="-57680" b="-57680"/>
               </a:stretch>
             </a:blipFill>
           </p:spPr>
         </p:sp>
         <p:sp>
           <p:nvSpPr>
-            <p:cNvPr name="TextBox 39" id="39"/>
-            <p:cNvSpPr txBox="true"/>
+            <p:cNvPr id="39" name="TextBox 39"/>
+            <p:cNvSpPr txBox="1"/>
             <p:nvPr/>
           </p:nvSpPr>
           <p:spPr>
@@ -6467,7 +6449,7 @@
             </a:prstGeom>
           </p:spPr>
           <p:txBody>
-            <a:bodyPr anchor="ctr" rtlCol="false" tIns="0" lIns="0" bIns="0" rIns="0"/>
+            <a:bodyPr lIns="0" tIns="0" rIns="0" bIns="0" rtlCol="0" anchor="ctr"/>
             <a:lstStyle/>
             <a:p>
               <a:pPr algn="l">
@@ -6476,7 +6458,7 @@
                 </a:lnSpc>
               </a:pPr>
               <a:r>
-                <a:rPr lang="en-US" sz="2300" b="true">
+                <a:rPr lang="en-US" sz="2300" b="1">
                   <a:solidFill>
                     <a:srgbClr val="1A1A2E"/>
                   </a:solidFill>
@@ -6493,12 +6475,12 @@
       </p:grpSp>
       <p:grpSp>
         <p:nvGrpSpPr>
-          <p:cNvPr name="Group 40" id="40"/>
+          <p:cNvPr id="40" name="Group 40"/>
           <p:cNvGrpSpPr/>
           <p:nvPr/>
         </p:nvGrpSpPr>
         <p:grpSpPr>
-          <a:xfrm rot="0">
+          <a:xfrm>
             <a:off x="13441680" y="4791456"/>
             <a:ext cx="3840480" cy="1463040"/>
             <a:chOff x="0" y="0"/>
@@ -6507,12 +6489,12 @@
         </p:grpSpPr>
         <p:sp>
           <p:nvSpPr>
-            <p:cNvPr name="Freeform 41" id="41"/>
+            <p:cNvPr id="41" name="Freeform 41"/>
             <p:cNvSpPr/>
             <p:nvPr/>
           </p:nvSpPr>
           <p:spPr>
-            <a:xfrm flipH="false" flipV="false" rot="0">
+            <a:xfrm>
               <a:off x="0" y="0"/>
               <a:ext cx="5120640" cy="1950720"/>
             </a:xfrm>
@@ -6521,9 +6503,9 @@
               <a:gdLst/>
               <a:ahLst/>
               <a:cxnLst/>
-              <a:rect r="r" b="b" t="t" l="l"/>
+              <a:rect l="l" t="t" r="r" b="b"/>
               <a:pathLst>
-                <a:path h="1950720" w="5120640">
+                <a:path w="5120640" h="1950720">
                   <a:moveTo>
                     <a:pt x="0" y="0"/>
                   </a:moveTo>
@@ -6545,15 +6527,15 @@
                 <a:alphaModFix amt="0"/>
               </a:blip>
               <a:stretch>
-                <a:fillRect l="0" t="-1148" r="0" b="-1148"/>
+                <a:fillRect t="-1148" b="-1148"/>
               </a:stretch>
             </a:blipFill>
           </p:spPr>
         </p:sp>
         <p:sp>
           <p:nvSpPr>
-            <p:cNvPr name="TextBox 42" id="42"/>
-            <p:cNvSpPr txBox="true"/>
+            <p:cNvPr id="42" name="TextBox 42"/>
+            <p:cNvSpPr txBox="1"/>
             <p:nvPr/>
           </p:nvSpPr>
           <p:spPr>
@@ -6566,7 +6548,7 @@
             </a:prstGeom>
           </p:spPr>
           <p:txBody>
-            <a:bodyPr anchor="ctr" rtlCol="false" tIns="0" lIns="0" bIns="0" rIns="0"/>
+            <a:bodyPr lIns="0" tIns="0" rIns="0" bIns="0" rtlCol="0" anchor="ctr"/>
             <a:lstStyle/>
             <a:p>
               <a:pPr algn="l">
@@ -6592,12 +6574,12 @@
       </p:grpSp>
       <p:grpSp>
         <p:nvGrpSpPr>
-          <p:cNvPr name="Group 43" id="43"/>
+          <p:cNvPr id="43" name="Group 43"/>
           <p:cNvGrpSpPr/>
           <p:nvPr/>
         </p:nvGrpSpPr>
         <p:grpSpPr>
-          <a:xfrm rot="0">
+          <a:xfrm>
             <a:off x="901703" y="6753863"/>
             <a:ext cx="5328923" cy="2677163"/>
             <a:chOff x="0" y="0"/>
@@ -6606,12 +6588,12 @@
         </p:grpSpPr>
         <p:sp>
           <p:nvSpPr>
-            <p:cNvPr name="Freeform 44" id="44"/>
+            <p:cNvPr id="44" name="Freeform 44"/>
             <p:cNvSpPr/>
             <p:nvPr/>
           </p:nvSpPr>
           <p:spPr>
-            <a:xfrm flipH="false" flipV="false" rot="0">
+            <a:xfrm>
               <a:off x="0" y="0"/>
               <a:ext cx="7105397" cy="3569716"/>
             </a:xfrm>
@@ -6620,9 +6602,9 @@
               <a:gdLst/>
               <a:ahLst/>
               <a:cxnLst/>
-              <a:rect r="r" b="b" t="t" l="l"/>
+              <a:rect l="l" t="t" r="r" b="b"/>
               <a:pathLst>
-                <a:path h="3569716" w="7105397">
+                <a:path w="7105397" h="3569716">
                   <a:moveTo>
                     <a:pt x="0" y="246253"/>
                   </a:moveTo>
@@ -6674,12 +6656,12 @@
       </p:grpSp>
       <p:grpSp>
         <p:nvGrpSpPr>
-          <p:cNvPr name="Group 45" id="45"/>
+          <p:cNvPr id="45" name="Group 45"/>
           <p:cNvGrpSpPr/>
           <p:nvPr/>
         </p:nvGrpSpPr>
         <p:grpSpPr>
-          <a:xfrm rot="0">
+          <a:xfrm>
             <a:off x="1225296" y="7315200"/>
             <a:ext cx="694944" cy="694944"/>
             <a:chOff x="0" y="0"/>
@@ -6688,12 +6670,12 @@
         </p:grpSpPr>
         <p:sp>
           <p:nvSpPr>
-            <p:cNvPr name="Freeform 46" id="46" descr="preencoded.png"/>
+            <p:cNvPr id="46" name="Freeform 46" descr="preencoded.png"/>
             <p:cNvSpPr/>
             <p:nvPr/>
           </p:nvSpPr>
           <p:spPr>
-            <a:xfrm flipH="false" flipV="false" rot="0">
+            <a:xfrm>
               <a:off x="0" y="0"/>
               <a:ext cx="926592" cy="926592"/>
             </a:xfrm>
@@ -6702,9 +6684,9 @@
               <a:gdLst/>
               <a:ahLst/>
               <a:cxnLst/>
-              <a:rect r="r" b="b" t="t" l="l"/>
+              <a:rect l="l" t="t" r="r" b="b"/>
               <a:pathLst>
-                <a:path h="926592" w="926592">
+                <a:path w="926592" h="926592">
                   <a:moveTo>
                     <a:pt x="0" y="0"/>
                   </a:moveTo>
@@ -6727,7 +6709,7 @@
             <a:blipFill>
               <a:blip r:embed="rId6"/>
               <a:stretch>
-                <a:fillRect l="0" t="0" r="0" b="0"/>
+                <a:fillRect/>
               </a:stretch>
             </a:blipFill>
           </p:spPr>
@@ -6735,12 +6717,12 @@
       </p:grpSp>
       <p:grpSp>
         <p:nvGrpSpPr>
-          <p:cNvPr name="Group 47" id="47"/>
+          <p:cNvPr id="47" name="Group 47"/>
           <p:cNvGrpSpPr/>
           <p:nvPr/>
         </p:nvGrpSpPr>
         <p:grpSpPr>
-          <a:xfrm rot="0">
+          <a:xfrm>
             <a:off x="2103120" y="6986016"/>
             <a:ext cx="3840480" cy="694944"/>
             <a:chOff x="0" y="0"/>
@@ -6749,12 +6731,12 @@
         </p:grpSpPr>
         <p:sp>
           <p:nvSpPr>
-            <p:cNvPr name="Freeform 48" id="48"/>
+            <p:cNvPr id="48" name="Freeform 48"/>
             <p:cNvSpPr/>
             <p:nvPr/>
           </p:nvSpPr>
           <p:spPr>
-            <a:xfrm flipH="false" flipV="false" rot="0">
+            <a:xfrm>
               <a:off x="0" y="0"/>
               <a:ext cx="5120640" cy="926592"/>
             </a:xfrm>
@@ -6763,9 +6745,9 @@
               <a:gdLst/>
               <a:ahLst/>
               <a:cxnLst/>
-              <a:rect r="r" b="b" t="t" l="l"/>
+              <a:rect l="l" t="t" r="r" b="b"/>
               <a:pathLst>
-                <a:path h="926592" w="5120640">
+                <a:path w="5120640" h="926592">
                   <a:moveTo>
                     <a:pt x="0" y="0"/>
                   </a:moveTo>
@@ -6787,15 +6769,15 @@
                 <a:alphaModFix amt="0"/>
               </a:blip>
               <a:stretch>
-                <a:fillRect l="0" t="-57680" r="0" b="-57680"/>
+                <a:fillRect t="-57680" b="-57680"/>
               </a:stretch>
             </a:blipFill>
           </p:spPr>
         </p:sp>
         <p:sp>
           <p:nvSpPr>
-            <p:cNvPr name="TextBox 49" id="49"/>
-            <p:cNvSpPr txBox="true"/>
+            <p:cNvPr id="49" name="TextBox 49"/>
+            <p:cNvSpPr txBox="1"/>
             <p:nvPr/>
           </p:nvSpPr>
           <p:spPr>
@@ -6808,7 +6790,7 @@
             </a:prstGeom>
           </p:spPr>
           <p:txBody>
-            <a:bodyPr anchor="ctr" rtlCol="false" tIns="0" lIns="0" bIns="0" rIns="0"/>
+            <a:bodyPr lIns="0" tIns="0" rIns="0" bIns="0" rtlCol="0" anchor="ctr"/>
             <a:lstStyle/>
             <a:p>
               <a:pPr algn="l">
@@ -6817,7 +6799,7 @@
                 </a:lnSpc>
               </a:pPr>
               <a:r>
-                <a:rPr lang="en-US" sz="2300" b="true">
+                <a:rPr lang="en-US" sz="2300" b="1">
                   <a:solidFill>
                     <a:srgbClr val="1A1A2E"/>
                   </a:solidFill>
@@ -6834,12 +6816,12 @@
       </p:grpSp>
       <p:grpSp>
         <p:nvGrpSpPr>
-          <p:cNvPr name="Group 50" id="50"/>
+          <p:cNvPr id="50" name="Group 50"/>
           <p:cNvGrpSpPr/>
           <p:nvPr/>
         </p:nvGrpSpPr>
         <p:grpSpPr>
-          <a:xfrm rot="0">
+          <a:xfrm>
             <a:off x="2103120" y="7717536"/>
             <a:ext cx="3840480" cy="1463040"/>
             <a:chOff x="0" y="0"/>
@@ -6848,12 +6830,12 @@
         </p:grpSpPr>
         <p:sp>
           <p:nvSpPr>
-            <p:cNvPr name="Freeform 51" id="51"/>
+            <p:cNvPr id="51" name="Freeform 51"/>
             <p:cNvSpPr/>
             <p:nvPr/>
           </p:nvSpPr>
           <p:spPr>
-            <a:xfrm flipH="false" flipV="false" rot="0">
+            <a:xfrm>
               <a:off x="0" y="0"/>
               <a:ext cx="5120640" cy="1950720"/>
             </a:xfrm>
@@ -6862,9 +6844,9 @@
               <a:gdLst/>
               <a:ahLst/>
               <a:cxnLst/>
-              <a:rect r="r" b="b" t="t" l="l"/>
+              <a:rect l="l" t="t" r="r" b="b"/>
               <a:pathLst>
-                <a:path h="1950720" w="5120640">
+                <a:path w="5120640" h="1950720">
                   <a:moveTo>
                     <a:pt x="0" y="0"/>
                   </a:moveTo>
@@ -6886,15 +6868,15 @@
                 <a:alphaModFix amt="0"/>
               </a:blip>
               <a:stretch>
-                <a:fillRect l="0" t="-1148" r="0" b="-1148"/>
+                <a:fillRect t="-1148" b="-1148"/>
               </a:stretch>
             </a:blipFill>
           </p:spPr>
         </p:sp>
         <p:sp>
           <p:nvSpPr>
-            <p:cNvPr name="TextBox 52" id="52"/>
-            <p:cNvSpPr txBox="true"/>
+            <p:cNvPr id="52" name="TextBox 52"/>
+            <p:cNvSpPr txBox="1"/>
             <p:nvPr/>
           </p:nvSpPr>
           <p:spPr>
@@ -6907,7 +6889,7 @@
             </a:prstGeom>
           </p:spPr>
           <p:txBody>
-            <a:bodyPr anchor="ctr" rtlCol="false" tIns="0" lIns="0" bIns="0" rIns="0"/>
+            <a:bodyPr lIns="0" tIns="0" rIns="0" bIns="0" rtlCol="0" anchor="ctr"/>
             <a:lstStyle/>
             <a:p>
               <a:pPr algn="l">
@@ -6933,12 +6915,12 @@
       </p:grpSp>
       <p:grpSp>
         <p:nvGrpSpPr>
-          <p:cNvPr name="Group 53" id="53"/>
+          <p:cNvPr id="53" name="Group 53"/>
           <p:cNvGrpSpPr/>
           <p:nvPr/>
         </p:nvGrpSpPr>
         <p:grpSpPr>
-          <a:xfrm rot="0">
+          <a:xfrm>
             <a:off x="6570983" y="6753863"/>
             <a:ext cx="5328923" cy="2677163"/>
             <a:chOff x="0" y="0"/>
@@ -6947,12 +6929,12 @@
         </p:grpSpPr>
         <p:sp>
           <p:nvSpPr>
-            <p:cNvPr name="Freeform 54" id="54"/>
+            <p:cNvPr id="54" name="Freeform 54"/>
             <p:cNvSpPr/>
             <p:nvPr/>
           </p:nvSpPr>
           <p:spPr>
-            <a:xfrm flipH="false" flipV="false" rot="0">
+            <a:xfrm>
               <a:off x="0" y="0"/>
               <a:ext cx="7105397" cy="3569716"/>
             </a:xfrm>
@@ -6961,9 +6943,9 @@
               <a:gdLst/>
               <a:ahLst/>
               <a:cxnLst/>
-              <a:rect r="r" b="b" t="t" l="l"/>
+              <a:rect l="l" t="t" r="r" b="b"/>
               <a:pathLst>
-                <a:path h="3569716" w="7105397">
+                <a:path w="7105397" h="3569716">
                   <a:moveTo>
                     <a:pt x="0" y="246253"/>
                   </a:moveTo>
@@ -7015,12 +6997,12 @@
       </p:grpSp>
       <p:grpSp>
         <p:nvGrpSpPr>
-          <p:cNvPr name="Group 55" id="55"/>
+          <p:cNvPr id="55" name="Group 55"/>
           <p:cNvGrpSpPr/>
           <p:nvPr/>
         </p:nvGrpSpPr>
         <p:grpSpPr>
-          <a:xfrm rot="0">
+          <a:xfrm>
             <a:off x="6894576" y="7315200"/>
             <a:ext cx="694944" cy="694944"/>
             <a:chOff x="0" y="0"/>
@@ -7029,12 +7011,12 @@
         </p:grpSpPr>
         <p:sp>
           <p:nvSpPr>
-            <p:cNvPr name="Freeform 56" id="56" descr="preencoded.png"/>
+            <p:cNvPr id="56" name="Freeform 56" descr="preencoded.png"/>
             <p:cNvSpPr/>
             <p:nvPr/>
           </p:nvSpPr>
           <p:spPr>
-            <a:xfrm flipH="false" flipV="false" rot="0">
+            <a:xfrm>
               <a:off x="0" y="0"/>
               <a:ext cx="926592" cy="926592"/>
             </a:xfrm>
@@ -7043,9 +7025,9 @@
               <a:gdLst/>
               <a:ahLst/>
               <a:cxnLst/>
-              <a:rect r="r" b="b" t="t" l="l"/>
+              <a:rect l="l" t="t" r="r" b="b"/>
               <a:pathLst>
-                <a:path h="926592" w="926592">
+                <a:path w="926592" h="926592">
                   <a:moveTo>
                     <a:pt x="0" y="0"/>
                   </a:moveTo>
@@ -7068,7 +7050,7 @@
             <a:blipFill>
               <a:blip r:embed="rId7"/>
               <a:stretch>
-                <a:fillRect l="0" t="0" r="0" b="0"/>
+                <a:fillRect/>
               </a:stretch>
             </a:blipFill>
           </p:spPr>
@@ -7076,12 +7058,12 @@
       </p:grpSp>
       <p:grpSp>
         <p:nvGrpSpPr>
-          <p:cNvPr name="Group 57" id="57"/>
+          <p:cNvPr id="57" name="Group 57"/>
           <p:cNvGrpSpPr/>
           <p:nvPr/>
         </p:nvGrpSpPr>
         <p:grpSpPr>
-          <a:xfrm rot="0">
+          <a:xfrm>
             <a:off x="7772400" y="6986016"/>
             <a:ext cx="3840480" cy="694944"/>
             <a:chOff x="0" y="0"/>
@@ -7090,12 +7072,12 @@
         </p:grpSpPr>
         <p:sp>
           <p:nvSpPr>
-            <p:cNvPr name="Freeform 58" id="58"/>
+            <p:cNvPr id="58" name="Freeform 58"/>
             <p:cNvSpPr/>
             <p:nvPr/>
           </p:nvSpPr>
           <p:spPr>
-            <a:xfrm flipH="false" flipV="false" rot="0">
+            <a:xfrm>
               <a:off x="0" y="0"/>
               <a:ext cx="5120640" cy="926592"/>
             </a:xfrm>
@@ -7104,9 +7086,9 @@
               <a:gdLst/>
               <a:ahLst/>
               <a:cxnLst/>
-              <a:rect r="r" b="b" t="t" l="l"/>
+              <a:rect l="l" t="t" r="r" b="b"/>
               <a:pathLst>
-                <a:path h="926592" w="5120640">
+                <a:path w="5120640" h="926592">
                   <a:moveTo>
                     <a:pt x="0" y="0"/>
                   </a:moveTo>
@@ -7128,15 +7110,15 @@
                 <a:alphaModFix amt="0"/>
               </a:blip>
               <a:stretch>
-                <a:fillRect l="0" t="-57680" r="0" b="-57680"/>
+                <a:fillRect t="-57680" b="-57680"/>
               </a:stretch>
             </a:blipFill>
           </p:spPr>
         </p:sp>
         <p:sp>
           <p:nvSpPr>
-            <p:cNvPr name="TextBox 59" id="59"/>
-            <p:cNvSpPr txBox="true"/>
+            <p:cNvPr id="59" name="TextBox 59"/>
+            <p:cNvSpPr txBox="1"/>
             <p:nvPr/>
           </p:nvSpPr>
           <p:spPr>
@@ -7149,7 +7131,7 @@
             </a:prstGeom>
           </p:spPr>
           <p:txBody>
-            <a:bodyPr anchor="ctr" rtlCol="false" tIns="0" lIns="0" bIns="0" rIns="0"/>
+            <a:bodyPr lIns="0" tIns="0" rIns="0" bIns="0" rtlCol="0" anchor="ctr"/>
             <a:lstStyle/>
             <a:p>
               <a:pPr algn="l">
@@ -7158,7 +7140,7 @@
                 </a:lnSpc>
               </a:pPr>
               <a:r>
-                <a:rPr lang="en-US" sz="2300" b="true">
+                <a:rPr lang="en-US" sz="2300" b="1">
                   <a:solidFill>
                     <a:srgbClr val="1A1A2E"/>
                   </a:solidFill>
@@ -7175,12 +7157,12 @@
       </p:grpSp>
       <p:grpSp>
         <p:nvGrpSpPr>
-          <p:cNvPr name="Group 60" id="60"/>
+          <p:cNvPr id="60" name="Group 60"/>
           <p:cNvGrpSpPr/>
           <p:nvPr/>
         </p:nvGrpSpPr>
         <p:grpSpPr>
-          <a:xfrm rot="0">
+          <a:xfrm>
             <a:off x="7772400" y="7717536"/>
             <a:ext cx="3840480" cy="1463040"/>
             <a:chOff x="0" y="0"/>
@@ -7189,12 +7171,12 @@
         </p:grpSpPr>
         <p:sp>
           <p:nvSpPr>
-            <p:cNvPr name="Freeform 61" id="61"/>
+            <p:cNvPr id="61" name="Freeform 61"/>
             <p:cNvSpPr/>
             <p:nvPr/>
           </p:nvSpPr>
           <p:spPr>
-            <a:xfrm flipH="false" flipV="false" rot="0">
+            <a:xfrm>
               <a:off x="0" y="0"/>
               <a:ext cx="5120640" cy="1950720"/>
             </a:xfrm>
@@ -7203,9 +7185,9 @@
               <a:gdLst/>
               <a:ahLst/>
               <a:cxnLst/>
-              <a:rect r="r" b="b" t="t" l="l"/>
+              <a:rect l="l" t="t" r="r" b="b"/>
               <a:pathLst>
-                <a:path h="1950720" w="5120640">
+                <a:path w="5120640" h="1950720">
                   <a:moveTo>
                     <a:pt x="0" y="0"/>
                   </a:moveTo>
@@ -7227,15 +7209,15 @@
                 <a:alphaModFix amt="0"/>
               </a:blip>
               <a:stretch>
-                <a:fillRect l="0" t="-1148" r="0" b="-1148"/>
+                <a:fillRect t="-1148" b="-1148"/>
               </a:stretch>
             </a:blipFill>
           </p:spPr>
         </p:sp>
         <p:sp>
           <p:nvSpPr>
-            <p:cNvPr name="TextBox 62" id="62"/>
-            <p:cNvSpPr txBox="true"/>
+            <p:cNvPr id="62" name="TextBox 62"/>
+            <p:cNvSpPr txBox="1"/>
             <p:nvPr/>
           </p:nvSpPr>
           <p:spPr>
@@ -7248,7 +7230,7 @@
             </a:prstGeom>
           </p:spPr>
           <p:txBody>
-            <a:bodyPr anchor="ctr" rtlCol="false" tIns="0" lIns="0" bIns="0" rIns="0"/>
+            <a:bodyPr lIns="0" tIns="0" rIns="0" bIns="0" rtlCol="0" anchor="ctr"/>
             <a:lstStyle/>
             <a:p>
               <a:pPr algn="l">
@@ -7274,12 +7256,12 @@
       </p:grpSp>
       <p:grpSp>
         <p:nvGrpSpPr>
-          <p:cNvPr name="Group 63" id="63"/>
+          <p:cNvPr id="63" name="Group 63"/>
           <p:cNvGrpSpPr/>
           <p:nvPr/>
         </p:nvGrpSpPr>
         <p:grpSpPr>
-          <a:xfrm rot="0">
+          <a:xfrm>
             <a:off x="12240263" y="6753863"/>
             <a:ext cx="5328923" cy="2677163"/>
             <a:chOff x="0" y="0"/>
@@ -7288,12 +7270,12 @@
         </p:grpSpPr>
         <p:sp>
           <p:nvSpPr>
-            <p:cNvPr name="Freeform 64" id="64"/>
+            <p:cNvPr id="64" name="Freeform 64"/>
             <p:cNvSpPr/>
             <p:nvPr/>
           </p:nvSpPr>
           <p:spPr>
-            <a:xfrm flipH="false" flipV="false" rot="0">
+            <a:xfrm>
               <a:off x="0" y="0"/>
               <a:ext cx="7105397" cy="3569716"/>
             </a:xfrm>
@@ -7302,9 +7284,9 @@
               <a:gdLst/>
               <a:ahLst/>
               <a:cxnLst/>
-              <a:rect r="r" b="b" t="t" l="l"/>
+              <a:rect l="l" t="t" r="r" b="b"/>
               <a:pathLst>
-                <a:path h="3569716" w="7105397">
+                <a:path w="7105397" h="3569716">
                   <a:moveTo>
                     <a:pt x="0" y="246253"/>
                   </a:moveTo>
@@ -7356,12 +7338,12 @@
       </p:grpSp>
       <p:grpSp>
         <p:nvGrpSpPr>
-          <p:cNvPr name="Group 65" id="65"/>
+          <p:cNvPr id="65" name="Group 65"/>
           <p:cNvGrpSpPr/>
           <p:nvPr/>
         </p:nvGrpSpPr>
         <p:grpSpPr>
-          <a:xfrm rot="0">
+          <a:xfrm>
             <a:off x="12563856" y="7315200"/>
             <a:ext cx="694944" cy="694944"/>
             <a:chOff x="0" y="0"/>
@@ -7370,12 +7352,12 @@
         </p:grpSpPr>
         <p:sp>
           <p:nvSpPr>
-            <p:cNvPr name="Freeform 66" id="66" descr="preencoded.png"/>
+            <p:cNvPr id="66" name="Freeform 66" descr="preencoded.png"/>
             <p:cNvSpPr/>
             <p:nvPr/>
           </p:nvSpPr>
           <p:spPr>
-            <a:xfrm flipH="false" flipV="false" rot="0">
+            <a:xfrm>
               <a:off x="0" y="0"/>
               <a:ext cx="926592" cy="926592"/>
             </a:xfrm>
@@ -7384,9 +7366,9 @@
               <a:gdLst/>
               <a:ahLst/>
               <a:cxnLst/>
-              <a:rect r="r" b="b" t="t" l="l"/>
+              <a:rect l="l" t="t" r="r" b="b"/>
               <a:pathLst>
-                <a:path h="926592" w="926592">
+                <a:path w="926592" h="926592">
                   <a:moveTo>
                     <a:pt x="0" y="0"/>
                   </a:moveTo>
@@ -7409,7 +7391,7 @@
             <a:blipFill>
               <a:blip r:embed="rId8"/>
               <a:stretch>
-                <a:fillRect l="0" t="0" r="0" b="0"/>
+                <a:fillRect/>
               </a:stretch>
             </a:blipFill>
           </p:spPr>
@@ -7417,12 +7399,12 @@
       </p:grpSp>
       <p:grpSp>
         <p:nvGrpSpPr>
-          <p:cNvPr name="Group 67" id="67"/>
+          <p:cNvPr id="67" name="Group 67"/>
           <p:cNvGrpSpPr/>
           <p:nvPr/>
         </p:nvGrpSpPr>
         <p:grpSpPr>
-          <a:xfrm rot="0">
+          <a:xfrm>
             <a:off x="13441680" y="6986016"/>
             <a:ext cx="3840480" cy="694944"/>
             <a:chOff x="0" y="0"/>
@@ -7431,12 +7413,12 @@
         </p:grpSpPr>
         <p:sp>
           <p:nvSpPr>
-            <p:cNvPr name="Freeform 68" id="68"/>
+            <p:cNvPr id="68" name="Freeform 68"/>
             <p:cNvSpPr/>
             <p:nvPr/>
           </p:nvSpPr>
           <p:spPr>
-            <a:xfrm flipH="false" flipV="false" rot="0">
+            <a:xfrm>
               <a:off x="0" y="0"/>
               <a:ext cx="5120640" cy="926592"/>
             </a:xfrm>
@@ -7445,9 +7427,9 @@
               <a:gdLst/>
               <a:ahLst/>
               <a:cxnLst/>
-              <a:rect r="r" b="b" t="t" l="l"/>
+              <a:rect l="l" t="t" r="r" b="b"/>
               <a:pathLst>
-                <a:path h="926592" w="5120640">
+                <a:path w="5120640" h="926592">
                   <a:moveTo>
                     <a:pt x="0" y="0"/>
                   </a:moveTo>
@@ -7469,15 +7451,15 @@
                 <a:alphaModFix amt="0"/>
               </a:blip>
               <a:stretch>
-                <a:fillRect l="0" t="-57680" r="0" b="-57680"/>
+                <a:fillRect t="-57680" b="-57680"/>
               </a:stretch>
             </a:blipFill>
           </p:spPr>
         </p:sp>
         <p:sp>
           <p:nvSpPr>
-            <p:cNvPr name="TextBox 69" id="69"/>
-            <p:cNvSpPr txBox="true"/>
+            <p:cNvPr id="69" name="TextBox 69"/>
+            <p:cNvSpPr txBox="1"/>
             <p:nvPr/>
           </p:nvSpPr>
           <p:spPr>
@@ -7490,7 +7472,7 @@
             </a:prstGeom>
           </p:spPr>
           <p:txBody>
-            <a:bodyPr anchor="ctr" rtlCol="false" tIns="0" lIns="0" bIns="0" rIns="0"/>
+            <a:bodyPr lIns="0" tIns="0" rIns="0" bIns="0" rtlCol="0" anchor="ctr"/>
             <a:lstStyle/>
             <a:p>
               <a:pPr algn="l">
@@ -7499,7 +7481,7 @@
                 </a:lnSpc>
               </a:pPr>
               <a:r>
-                <a:rPr lang="en-US" sz="2300" b="true">
+                <a:rPr lang="en-US" sz="2300" b="1">
                   <a:solidFill>
                     <a:srgbClr val="1A1A2E"/>
                   </a:solidFill>
@@ -7516,12 +7498,12 @@
       </p:grpSp>
       <p:grpSp>
         <p:nvGrpSpPr>
-          <p:cNvPr name="Group 70" id="70"/>
+          <p:cNvPr id="70" name="Group 70"/>
           <p:cNvGrpSpPr/>
           <p:nvPr/>
         </p:nvGrpSpPr>
         <p:grpSpPr>
-          <a:xfrm rot="0">
+          <a:xfrm>
             <a:off x="13441680" y="7717536"/>
             <a:ext cx="3840480" cy="1463040"/>
             <a:chOff x="0" y="0"/>
@@ -7530,12 +7512,12 @@
         </p:grpSpPr>
         <p:sp>
           <p:nvSpPr>
-            <p:cNvPr name="Freeform 71" id="71"/>
+            <p:cNvPr id="71" name="Freeform 71"/>
             <p:cNvSpPr/>
             <p:nvPr/>
           </p:nvSpPr>
           <p:spPr>
-            <a:xfrm flipH="false" flipV="false" rot="0">
+            <a:xfrm>
               <a:off x="0" y="0"/>
               <a:ext cx="5120640" cy="1950720"/>
             </a:xfrm>
@@ -7544,9 +7526,9 @@
               <a:gdLst/>
               <a:ahLst/>
               <a:cxnLst/>
-              <a:rect r="r" b="b" t="t" l="l"/>
+              <a:rect l="l" t="t" r="r" b="b"/>
               <a:pathLst>
-                <a:path h="1950720" w="5120640">
+                <a:path w="5120640" h="1950720">
                   <a:moveTo>
                     <a:pt x="0" y="0"/>
                   </a:moveTo>
@@ -7568,15 +7550,15 @@
                 <a:alphaModFix amt="0"/>
               </a:blip>
               <a:stretch>
-                <a:fillRect l="0" t="-1148" r="0" b="-1148"/>
+                <a:fillRect t="-1148" b="-1148"/>
               </a:stretch>
             </a:blipFill>
           </p:spPr>
         </p:sp>
         <p:sp>
           <p:nvSpPr>
-            <p:cNvPr name="TextBox 72" id="72"/>
-            <p:cNvSpPr txBox="true"/>
+            <p:cNvPr id="72" name="TextBox 72"/>
+            <p:cNvSpPr txBox="1"/>
             <p:nvPr/>
           </p:nvSpPr>
           <p:spPr>
@@ -7589,7 +7571,7 @@
             </a:prstGeom>
           </p:spPr>
           <p:txBody>
-            <a:bodyPr anchor="ctr" rtlCol="false" tIns="0" lIns="0" bIns="0" rIns="0"/>
+            <a:bodyPr lIns="0" tIns="0" rIns="0" bIns="0" rtlCol="0" anchor="ctr"/>
             <a:lstStyle/>
             <a:p>
               <a:pPr algn="l">
@@ -7622,7 +7604,7 @@
 </file>
 
 <file path=ppt/slides/slide4.xml><?xml version="1.0" encoding="utf-8"?>
-<p:sld xmlns:p="http://schemas.openxmlformats.org/presentationml/2006/main" xmlns:a="http://schemas.openxmlformats.org/drawingml/2006/main" xmlns:r="http://schemas.openxmlformats.org/officeDocument/2006/relationships">
+<p:sld xmlns:a="http://schemas.openxmlformats.org/drawingml/2006/main" xmlns:r="http://schemas.openxmlformats.org/officeDocument/2006/relationships" xmlns:p="http://schemas.openxmlformats.org/presentationml/2006/main">
   <p:cSld>
     <p:spTree>
       <p:nvGrpSpPr>
@@ -7640,48 +7622,48 @@
       </p:grpSpPr>
       <p:grpSp>
         <p:nvGrpSpPr>
-          <p:cNvPr name="Group 2" id="2"/>
+          <p:cNvPr id="2" name="Group 2"/>
           <p:cNvGrpSpPr/>
           <p:nvPr/>
         </p:nvGrpSpPr>
         <p:grpSpPr>
-          <a:xfrm rot="0">
-            <a:off x="914400" y="146462"/>
-            <a:ext cx="6964680" cy="1287066"/>
+          <a:xfrm>
+            <a:off x="914400" y="548640"/>
+            <a:ext cx="10972800" cy="1280160"/>
             <a:chOff x="0" y="0"/>
-            <a:chExt cx="9286240" cy="1716087"/>
+            <a:chExt cx="14630400" cy="1706880"/>
           </a:xfrm>
         </p:grpSpPr>
         <p:sp>
           <p:nvSpPr>
-            <p:cNvPr name="Freeform 3" id="3"/>
+            <p:cNvPr id="3" name="Freeform 3"/>
             <p:cNvSpPr/>
             <p:nvPr/>
           </p:nvSpPr>
           <p:spPr>
-            <a:xfrm flipH="false" flipV="false" rot="0">
+            <a:xfrm>
               <a:off x="0" y="0"/>
-              <a:ext cx="9286240" cy="1716088"/>
+              <a:ext cx="14630400" cy="1706880"/>
             </a:xfrm>
             <a:custGeom>
               <a:avLst/>
               <a:gdLst/>
               <a:ahLst/>
               <a:cxnLst/>
-              <a:rect r="r" b="b" t="t" l="l"/>
+              <a:rect l="l" t="t" r="r" b="b"/>
               <a:pathLst>
-                <a:path h="1716088" w="9286240">
+                <a:path w="14630400" h="1706880">
                   <a:moveTo>
                     <a:pt x="0" y="0"/>
                   </a:moveTo>
                   <a:lnTo>
-                    <a:pt x="9286240" y="0"/>
-                  </a:lnTo>
-                  <a:lnTo>
-                    <a:pt x="9286240" y="1716088"/>
-                  </a:lnTo>
-                  <a:lnTo>
-                    <a:pt x="0" y="1716088"/>
+                    <a:pt x="14630400" y="0"/>
+                  </a:lnTo>
+                  <a:lnTo>
+                    <a:pt x="14630400" y="1706880"/>
+                  </a:lnTo>
+                  <a:lnTo>
+                    <a:pt x="0" y="1706880"/>
                   </a:lnTo>
                   <a:close/>
                 </a:path>
@@ -7692,28 +7674,28 @@
                 <a:alphaModFix amt="0"/>
               </a:blip>
               <a:stretch>
-                <a:fillRect l="0" t="-199446" r="-136323" b="-198909"/>
+                <a:fillRect t="-117014" b="-117014"/>
               </a:stretch>
             </a:blipFill>
           </p:spPr>
         </p:sp>
         <p:sp>
           <p:nvSpPr>
-            <p:cNvPr name="TextBox 4" id="4"/>
-            <p:cNvSpPr txBox="true"/>
+            <p:cNvPr id="4" name="TextBox 4"/>
+            <p:cNvSpPr txBox="1"/>
             <p:nvPr/>
           </p:nvSpPr>
           <p:spPr>
             <a:xfrm>
               <a:off x="0" y="-123825"/>
-              <a:ext cx="9286240" cy="1839912"/>
+              <a:ext cx="14630400" cy="1830705"/>
             </a:xfrm>
             <a:prstGeom prst="rect">
               <a:avLst/>
             </a:prstGeom>
           </p:spPr>
           <p:txBody>
-            <a:bodyPr anchor="ctr" rtlCol="false" tIns="0" lIns="0" bIns="0" rIns="0"/>
+            <a:bodyPr lIns="0" tIns="0" rIns="0" bIns="0" rtlCol="0" anchor="ctr"/>
             <a:lstStyle/>
             <a:p>
               <a:pPr algn="l">
@@ -7722,1225 +7704,7 @@
                 </a:lnSpc>
               </a:pPr>
               <a:r>
-                <a:rPr lang="en-US" b="true" sz="6400">
-                  <a:solidFill>
-                    <a:srgbClr val="1A1A2E"/>
-                  </a:solidFill>
-                  <a:latin typeface="Calibri (MS) Bold"/>
-                  <a:ea typeface="Calibri (MS) Bold"/>
-                  <a:cs typeface="Calibri (MS) Bold"/>
-                  <a:sym typeface="Calibri (MS) Bold"/>
-                </a:rPr>
-                <a:t>System Architecture</a:t>
-              </a:r>
-            </a:p>
-          </p:txBody>
-        </p:sp>
-      </p:grpSp>
-      <p:sp>
-        <p:nvSpPr>
-          <p:cNvPr name="Freeform 5" id="5"/>
-          <p:cNvSpPr/>
-          <p:nvPr/>
-        </p:nvSpPr>
-        <p:spPr>
-          <a:xfrm flipH="false" flipV="false" rot="0">
-            <a:off x="914400" y="789994"/>
-            <a:ext cx="7906930" cy="9302270"/>
-          </a:xfrm>
-          <a:custGeom>
-            <a:avLst/>
-            <a:gdLst/>
-            <a:ahLst/>
-            <a:cxnLst/>
-            <a:rect r="r" b="b" t="t" l="l"/>
-            <a:pathLst>
-              <a:path h="9302270" w="7906930">
-                <a:moveTo>
-                  <a:pt x="0" y="0"/>
-                </a:moveTo>
-                <a:lnTo>
-                  <a:pt x="7906930" y="0"/>
-                </a:lnTo>
-                <a:lnTo>
-                  <a:pt x="7906930" y="9302271"/>
-                </a:lnTo>
-                <a:lnTo>
-                  <a:pt x="0" y="9302271"/>
-                </a:lnTo>
-                <a:lnTo>
-                  <a:pt x="0" y="0"/>
-                </a:lnTo>
-                <a:close/>
-              </a:path>
-            </a:pathLst>
-          </a:custGeom>
-          <a:blipFill>
-            <a:blip r:embed="rId3"/>
-            <a:stretch>
-              <a:fillRect l="0" t="0" r="0" b="0"/>
-            </a:stretch>
-          </a:blipFill>
-        </p:spPr>
-      </p:sp>
-      <p:grpSp>
-        <p:nvGrpSpPr>
-          <p:cNvPr name="Group 6" id="6"/>
-          <p:cNvGrpSpPr/>
-          <p:nvPr/>
-        </p:nvGrpSpPr>
-        <p:grpSpPr>
-          <a:xfrm rot="0">
-            <a:off x="11774047" y="1670370"/>
-            <a:ext cx="3230182" cy="667832"/>
-            <a:chOff x="0" y="0"/>
-            <a:chExt cx="4306909" cy="890443"/>
-          </a:xfrm>
-        </p:grpSpPr>
-        <p:grpSp>
-          <p:nvGrpSpPr>
-            <p:cNvPr name="Group 7" id="7"/>
-            <p:cNvGrpSpPr/>
-            <p:nvPr/>
-          </p:nvGrpSpPr>
-          <p:grpSpPr>
-            <a:xfrm rot="0">
-              <a:off x="0" y="0"/>
-              <a:ext cx="4306909" cy="890443"/>
-              <a:chOff x="0" y="0"/>
-              <a:chExt cx="9702607" cy="2005991"/>
-            </a:xfrm>
-          </p:grpSpPr>
-          <p:sp>
-            <p:nvSpPr>
-              <p:cNvPr name="Freeform 8" id="8"/>
-              <p:cNvSpPr/>
-              <p:nvPr/>
-            </p:nvSpPr>
-            <p:spPr>
-              <a:xfrm flipH="false" flipV="false" rot="0">
-                <a:off x="0" y="0"/>
-                <a:ext cx="9702557" cy="2005972"/>
-              </a:xfrm>
-              <a:custGeom>
-                <a:avLst/>
-                <a:gdLst/>
-                <a:ahLst/>
-                <a:cxnLst/>
-                <a:rect r="r" b="b" t="t" l="l"/>
-                <a:pathLst>
-                  <a:path h="2005972" w="9702557">
-                    <a:moveTo>
-                      <a:pt x="0" y="150450"/>
-                    </a:moveTo>
-                    <a:cubicBezTo>
-                      <a:pt x="0" y="67330"/>
-                      <a:pt x="175081" y="0"/>
-                      <a:pt x="391220" y="0"/>
-                    </a:cubicBezTo>
-                    <a:lnTo>
-                      <a:pt x="9311338" y="0"/>
-                    </a:lnTo>
-                    <a:cubicBezTo>
-                      <a:pt x="9527477" y="0"/>
-                      <a:pt x="9702557" y="67330"/>
-                      <a:pt x="9702557" y="150450"/>
-                    </a:cubicBezTo>
-                    <a:lnTo>
-                      <a:pt x="9702557" y="1855522"/>
-                    </a:lnTo>
-                    <a:cubicBezTo>
-                      <a:pt x="9702557" y="1938642"/>
-                      <a:pt x="9527477" y="2005972"/>
-                      <a:pt x="9311338" y="2005972"/>
-                    </a:cubicBezTo>
-                    <a:lnTo>
-                      <a:pt x="391220" y="2005972"/>
-                    </a:lnTo>
-                    <a:cubicBezTo>
-                      <a:pt x="175081" y="2005972"/>
-                      <a:pt x="0" y="1938642"/>
-                      <a:pt x="0" y="1855522"/>
-                    </a:cubicBezTo>
-                    <a:close/>
-                  </a:path>
-                </a:pathLst>
-              </a:custGeom>
-              <a:solidFill>
-                <a:srgbClr val="BFDBFE"/>
-              </a:solidFill>
-              <a:ln w="50800" cap="sq">
-                <a:solidFill>
-                  <a:srgbClr val="4A90B9"/>
-                </a:solidFill>
-                <a:prstDash val="solid"/>
-                <a:miter/>
-              </a:ln>
-            </p:spPr>
-          </p:sp>
-        </p:grpSp>
-        <p:sp>
-          <p:nvSpPr>
-            <p:cNvPr name="TextBox 9" id="9"/>
-            <p:cNvSpPr txBox="true"/>
-            <p:nvPr/>
-          </p:nvSpPr>
-          <p:spPr>
-            <a:xfrm rot="0">
-              <a:off x="330329" y="89622"/>
-              <a:ext cx="3646251" cy="654050"/>
-            </a:xfrm>
-            <a:prstGeom prst="rect">
-              <a:avLst/>
-            </a:prstGeom>
-          </p:spPr>
-          <p:txBody>
-            <a:bodyPr anchor="t" rtlCol="false" tIns="0" lIns="0" bIns="0" rIns="0">
-              <a:spAutoFit/>
-            </a:bodyPr>
-            <a:lstStyle/>
-            <a:p>
-              <a:pPr algn="ctr">
-                <a:lnSpc>
-                  <a:spcPts val="3599"/>
-                </a:lnSpc>
-                <a:spcBef>
-                  <a:spcPct val="0"/>
-                </a:spcBef>
-              </a:pPr>
-              <a:r>
-                <a:rPr lang="en-US" b="true" sz="2999">
-                  <a:solidFill>
-                    <a:srgbClr val="000000"/>
-                  </a:solidFill>
-                  <a:latin typeface="Calibri (MS) Bold"/>
-                  <a:ea typeface="Calibri (MS) Bold"/>
-                  <a:cs typeface="Calibri (MS) Bold"/>
-                  <a:sym typeface="Calibri (MS) Bold"/>
-                </a:rPr>
-                <a:t>Two Entry Points</a:t>
-              </a:r>
-            </a:p>
-          </p:txBody>
-        </p:sp>
-      </p:grpSp>
-      <p:grpSp>
-        <p:nvGrpSpPr>
-          <p:cNvPr name="Group 10" id="10"/>
-          <p:cNvGrpSpPr/>
-          <p:nvPr/>
-        </p:nvGrpSpPr>
-        <p:grpSpPr>
-          <a:xfrm rot="0">
-            <a:off x="13578743" y="2725643"/>
-            <a:ext cx="4446424" cy="2615295"/>
-            <a:chOff x="0" y="0"/>
-            <a:chExt cx="7105231" cy="4179151"/>
-          </a:xfrm>
-        </p:grpSpPr>
-        <p:sp>
-          <p:nvSpPr>
-            <p:cNvPr name="Freeform 11" id="11"/>
-            <p:cNvSpPr/>
-            <p:nvPr/>
-          </p:nvSpPr>
-          <p:spPr>
-            <a:xfrm flipH="false" flipV="false" rot="0">
-              <a:off x="0" y="0"/>
-              <a:ext cx="7105269" cy="4179189"/>
-            </a:xfrm>
-            <a:custGeom>
-              <a:avLst/>
-              <a:gdLst/>
-              <a:ahLst/>
-              <a:cxnLst/>
-              <a:rect r="r" b="b" t="t" l="l"/>
-              <a:pathLst>
-                <a:path h="4179189" w="7105269">
-                  <a:moveTo>
-                    <a:pt x="0" y="295021"/>
-                  </a:moveTo>
-                  <a:cubicBezTo>
-                    <a:pt x="0" y="132080"/>
-                    <a:pt x="132080" y="0"/>
-                    <a:pt x="295021" y="0"/>
-                  </a:cubicBezTo>
-                  <a:lnTo>
-                    <a:pt x="6810248" y="0"/>
-                  </a:lnTo>
-                  <a:cubicBezTo>
-                    <a:pt x="6973189" y="0"/>
-                    <a:pt x="7105269" y="132080"/>
-                    <a:pt x="7105269" y="295021"/>
-                  </a:cubicBezTo>
-                  <a:lnTo>
-                    <a:pt x="7105269" y="3884168"/>
-                  </a:lnTo>
-                  <a:cubicBezTo>
-                    <a:pt x="7105269" y="4047109"/>
-                    <a:pt x="6973189" y="4179189"/>
-                    <a:pt x="6810248" y="4179189"/>
-                  </a:cubicBezTo>
-                  <a:lnTo>
-                    <a:pt x="295021" y="4179189"/>
-                  </a:lnTo>
-                  <a:cubicBezTo>
-                    <a:pt x="132080" y="4179189"/>
-                    <a:pt x="0" y="4047109"/>
-                    <a:pt x="0" y="3884168"/>
-                  </a:cubicBezTo>
-                  <a:close/>
-                </a:path>
-              </a:pathLst>
-            </a:custGeom>
-            <a:solidFill>
-              <a:srgbClr val="FEF2F2"/>
-            </a:solidFill>
-            <a:ln w="25400" cap="sq">
-              <a:solidFill>
-                <a:srgbClr val="94A3B8"/>
-              </a:solidFill>
-              <a:prstDash val="solid"/>
-              <a:miter/>
-            </a:ln>
-          </p:spPr>
-        </p:sp>
-      </p:grpSp>
-      <p:grpSp>
-        <p:nvGrpSpPr>
-          <p:cNvPr name="Group 12" id="12"/>
-          <p:cNvGrpSpPr/>
-          <p:nvPr/>
-        </p:nvGrpSpPr>
-        <p:grpSpPr>
-          <a:xfrm rot="0">
-            <a:off x="8562250" y="2725643"/>
-            <a:ext cx="4446424" cy="2615295"/>
-            <a:chOff x="0" y="0"/>
-            <a:chExt cx="7105231" cy="4179151"/>
-          </a:xfrm>
-        </p:grpSpPr>
-        <p:sp>
-          <p:nvSpPr>
-            <p:cNvPr name="Freeform 13" id="13"/>
-            <p:cNvSpPr/>
-            <p:nvPr/>
-          </p:nvSpPr>
-          <p:spPr>
-            <a:xfrm flipH="false" flipV="false" rot="0">
-              <a:off x="0" y="0"/>
-              <a:ext cx="7105269" cy="4179189"/>
-            </a:xfrm>
-            <a:custGeom>
-              <a:avLst/>
-              <a:gdLst/>
-              <a:ahLst/>
-              <a:cxnLst/>
-              <a:rect r="r" b="b" t="t" l="l"/>
-              <a:pathLst>
-                <a:path h="4179189" w="7105269">
-                  <a:moveTo>
-                    <a:pt x="0" y="295021"/>
-                  </a:moveTo>
-                  <a:cubicBezTo>
-                    <a:pt x="0" y="132080"/>
-                    <a:pt x="132080" y="0"/>
-                    <a:pt x="295021" y="0"/>
-                  </a:cubicBezTo>
-                  <a:lnTo>
-                    <a:pt x="6810248" y="0"/>
-                  </a:lnTo>
-                  <a:cubicBezTo>
-                    <a:pt x="6973189" y="0"/>
-                    <a:pt x="7105269" y="132080"/>
-                    <a:pt x="7105269" y="295021"/>
-                  </a:cubicBezTo>
-                  <a:lnTo>
-                    <a:pt x="7105269" y="3884168"/>
-                  </a:lnTo>
-                  <a:cubicBezTo>
-                    <a:pt x="7105269" y="4047109"/>
-                    <a:pt x="6973189" y="4179189"/>
-                    <a:pt x="6810248" y="4179189"/>
-                  </a:cubicBezTo>
-                  <a:lnTo>
-                    <a:pt x="295021" y="4179189"/>
-                  </a:lnTo>
-                  <a:cubicBezTo>
-                    <a:pt x="132080" y="4179189"/>
-                    <a:pt x="0" y="4047109"/>
-                    <a:pt x="0" y="3884168"/>
-                  </a:cubicBezTo>
-                  <a:close/>
-                </a:path>
-              </a:pathLst>
-            </a:custGeom>
-            <a:solidFill>
-              <a:srgbClr val="E4EBD5"/>
-            </a:solidFill>
-            <a:ln w="25400" cap="sq">
-              <a:solidFill>
-                <a:srgbClr val="74715F"/>
-              </a:solidFill>
-              <a:prstDash val="solid"/>
-              <a:miter/>
-            </a:ln>
-          </p:spPr>
-        </p:sp>
-      </p:grpSp>
-      <p:sp>
-        <p:nvSpPr>
-          <p:cNvPr name="TextBox 14" id="14"/>
-          <p:cNvSpPr txBox="true"/>
-          <p:nvPr/>
-        </p:nvSpPr>
-        <p:spPr>
-          <a:xfrm rot="0">
-            <a:off x="8562250" y="2824703"/>
-            <a:ext cx="4446424" cy="400050"/>
-          </a:xfrm>
-          <a:prstGeom prst="rect">
-            <a:avLst/>
-          </a:prstGeom>
-        </p:spPr>
-        <p:txBody>
-          <a:bodyPr anchor="t" rtlCol="false" tIns="0" lIns="0" bIns="0" rIns="0">
-            <a:spAutoFit/>
-          </a:bodyPr>
-          <a:lstStyle/>
-          <a:p>
-            <a:pPr algn="ctr">
-              <a:lnSpc>
-                <a:spcPts val="2879"/>
-              </a:lnSpc>
-              <a:spcBef>
-                <a:spcPct val="0"/>
-              </a:spcBef>
-            </a:pPr>
-            <a:r>
-              <a:rPr lang="en-US" b="true" sz="2400">
-                <a:solidFill>
-                  <a:srgbClr val="000000"/>
-                </a:solidFill>
-                <a:latin typeface="Calibri (MS) Bold"/>
-                <a:ea typeface="Calibri (MS) Bold"/>
-                <a:cs typeface="Calibri (MS) Bold"/>
-                <a:sym typeface="Calibri (MS) Bold"/>
-              </a:rPr>
-              <a:t>Student Side - Desktop App</a:t>
-            </a:r>
-          </a:p>
-        </p:txBody>
-      </p:sp>
-      <p:sp>
-        <p:nvSpPr>
-          <p:cNvPr name="TextBox 15" id="15"/>
-          <p:cNvSpPr txBox="true"/>
-          <p:nvPr/>
-        </p:nvSpPr>
-        <p:spPr>
-          <a:xfrm rot="0">
-            <a:off x="8562250" y="3167603"/>
-            <a:ext cx="4256171" cy="1974850"/>
-          </a:xfrm>
-          <a:prstGeom prst="rect">
-            <a:avLst/>
-          </a:prstGeom>
-        </p:spPr>
-        <p:txBody>
-          <a:bodyPr anchor="t" rtlCol="false" tIns="0" lIns="0" bIns="0" rIns="0">
-            <a:spAutoFit/>
-          </a:bodyPr>
-          <a:lstStyle/>
-          <a:p>
-            <a:pPr algn="just" marL="431801" indent="-215900" lvl="1">
-              <a:lnSpc>
-                <a:spcPts val="2600"/>
-              </a:lnSpc>
-              <a:buFont typeface="Arial"/>
-              <a:buChar char="•"/>
-            </a:pPr>
-            <a:r>
-              <a:rPr lang="en-US" sz="2000">
-                <a:solidFill>
-                  <a:srgbClr val="000000"/>
-                </a:solidFill>
-                <a:latin typeface="Calibri (MS)"/>
-                <a:ea typeface="Calibri (MS)"/>
-                <a:cs typeface="Calibri (MS)"/>
-                <a:sym typeface="Calibri (MS)"/>
-              </a:rPr>
-              <a:t>Monaco editor + local GCC/MinGW compiler (grades on-device)</a:t>
-            </a:r>
-          </a:p>
-          <a:p>
-            <a:pPr algn="just" marL="431801" indent="-215900" lvl="1">
-              <a:lnSpc>
-                <a:spcPts val="2600"/>
-              </a:lnSpc>
-              <a:buFont typeface="Arial"/>
-              <a:buChar char="•"/>
-            </a:pPr>
-            <a:r>
-              <a:rPr lang="en-US" sz="2000">
-                <a:solidFill>
-                  <a:srgbClr val="000000"/>
-                </a:solidFill>
-                <a:latin typeface="Calibri (MS)"/>
-                <a:ea typeface="Calibri (MS)"/>
-                <a:cs typeface="Calibri (MS)"/>
-                <a:sym typeface="Calibri (MS)"/>
-              </a:rPr>
-              <a:t>SQLite caches exam data locally</a:t>
-            </a:r>
-          </a:p>
-          <a:p>
-            <a:pPr algn="just" marL="431801" indent="-215900" lvl="1">
-              <a:lnSpc>
-                <a:spcPts val="2600"/>
-              </a:lnSpc>
-              <a:buFont typeface="Arial"/>
-              <a:buChar char="•"/>
-            </a:pPr>
-            <a:r>
-              <a:rPr lang="en-US" sz="2000">
-                <a:solidFill>
-                  <a:srgbClr val="000000"/>
-                </a:solidFill>
-                <a:latin typeface="Calibri (MS)"/>
-                <a:ea typeface="Calibri (MS)"/>
-                <a:cs typeface="Calibri (MS)"/>
-                <a:sym typeface="Calibri (MS)"/>
-              </a:rPr>
-              <a:t>OS Lockdown Module disables Alt+Tab, Start menu, copy-paste, Task Manager via Win32 hooks</a:t>
-            </a:r>
-          </a:p>
-        </p:txBody>
-      </p:sp>
-      <p:sp>
-        <p:nvSpPr>
-          <p:cNvPr name="TextBox 16" id="16"/>
-          <p:cNvSpPr txBox="true"/>
-          <p:nvPr/>
-        </p:nvSpPr>
-        <p:spPr>
-          <a:xfrm rot="0">
-            <a:off x="13578743" y="2824703"/>
-            <a:ext cx="4446424" cy="400050"/>
-          </a:xfrm>
-          <a:prstGeom prst="rect">
-            <a:avLst/>
-          </a:prstGeom>
-        </p:spPr>
-        <p:txBody>
-          <a:bodyPr anchor="t" rtlCol="false" tIns="0" lIns="0" bIns="0" rIns="0">
-            <a:spAutoFit/>
-          </a:bodyPr>
-          <a:lstStyle/>
-          <a:p>
-            <a:pPr algn="ctr">
-              <a:lnSpc>
-                <a:spcPts val="2879"/>
-              </a:lnSpc>
-              <a:spcBef>
-                <a:spcPct val="0"/>
-              </a:spcBef>
-            </a:pPr>
-            <a:r>
-              <a:rPr lang="en-US" b="true" sz="2400">
-                <a:solidFill>
-                  <a:srgbClr val="000000"/>
-                </a:solidFill>
-                <a:latin typeface="Calibri (MS) Bold"/>
-                <a:ea typeface="Calibri (MS) Bold"/>
-                <a:cs typeface="Calibri (MS) Bold"/>
-                <a:sym typeface="Calibri (MS) Bold"/>
-              </a:rPr>
-              <a:t>T</a:t>
-            </a:r>
-            <a:r>
-              <a:rPr lang="en-US" b="true" sz="2400">
-                <a:solidFill>
-                  <a:srgbClr val="000000"/>
-                </a:solidFill>
-                <a:latin typeface="Calibri (MS) Bold"/>
-                <a:ea typeface="Calibri (MS) Bold"/>
-                <a:cs typeface="Calibri (MS) Bold"/>
-                <a:sym typeface="Calibri (MS) Bold"/>
-              </a:rPr>
-              <a:t>eacher Side - Web App</a:t>
-            </a:r>
-          </a:p>
-        </p:txBody>
-      </p:sp>
-      <p:sp>
-        <p:nvSpPr>
-          <p:cNvPr name="TextBox 17" id="17"/>
-          <p:cNvSpPr txBox="true"/>
-          <p:nvPr/>
-        </p:nvSpPr>
-        <p:spPr>
-          <a:xfrm rot="0">
-            <a:off x="13578743" y="3167603"/>
-            <a:ext cx="4256171" cy="1327150"/>
-          </a:xfrm>
-          <a:prstGeom prst="rect">
-            <a:avLst/>
-          </a:prstGeom>
-        </p:spPr>
-        <p:txBody>
-          <a:bodyPr anchor="t" rtlCol="false" tIns="0" lIns="0" bIns="0" rIns="0">
-            <a:spAutoFit/>
-          </a:bodyPr>
-          <a:lstStyle/>
-          <a:p>
-            <a:pPr algn="just" marL="431801" indent="-215900" lvl="1">
-              <a:lnSpc>
-                <a:spcPts val="2600"/>
-              </a:lnSpc>
-              <a:buFont typeface="Arial"/>
-              <a:buChar char="•"/>
-            </a:pPr>
-            <a:r>
-              <a:rPr lang="en-US" sz="2000">
-                <a:solidFill>
-                  <a:srgbClr val="000000"/>
-                </a:solidFill>
-                <a:latin typeface="Calibri (MS)"/>
-                <a:ea typeface="Calibri (MS)"/>
-                <a:cs typeface="Calibri (MS)"/>
-                <a:sym typeface="Calibri (MS)"/>
-              </a:rPr>
-              <a:t>Re</a:t>
-            </a:r>
-            <a:r>
-              <a:rPr lang="en-US" sz="2000">
-                <a:solidFill>
-                  <a:srgbClr val="000000"/>
-                </a:solidFill>
-                <a:latin typeface="Calibri (MS)"/>
-                <a:ea typeface="Calibri (MS)"/>
-                <a:cs typeface="Calibri (MS)"/>
-                <a:sym typeface="Calibri (MS)"/>
-              </a:rPr>
-              <a:t>act dashboard + exam builder</a:t>
-            </a:r>
-          </a:p>
-          <a:p>
-            <a:pPr algn="just" marL="431801" indent="-215900" lvl="1">
-              <a:lnSpc>
-                <a:spcPts val="2600"/>
-              </a:lnSpc>
-              <a:buFont typeface="Arial"/>
-              <a:buChar char="•"/>
-            </a:pPr>
-            <a:r>
-              <a:rPr lang="en-US" sz="2000">
-                <a:solidFill>
-                  <a:srgbClr val="000000"/>
-                </a:solidFill>
-                <a:latin typeface="Calibri (MS)"/>
-                <a:ea typeface="Calibri (MS)"/>
-                <a:cs typeface="Calibri (MS)"/>
-                <a:sym typeface="Calibri (MS)"/>
-              </a:rPr>
-              <a:t>Node.js/Express handles exam creation, local server compiler and CSV export</a:t>
-            </a:r>
-          </a:p>
-        </p:txBody>
-      </p:sp>
-      <p:grpSp>
-        <p:nvGrpSpPr>
-          <p:cNvPr name="Group 18" id="18"/>
-          <p:cNvGrpSpPr/>
-          <p:nvPr/>
-        </p:nvGrpSpPr>
-        <p:grpSpPr>
-          <a:xfrm rot="0">
-            <a:off x="8562250" y="6001335"/>
-            <a:ext cx="4446424" cy="2615295"/>
-            <a:chOff x="0" y="0"/>
-            <a:chExt cx="7105231" cy="4179151"/>
-          </a:xfrm>
-        </p:grpSpPr>
-        <p:sp>
-          <p:nvSpPr>
-            <p:cNvPr name="Freeform 19" id="19"/>
-            <p:cNvSpPr/>
-            <p:nvPr/>
-          </p:nvSpPr>
-          <p:spPr>
-            <a:xfrm flipH="false" flipV="false" rot="0">
-              <a:off x="0" y="0"/>
-              <a:ext cx="7105269" cy="4179189"/>
-            </a:xfrm>
-            <a:custGeom>
-              <a:avLst/>
-              <a:gdLst/>
-              <a:ahLst/>
-              <a:cxnLst/>
-              <a:rect r="r" b="b" t="t" l="l"/>
-              <a:pathLst>
-                <a:path h="4179189" w="7105269">
-                  <a:moveTo>
-                    <a:pt x="0" y="295021"/>
-                  </a:moveTo>
-                  <a:cubicBezTo>
-                    <a:pt x="0" y="132080"/>
-                    <a:pt x="132080" y="0"/>
-                    <a:pt x="295021" y="0"/>
-                  </a:cubicBezTo>
-                  <a:lnTo>
-                    <a:pt x="6810248" y="0"/>
-                  </a:lnTo>
-                  <a:cubicBezTo>
-                    <a:pt x="6973189" y="0"/>
-                    <a:pt x="7105269" y="132080"/>
-                    <a:pt x="7105269" y="295021"/>
-                  </a:cubicBezTo>
-                  <a:lnTo>
-                    <a:pt x="7105269" y="3884168"/>
-                  </a:lnTo>
-                  <a:cubicBezTo>
-                    <a:pt x="7105269" y="4047109"/>
-                    <a:pt x="6973189" y="4179189"/>
-                    <a:pt x="6810248" y="4179189"/>
-                  </a:cubicBezTo>
-                  <a:lnTo>
-                    <a:pt x="295021" y="4179189"/>
-                  </a:lnTo>
-                  <a:cubicBezTo>
-                    <a:pt x="132080" y="4179189"/>
-                    <a:pt x="0" y="4047109"/>
-                    <a:pt x="0" y="3884168"/>
-                  </a:cubicBezTo>
-                  <a:close/>
-                </a:path>
-              </a:pathLst>
-            </a:custGeom>
-            <a:solidFill>
-              <a:srgbClr val="E6F9FD"/>
-            </a:solidFill>
-            <a:ln w="25400" cap="sq">
-              <a:solidFill>
-                <a:srgbClr val="93C5FD"/>
-              </a:solidFill>
-              <a:prstDash val="solid"/>
-              <a:miter/>
-            </a:ln>
-          </p:spPr>
-        </p:sp>
-      </p:grpSp>
-      <p:sp>
-        <p:nvSpPr>
-          <p:cNvPr name="TextBox 20" id="20"/>
-          <p:cNvSpPr txBox="true"/>
-          <p:nvPr/>
-        </p:nvSpPr>
-        <p:spPr>
-          <a:xfrm rot="0">
-            <a:off x="8562250" y="6100395"/>
-            <a:ext cx="4446424" cy="400050"/>
-          </a:xfrm>
-          <a:prstGeom prst="rect">
-            <a:avLst/>
-          </a:prstGeom>
-        </p:spPr>
-        <p:txBody>
-          <a:bodyPr anchor="t" rtlCol="false" tIns="0" lIns="0" bIns="0" rIns="0">
-            <a:spAutoFit/>
-          </a:bodyPr>
-          <a:lstStyle/>
-          <a:p>
-            <a:pPr algn="ctr">
-              <a:lnSpc>
-                <a:spcPts val="2879"/>
-              </a:lnSpc>
-              <a:spcBef>
-                <a:spcPct val="0"/>
-              </a:spcBef>
-            </a:pPr>
-            <a:r>
-              <a:rPr lang="en-US" b="true" sz="2400">
-                <a:solidFill>
-                  <a:srgbClr val="000000"/>
-                </a:solidFill>
-                <a:latin typeface="Calibri (MS) Bold"/>
-                <a:ea typeface="Calibri (MS) Bold"/>
-                <a:cs typeface="Calibri (MS) Bold"/>
-                <a:sym typeface="Calibri (MS) Bold"/>
-              </a:rPr>
-              <a:t>Cloud Backend</a:t>
-            </a:r>
-          </a:p>
-        </p:txBody>
-      </p:sp>
-      <p:sp>
-        <p:nvSpPr>
-          <p:cNvPr name="TextBox 21" id="21"/>
-          <p:cNvSpPr txBox="true"/>
-          <p:nvPr/>
-        </p:nvSpPr>
-        <p:spPr>
-          <a:xfrm rot="0">
-            <a:off x="8562250" y="6443295"/>
-            <a:ext cx="4256171" cy="1974850"/>
-          </a:xfrm>
-          <a:prstGeom prst="rect">
-            <a:avLst/>
-          </a:prstGeom>
-        </p:spPr>
-        <p:txBody>
-          <a:bodyPr anchor="t" rtlCol="false" tIns="0" lIns="0" bIns="0" rIns="0">
-            <a:spAutoFit/>
-          </a:bodyPr>
-          <a:lstStyle/>
-          <a:p>
-            <a:pPr algn="just" marL="431801" indent="-215900" lvl="1">
-              <a:lnSpc>
-                <a:spcPts val="2600"/>
-              </a:lnSpc>
-              <a:buFont typeface="Arial"/>
-              <a:buChar char="•"/>
-            </a:pPr>
-            <a:r>
-              <a:rPr lang="en-US" sz="2000">
-                <a:solidFill>
-                  <a:srgbClr val="000000"/>
-                </a:solidFill>
-                <a:latin typeface="Calibri (MS)"/>
-                <a:ea typeface="Calibri (MS)"/>
-                <a:cs typeface="Calibri (MS)"/>
-                <a:sym typeface="Calibri (MS)"/>
-              </a:rPr>
-              <a:t>Au</a:t>
-            </a:r>
-            <a:r>
-              <a:rPr lang="en-US" sz="2000">
-                <a:solidFill>
-                  <a:srgbClr val="000000"/>
-                </a:solidFill>
-                <a:latin typeface="Calibri (MS)"/>
-                <a:ea typeface="Calibri (MS)"/>
-                <a:cs typeface="Calibri (MS)"/>
-                <a:sym typeface="Calibri (MS)"/>
-              </a:rPr>
-              <a:t>th → single-use exam codes</a:t>
-            </a:r>
-          </a:p>
-          <a:p>
-            <a:pPr algn="just" marL="431801" indent="-215900" lvl="1">
-              <a:lnSpc>
-                <a:spcPts val="2600"/>
-              </a:lnSpc>
-              <a:buFont typeface="Arial"/>
-              <a:buChar char="•"/>
-            </a:pPr>
-            <a:r>
-              <a:rPr lang="en-US" sz="2000">
-                <a:solidFill>
-                  <a:srgbClr val="000000"/>
-                </a:solidFill>
-                <a:latin typeface="Calibri (MS)"/>
-                <a:ea typeface="Calibri (MS)"/>
-                <a:cs typeface="Calibri (MS)"/>
-                <a:sym typeface="Calibri (MS)"/>
-              </a:rPr>
-              <a:t>Da</a:t>
-            </a:r>
-            <a:r>
-              <a:rPr lang="en-US" sz="2000">
-                <a:solidFill>
-                  <a:srgbClr val="000000"/>
-                </a:solidFill>
-                <a:latin typeface="Calibri (MS)"/>
-                <a:ea typeface="Calibri (MS)"/>
-                <a:cs typeface="Calibri (MS)"/>
-                <a:sym typeface="Calibri (MS)"/>
-              </a:rPr>
-              <a:t>tabase → exams, scores, violations</a:t>
-            </a:r>
-          </a:p>
-          <a:p>
-            <a:pPr algn="just" marL="431801" indent="-215900" lvl="1">
-              <a:lnSpc>
-                <a:spcPts val="2600"/>
-              </a:lnSpc>
-              <a:buFont typeface="Arial"/>
-              <a:buChar char="•"/>
-            </a:pPr>
-            <a:r>
-              <a:rPr lang="en-US" sz="2000">
-                <a:solidFill>
-                  <a:srgbClr val="000000"/>
-                </a:solidFill>
-                <a:latin typeface="Calibri (MS)"/>
-                <a:ea typeface="Calibri (MS)"/>
-                <a:cs typeface="Calibri (MS)"/>
-                <a:sym typeface="Calibri (MS)"/>
-              </a:rPr>
-              <a:t>Realtime → live teacher dashboard updates</a:t>
-            </a:r>
-          </a:p>
-          <a:p>
-            <a:pPr algn="just" marL="431801" indent="-215900" lvl="1">
-              <a:lnSpc>
-                <a:spcPts val="2600"/>
-              </a:lnSpc>
-              <a:buFont typeface="Arial"/>
-              <a:buChar char="•"/>
-            </a:pPr>
-            <a:r>
-              <a:rPr lang="en-US" sz="2000">
-                <a:solidFill>
-                  <a:srgbClr val="000000"/>
-                </a:solidFill>
-                <a:latin typeface="Calibri (MS)"/>
-                <a:ea typeface="Calibri (MS)"/>
-                <a:cs typeface="Calibri (MS)"/>
-                <a:sym typeface="Calibri (MS)"/>
-              </a:rPr>
-              <a:t>Storage → exported files</a:t>
-            </a:r>
-          </a:p>
-        </p:txBody>
-      </p:sp>
-      <p:grpSp>
-        <p:nvGrpSpPr>
-          <p:cNvPr name="Group 22" id="22"/>
-          <p:cNvGrpSpPr/>
-          <p:nvPr/>
-        </p:nvGrpSpPr>
-        <p:grpSpPr>
-          <a:xfrm rot="0">
-            <a:off x="13582496" y="6001335"/>
-            <a:ext cx="4446424" cy="2615295"/>
-            <a:chOff x="0" y="0"/>
-            <a:chExt cx="7105231" cy="4179151"/>
-          </a:xfrm>
-        </p:grpSpPr>
-        <p:sp>
-          <p:nvSpPr>
-            <p:cNvPr name="Freeform 23" id="23"/>
-            <p:cNvSpPr/>
-            <p:nvPr/>
-          </p:nvSpPr>
-          <p:spPr>
-            <a:xfrm flipH="false" flipV="false" rot="0">
-              <a:off x="0" y="0"/>
-              <a:ext cx="7105269" cy="4179189"/>
-            </a:xfrm>
-            <a:custGeom>
-              <a:avLst/>
-              <a:gdLst/>
-              <a:ahLst/>
-              <a:cxnLst/>
-              <a:rect r="r" b="b" t="t" l="l"/>
-              <a:pathLst>
-                <a:path h="4179189" w="7105269">
-                  <a:moveTo>
-                    <a:pt x="0" y="295021"/>
-                  </a:moveTo>
-                  <a:cubicBezTo>
-                    <a:pt x="0" y="132080"/>
-                    <a:pt x="132080" y="0"/>
-                    <a:pt x="295021" y="0"/>
-                  </a:cubicBezTo>
-                  <a:lnTo>
-                    <a:pt x="6810248" y="0"/>
-                  </a:lnTo>
-                  <a:cubicBezTo>
-                    <a:pt x="6973189" y="0"/>
-                    <a:pt x="7105269" y="132080"/>
-                    <a:pt x="7105269" y="295021"/>
-                  </a:cubicBezTo>
-                  <a:lnTo>
-                    <a:pt x="7105269" y="3884168"/>
-                  </a:lnTo>
-                  <a:cubicBezTo>
-                    <a:pt x="7105269" y="4047109"/>
-                    <a:pt x="6973189" y="4179189"/>
-                    <a:pt x="6810248" y="4179189"/>
-                  </a:cubicBezTo>
-                  <a:lnTo>
-                    <a:pt x="295021" y="4179189"/>
-                  </a:lnTo>
-                  <a:cubicBezTo>
-                    <a:pt x="132080" y="4179189"/>
-                    <a:pt x="0" y="4047109"/>
-                    <a:pt x="0" y="3884168"/>
-                  </a:cubicBezTo>
-                  <a:close/>
-                </a:path>
-              </a:pathLst>
-            </a:custGeom>
-            <a:solidFill>
-              <a:srgbClr val="F9FDE6"/>
-            </a:solidFill>
-            <a:ln w="25400" cap="sq">
-              <a:solidFill>
-                <a:srgbClr val="D97706"/>
-              </a:solidFill>
-              <a:prstDash val="solid"/>
-              <a:miter/>
-            </a:ln>
-          </p:spPr>
-        </p:sp>
-      </p:grpSp>
-      <p:sp>
-        <p:nvSpPr>
-          <p:cNvPr name="TextBox 24" id="24"/>
-          <p:cNvSpPr txBox="true"/>
-          <p:nvPr/>
-        </p:nvSpPr>
-        <p:spPr>
-          <a:xfrm rot="0">
-            <a:off x="13582496" y="6100395"/>
-            <a:ext cx="4446424" cy="400050"/>
-          </a:xfrm>
-          <a:prstGeom prst="rect">
-            <a:avLst/>
-          </a:prstGeom>
-        </p:spPr>
-        <p:txBody>
-          <a:bodyPr anchor="t" rtlCol="false" tIns="0" lIns="0" bIns="0" rIns="0">
-            <a:spAutoFit/>
-          </a:bodyPr>
-          <a:lstStyle/>
-          <a:p>
-            <a:pPr algn="ctr">
-              <a:lnSpc>
-                <a:spcPts val="2879"/>
-              </a:lnSpc>
-              <a:spcBef>
-                <a:spcPct val="0"/>
-              </a:spcBef>
-            </a:pPr>
-            <a:r>
-              <a:rPr lang="en-US" b="true" sz="2400">
-                <a:solidFill>
-                  <a:srgbClr val="000000"/>
-                </a:solidFill>
-                <a:latin typeface="Calibri (MS) Bold"/>
-                <a:ea typeface="Calibri (MS) Bold"/>
-                <a:cs typeface="Calibri (MS) Bold"/>
-                <a:sym typeface="Calibri (MS) Bold"/>
-              </a:rPr>
-              <a:t>Key Design Principle</a:t>
-            </a:r>
-          </a:p>
-        </p:txBody>
-      </p:sp>
-      <p:sp>
-        <p:nvSpPr>
-          <p:cNvPr name="TextBox 25" id="25"/>
-          <p:cNvSpPr txBox="true"/>
-          <p:nvPr/>
-        </p:nvSpPr>
-        <p:spPr>
-          <a:xfrm rot="0">
-            <a:off x="13582496" y="6443295"/>
-            <a:ext cx="4256171" cy="1974850"/>
-          </a:xfrm>
-          <a:prstGeom prst="rect">
-            <a:avLst/>
-          </a:prstGeom>
-        </p:spPr>
-        <p:txBody>
-          <a:bodyPr anchor="t" rtlCol="false" tIns="0" lIns="0" bIns="0" rIns="0">
-            <a:spAutoFit/>
-          </a:bodyPr>
-          <a:lstStyle/>
-          <a:p>
-            <a:pPr algn="just" marL="431801" indent="-215900" lvl="1">
-              <a:lnSpc>
-                <a:spcPts val="2600"/>
-              </a:lnSpc>
-              <a:buFont typeface="Arial"/>
-              <a:buChar char="•"/>
-            </a:pPr>
-            <a:r>
-              <a:rPr lang="en-US" sz="2000">
-                <a:solidFill>
-                  <a:srgbClr val="000000"/>
-                </a:solidFill>
-                <a:latin typeface="Calibri (MS)"/>
-                <a:ea typeface="Calibri (MS)"/>
-                <a:cs typeface="Calibri (MS)"/>
-                <a:sym typeface="Calibri (MS)"/>
-              </a:rPr>
-              <a:t>Grad</a:t>
-            </a:r>
-            <a:r>
-              <a:rPr lang="en-US" sz="2000">
-                <a:solidFill>
-                  <a:srgbClr val="000000"/>
-                </a:solidFill>
-                <a:latin typeface="Calibri (MS)"/>
-                <a:ea typeface="Calibri (MS)"/>
-                <a:cs typeface="Calibri (MS)"/>
-                <a:sym typeface="Calibri (MS)"/>
-              </a:rPr>
-              <a:t>ing and lockdown h</a:t>
-            </a:r>
-            <a:r>
-              <a:rPr lang="en-US" sz="2000">
-                <a:solidFill>
-                  <a:srgbClr val="000000"/>
-                </a:solidFill>
-                <a:latin typeface="Calibri (MS)"/>
-                <a:ea typeface="Calibri (MS)"/>
-                <a:cs typeface="Calibri (MS)"/>
-                <a:sym typeface="Calibri (MS)"/>
-              </a:rPr>
-              <a:t>appen loc</a:t>
-            </a:r>
-            <a:r>
-              <a:rPr lang="en-US" sz="2000">
-                <a:solidFill>
-                  <a:srgbClr val="000000"/>
-                </a:solidFill>
-                <a:latin typeface="Calibri (MS)"/>
-                <a:ea typeface="Calibri (MS)"/>
-                <a:cs typeface="Calibri (MS)"/>
-                <a:sym typeface="Calibri (MS)"/>
-              </a:rPr>
-              <a:t>ally, bandwidth doesn't affect exam performance</a:t>
-            </a:r>
-          </a:p>
-          <a:p>
-            <a:pPr algn="just" marL="431801" indent="-215900" lvl="1">
-              <a:lnSpc>
-                <a:spcPts val="2600"/>
-              </a:lnSpc>
-              <a:buFont typeface="Arial"/>
-              <a:buChar char="•"/>
-            </a:pPr>
-            <a:r>
-              <a:rPr lang="en-US" sz="2000">
-                <a:solidFill>
-                  <a:srgbClr val="000000"/>
-                </a:solidFill>
-                <a:latin typeface="Calibri (MS)"/>
-                <a:ea typeface="Calibri (MS)"/>
-                <a:cs typeface="Calibri (MS)"/>
-                <a:sym typeface="Calibri (MS)"/>
-              </a:rPr>
-              <a:t>The cloud's only job is keeping records accurate and the teacher's dashboard live</a:t>
-            </a:r>
-          </a:p>
-        </p:txBody>
-      </p:sp>
-    </p:spTree>
-  </p:cSld>
-  <p:clrMapOvr>
-    <a:masterClrMapping/>
-  </p:clrMapOvr>
-</p:sld>
-</file>
-
-<file path=ppt/slides/slide5.xml><?xml version="1.0" encoding="utf-8"?>
-<p:sld xmlns:p="http://schemas.openxmlformats.org/presentationml/2006/main" xmlns:a="http://schemas.openxmlformats.org/drawingml/2006/main" xmlns:r="http://schemas.openxmlformats.org/officeDocument/2006/relationships">
-  <p:cSld>
-    <p:spTree>
-      <p:nvGrpSpPr>
-        <p:cNvPr id="1" name=""/>
-        <p:cNvGrpSpPr/>
-        <p:nvPr/>
-      </p:nvGrpSpPr>
-      <p:grpSpPr>
-        <a:xfrm>
-          <a:off x="0" y="0"/>
-          <a:ext cx="0" cy="0"/>
-          <a:chOff x="0" y="0"/>
-          <a:chExt cx="0" cy="0"/>
-        </a:xfrm>
-      </p:grpSpPr>
-      <p:grpSp>
-        <p:nvGrpSpPr>
-          <p:cNvPr name="Group 2" id="2"/>
-          <p:cNvGrpSpPr/>
-          <p:nvPr/>
-        </p:nvGrpSpPr>
-        <p:grpSpPr>
-          <a:xfrm rot="0">
-            <a:off x="914400" y="548640"/>
-            <a:ext cx="10972800" cy="1280160"/>
-            <a:chOff x="0" y="0"/>
-            <a:chExt cx="14630400" cy="1706880"/>
-          </a:xfrm>
-        </p:grpSpPr>
-        <p:sp>
-          <p:nvSpPr>
-            <p:cNvPr name="Freeform 3" id="3"/>
-            <p:cNvSpPr/>
-            <p:nvPr/>
-          </p:nvSpPr>
-          <p:spPr>
-            <a:xfrm flipH="false" flipV="false" rot="0">
-              <a:off x="0" y="0"/>
-              <a:ext cx="14630400" cy="1706880"/>
-            </a:xfrm>
-            <a:custGeom>
-              <a:avLst/>
-              <a:gdLst/>
-              <a:ahLst/>
-              <a:cxnLst/>
-              <a:rect r="r" b="b" t="t" l="l"/>
-              <a:pathLst>
-                <a:path h="1706880" w="14630400">
-                  <a:moveTo>
-                    <a:pt x="0" y="0"/>
-                  </a:moveTo>
-                  <a:lnTo>
-                    <a:pt x="14630400" y="0"/>
-                  </a:lnTo>
-                  <a:lnTo>
-                    <a:pt x="14630400" y="1706880"/>
-                  </a:lnTo>
-                  <a:lnTo>
-                    <a:pt x="0" y="1706880"/>
-                  </a:lnTo>
-                  <a:close/>
-                </a:path>
-              </a:pathLst>
-            </a:custGeom>
-            <a:blipFill>
-              <a:blip r:embed="rId2">
-                <a:alphaModFix amt="0"/>
-              </a:blip>
-              <a:stretch>
-                <a:fillRect l="0" t="-117014" r="0" b="-117014"/>
-              </a:stretch>
-            </a:blipFill>
-          </p:spPr>
-        </p:sp>
-        <p:sp>
-          <p:nvSpPr>
-            <p:cNvPr name="TextBox 4" id="4"/>
-            <p:cNvSpPr txBox="true"/>
-            <p:nvPr/>
-          </p:nvSpPr>
-          <p:spPr>
-            <a:xfrm>
-              <a:off x="0" y="-123825"/>
-              <a:ext cx="14630400" cy="1830705"/>
-            </a:xfrm>
-            <a:prstGeom prst="rect">
-              <a:avLst/>
-            </a:prstGeom>
-          </p:spPr>
-          <p:txBody>
-            <a:bodyPr anchor="ctr" rtlCol="false" tIns="0" lIns="0" bIns="0" rIns="0"/>
-            <a:lstStyle/>
-            <a:p>
-              <a:pPr algn="l">
-                <a:lnSpc>
-                  <a:spcPts val="7680"/>
-                </a:lnSpc>
-              </a:pPr>
-              <a:r>
-                <a:rPr lang="en-US" sz="6400" b="true">
+                <a:rPr lang="en-US" sz="6400" b="1">
                   <a:solidFill>
                     <a:srgbClr val="1A1A2E"/>
                   </a:solidFill>
@@ -8957,12 +7721,12 @@
       </p:grpSp>
       <p:grpSp>
         <p:nvGrpSpPr>
-          <p:cNvPr name="Group 5" id="5"/>
+          <p:cNvPr id="5" name="Group 5"/>
           <p:cNvGrpSpPr/>
           <p:nvPr/>
         </p:nvGrpSpPr>
         <p:grpSpPr>
-          <a:xfrm rot="0">
+          <a:xfrm>
             <a:off x="901703" y="1962407"/>
             <a:ext cx="16484603" cy="98555"/>
             <a:chOff x="0" y="0"/>
@@ -8971,12 +7735,12 @@
         </p:grpSpPr>
         <p:sp>
           <p:nvSpPr>
-            <p:cNvPr name="Freeform 6" id="6"/>
+            <p:cNvPr id="6" name="Freeform 6"/>
             <p:cNvSpPr/>
             <p:nvPr/>
           </p:nvSpPr>
           <p:spPr>
-            <a:xfrm flipH="false" flipV="false" rot="0">
+            <a:xfrm>
               <a:off x="0" y="0"/>
               <a:ext cx="21979510" cy="131445"/>
             </a:xfrm>
@@ -8985,9 +7749,9 @@
               <a:gdLst/>
               <a:ahLst/>
               <a:cxnLst/>
-              <a:rect r="r" b="b" t="t" l="l"/>
+              <a:rect l="l" t="t" r="r" b="b"/>
               <a:pathLst>
-                <a:path h="131445" w="21979510">
+                <a:path w="21979510" h="131445">
                   <a:moveTo>
                     <a:pt x="0" y="0"/>
                   </a:moveTo>
@@ -9019,12 +7783,12 @@
       </p:grpSp>
       <p:grpSp>
         <p:nvGrpSpPr>
-          <p:cNvPr name="Group 7" id="7"/>
+          <p:cNvPr id="7" name="Group 7"/>
           <p:cNvGrpSpPr/>
           <p:nvPr/>
         </p:nvGrpSpPr>
         <p:grpSpPr>
-          <a:xfrm rot="0">
+          <a:xfrm>
             <a:off x="901703" y="2181863"/>
             <a:ext cx="8255003" cy="7340603"/>
             <a:chOff x="0" y="0"/>
@@ -9033,12 +7797,12 @@
         </p:grpSpPr>
         <p:sp>
           <p:nvSpPr>
-            <p:cNvPr name="Freeform 8" id="8"/>
+            <p:cNvPr id="8" name="Freeform 8"/>
             <p:cNvSpPr/>
             <p:nvPr/>
           </p:nvSpPr>
           <p:spPr>
-            <a:xfrm flipH="false" flipV="false" rot="0">
+            <a:xfrm>
               <a:off x="0" y="0"/>
               <a:ext cx="11006709" cy="9787509"/>
             </a:xfrm>
@@ -9047,9 +7811,9 @@
               <a:gdLst/>
               <a:ahLst/>
               <a:cxnLst/>
-              <a:rect r="r" b="b" t="t" l="l"/>
+              <a:rect l="l" t="t" r="r" b="b"/>
               <a:pathLst>
-                <a:path h="9787509" w="11006709">
+                <a:path w="11006709" h="9787509">
                   <a:moveTo>
                     <a:pt x="0" y="293624"/>
                   </a:moveTo>
@@ -9101,12 +7865,12 @@
       </p:grpSp>
       <p:grpSp>
         <p:nvGrpSpPr>
-          <p:cNvPr name="Group 9" id="9"/>
+          <p:cNvPr id="9" name="Group 9"/>
           <p:cNvGrpSpPr/>
           <p:nvPr/>
         </p:nvGrpSpPr>
         <p:grpSpPr>
-          <a:xfrm rot="0">
+          <a:xfrm>
             <a:off x="1280160" y="2468880"/>
             <a:ext cx="7498080" cy="731520"/>
             <a:chOff x="0" y="0"/>
@@ -9115,12 +7879,12 @@
         </p:grpSpPr>
         <p:sp>
           <p:nvSpPr>
-            <p:cNvPr name="Freeform 10" id="10"/>
+            <p:cNvPr id="10" name="Freeform 10"/>
             <p:cNvSpPr/>
             <p:nvPr/>
           </p:nvSpPr>
           <p:spPr>
-            <a:xfrm flipH="false" flipV="false" rot="0">
+            <a:xfrm>
               <a:off x="0" y="0"/>
               <a:ext cx="9997440" cy="975360"/>
             </a:xfrm>
@@ -9129,9 +7893,9 @@
               <a:gdLst/>
               <a:ahLst/>
               <a:cxnLst/>
-              <a:rect r="r" b="b" t="t" l="l"/>
+              <a:rect l="l" t="t" r="r" b="b"/>
               <a:pathLst>
-                <a:path h="975360" w="9997440">
+                <a:path w="9997440" h="975360">
                   <a:moveTo>
                     <a:pt x="0" y="0"/>
                   </a:moveTo>
@@ -9153,15 +7917,15 @@
                 <a:alphaModFix amt="0"/>
               </a:blip>
               <a:stretch>
-                <a:fillRect l="0" t="-149721" r="0" b="-149721"/>
+                <a:fillRect t="-149721" b="-149721"/>
               </a:stretch>
             </a:blipFill>
           </p:spPr>
         </p:sp>
         <p:sp>
           <p:nvSpPr>
-            <p:cNvPr name="TextBox 11" id="11"/>
-            <p:cNvSpPr txBox="true"/>
+            <p:cNvPr id="11" name="TextBox 11"/>
+            <p:cNvSpPr txBox="1"/>
             <p:nvPr/>
           </p:nvSpPr>
           <p:spPr>
@@ -9174,7 +7938,7 @@
             </a:prstGeom>
           </p:spPr>
           <p:txBody>
-            <a:bodyPr anchor="ctr" rtlCol="false" tIns="0" lIns="0" bIns="0" rIns="0"/>
+            <a:bodyPr lIns="0" tIns="0" rIns="0" bIns="0" rtlCol="0" anchor="ctr"/>
             <a:lstStyle/>
             <a:p>
               <a:pPr algn="l">
@@ -9183,7 +7947,7 @@
                 </a:lnSpc>
               </a:pPr>
               <a:r>
-                <a:rPr lang="en-US" sz="2600" b="true">
+                <a:rPr lang="en-US" sz="2600" b="1">
                   <a:solidFill>
                     <a:srgbClr val="DC2626"/>
                   </a:solidFill>
@@ -9200,12 +7964,12 @@
       </p:grpSp>
       <p:grpSp>
         <p:nvGrpSpPr>
-          <p:cNvPr name="Group 12" id="12"/>
+          <p:cNvPr id="12" name="Group 12"/>
           <p:cNvGrpSpPr/>
           <p:nvPr/>
         </p:nvGrpSpPr>
         <p:grpSpPr>
-          <a:xfrm rot="0">
+          <a:xfrm>
             <a:off x="1371600" y="3474720"/>
             <a:ext cx="7315200" cy="694944"/>
             <a:chOff x="0" y="0"/>
@@ -9214,12 +7978,12 @@
         </p:grpSpPr>
         <p:sp>
           <p:nvSpPr>
-            <p:cNvPr name="Freeform 13" id="13"/>
+            <p:cNvPr id="13" name="Freeform 13"/>
             <p:cNvSpPr/>
             <p:nvPr/>
           </p:nvSpPr>
           <p:spPr>
-            <a:xfrm flipH="false" flipV="false" rot="0">
+            <a:xfrm>
               <a:off x="0" y="0"/>
               <a:ext cx="9753600" cy="926592"/>
             </a:xfrm>
@@ -9228,9 +7992,9 @@
               <a:gdLst/>
               <a:ahLst/>
               <a:cxnLst/>
-              <a:rect r="r" b="b" t="t" l="l"/>
+              <a:rect l="l" t="t" r="r" b="b"/>
               <a:pathLst>
-                <a:path h="926592" w="9753600">
+                <a:path w="9753600" h="926592">
                   <a:moveTo>
                     <a:pt x="0" y="0"/>
                   </a:moveTo>
@@ -9252,15 +8016,15 @@
                 <a:alphaModFix amt="0"/>
               </a:blip>
               <a:stretch>
-                <a:fillRect l="0" t="-155105" r="0" b="-155105"/>
+                <a:fillRect t="-155105" b="-155105"/>
               </a:stretch>
             </a:blipFill>
           </p:spPr>
         </p:sp>
         <p:sp>
           <p:nvSpPr>
-            <p:cNvPr name="TextBox 14" id="14"/>
-            <p:cNvSpPr txBox="true"/>
+            <p:cNvPr id="14" name="TextBox 14"/>
+            <p:cNvSpPr txBox="1"/>
             <p:nvPr/>
           </p:nvSpPr>
           <p:spPr>
@@ -9273,10 +8037,10 @@
             </a:prstGeom>
           </p:spPr>
           <p:txBody>
-            <a:bodyPr anchor="ctr" rtlCol="false" tIns="0" lIns="0" bIns="0" rIns="0"/>
+            <a:bodyPr lIns="0" tIns="0" rIns="0" bIns="0" rtlCol="0" anchor="ctr"/>
             <a:lstStyle/>
             <a:p>
-              <a:pPr algn="l" marL="554990" indent="-277495" lvl="1">
+              <a:pPr marL="554990" lvl="1" indent="-277495" algn="l">
                 <a:lnSpc>
                   <a:spcPts val="2760"/>
                 </a:lnSpc>
@@ -9301,12 +8065,12 @@
       </p:grpSp>
       <p:grpSp>
         <p:nvGrpSpPr>
-          <p:cNvPr name="Group 15" id="15"/>
+          <p:cNvPr id="15" name="Group 15"/>
           <p:cNvGrpSpPr/>
           <p:nvPr/>
         </p:nvGrpSpPr>
         <p:grpSpPr>
-          <a:xfrm rot="0">
+          <a:xfrm>
             <a:off x="1371600" y="4261104"/>
             <a:ext cx="7315200" cy="694944"/>
             <a:chOff x="0" y="0"/>
@@ -9315,12 +8079,12 @@
         </p:grpSpPr>
         <p:sp>
           <p:nvSpPr>
-            <p:cNvPr name="Freeform 16" id="16"/>
+            <p:cNvPr id="16" name="Freeform 16"/>
             <p:cNvSpPr/>
             <p:nvPr/>
           </p:nvSpPr>
           <p:spPr>
-            <a:xfrm flipH="false" flipV="false" rot="0">
+            <a:xfrm>
               <a:off x="0" y="0"/>
               <a:ext cx="9753600" cy="926592"/>
             </a:xfrm>
@@ -9329,9 +8093,9 @@
               <a:gdLst/>
               <a:ahLst/>
               <a:cxnLst/>
-              <a:rect r="r" b="b" t="t" l="l"/>
+              <a:rect l="l" t="t" r="r" b="b"/>
               <a:pathLst>
-                <a:path h="926592" w="9753600">
+                <a:path w="9753600" h="926592">
                   <a:moveTo>
                     <a:pt x="0" y="0"/>
                   </a:moveTo>
@@ -9353,15 +8117,15 @@
                 <a:alphaModFix amt="0"/>
               </a:blip>
               <a:stretch>
-                <a:fillRect l="0" t="-155105" r="0" b="-155105"/>
+                <a:fillRect t="-155105" b="-155105"/>
               </a:stretch>
             </a:blipFill>
           </p:spPr>
         </p:sp>
         <p:sp>
           <p:nvSpPr>
-            <p:cNvPr name="TextBox 17" id="17"/>
-            <p:cNvSpPr txBox="true"/>
+            <p:cNvPr id="17" name="TextBox 17"/>
+            <p:cNvSpPr txBox="1"/>
             <p:nvPr/>
           </p:nvSpPr>
           <p:spPr>
@@ -9374,10 +8138,10 @@
             </a:prstGeom>
           </p:spPr>
           <p:txBody>
-            <a:bodyPr anchor="ctr" rtlCol="false" tIns="0" lIns="0" bIns="0" rIns="0"/>
+            <a:bodyPr lIns="0" tIns="0" rIns="0" bIns="0" rtlCol="0" anchor="ctr"/>
             <a:lstStyle/>
             <a:p>
-              <a:pPr algn="l" marL="554990" indent="-277495" lvl="1">
+              <a:pPr marL="554990" lvl="1" indent="-277495" algn="l">
                 <a:lnSpc>
                   <a:spcPts val="2760"/>
                 </a:lnSpc>
@@ -9402,12 +8166,12 @@
       </p:grpSp>
       <p:grpSp>
         <p:nvGrpSpPr>
-          <p:cNvPr name="Group 18" id="18"/>
+          <p:cNvPr id="18" name="Group 18"/>
           <p:cNvGrpSpPr/>
           <p:nvPr/>
         </p:nvGrpSpPr>
         <p:grpSpPr>
-          <a:xfrm rot="0">
+          <a:xfrm>
             <a:off x="1371600" y="5047488"/>
             <a:ext cx="7315200" cy="694944"/>
             <a:chOff x="0" y="0"/>
@@ -9416,12 +8180,12 @@
         </p:grpSpPr>
         <p:sp>
           <p:nvSpPr>
-            <p:cNvPr name="Freeform 19" id="19"/>
+            <p:cNvPr id="19" name="Freeform 19"/>
             <p:cNvSpPr/>
             <p:nvPr/>
           </p:nvSpPr>
           <p:spPr>
-            <a:xfrm flipH="false" flipV="false" rot="0">
+            <a:xfrm>
               <a:off x="0" y="0"/>
               <a:ext cx="9753600" cy="926592"/>
             </a:xfrm>
@@ -9430,9 +8194,9 @@
               <a:gdLst/>
               <a:ahLst/>
               <a:cxnLst/>
-              <a:rect r="r" b="b" t="t" l="l"/>
+              <a:rect l="l" t="t" r="r" b="b"/>
               <a:pathLst>
-                <a:path h="926592" w="9753600">
+                <a:path w="9753600" h="926592">
                   <a:moveTo>
                     <a:pt x="0" y="0"/>
                   </a:moveTo>
@@ -9454,15 +8218,15 @@
                 <a:alphaModFix amt="0"/>
               </a:blip>
               <a:stretch>
-                <a:fillRect l="0" t="-155105" r="0" b="-155105"/>
+                <a:fillRect t="-155105" b="-155105"/>
               </a:stretch>
             </a:blipFill>
           </p:spPr>
         </p:sp>
         <p:sp>
           <p:nvSpPr>
-            <p:cNvPr name="TextBox 20" id="20"/>
-            <p:cNvSpPr txBox="true"/>
+            <p:cNvPr id="20" name="TextBox 20"/>
+            <p:cNvSpPr txBox="1"/>
             <p:nvPr/>
           </p:nvSpPr>
           <p:spPr>
@@ -9475,10 +8239,10 @@
             </a:prstGeom>
           </p:spPr>
           <p:txBody>
-            <a:bodyPr anchor="ctr" rtlCol="false" tIns="0" lIns="0" bIns="0" rIns="0"/>
+            <a:bodyPr lIns="0" tIns="0" rIns="0" bIns="0" rtlCol="0" anchor="ctr"/>
             <a:lstStyle/>
             <a:p>
-              <a:pPr algn="l" marL="554990" indent="-277495" lvl="1">
+              <a:pPr marL="554990" lvl="1" indent="-277495" algn="l">
                 <a:lnSpc>
                   <a:spcPts val="2760"/>
                 </a:lnSpc>
@@ -9503,12 +8267,12 @@
       </p:grpSp>
       <p:grpSp>
         <p:nvGrpSpPr>
-          <p:cNvPr name="Group 21" id="21"/>
+          <p:cNvPr id="21" name="Group 21"/>
           <p:cNvGrpSpPr/>
           <p:nvPr/>
         </p:nvGrpSpPr>
         <p:grpSpPr>
-          <a:xfrm rot="0">
+          <a:xfrm>
             <a:off x="1371600" y="5833872"/>
             <a:ext cx="7315200" cy="694944"/>
             <a:chOff x="0" y="0"/>
@@ -9517,12 +8281,12 @@
         </p:grpSpPr>
         <p:sp>
           <p:nvSpPr>
-            <p:cNvPr name="Freeform 22" id="22"/>
+            <p:cNvPr id="22" name="Freeform 22"/>
             <p:cNvSpPr/>
             <p:nvPr/>
           </p:nvSpPr>
           <p:spPr>
-            <a:xfrm flipH="false" flipV="false" rot="0">
+            <a:xfrm>
               <a:off x="0" y="0"/>
               <a:ext cx="9753600" cy="926592"/>
             </a:xfrm>
@@ -9531,9 +8295,9 @@
               <a:gdLst/>
               <a:ahLst/>
               <a:cxnLst/>
-              <a:rect r="r" b="b" t="t" l="l"/>
+              <a:rect l="l" t="t" r="r" b="b"/>
               <a:pathLst>
-                <a:path h="926592" w="9753600">
+                <a:path w="9753600" h="926592">
                   <a:moveTo>
                     <a:pt x="0" y="0"/>
                   </a:moveTo>
@@ -9555,15 +8319,15 @@
                 <a:alphaModFix amt="0"/>
               </a:blip>
               <a:stretch>
-                <a:fillRect l="0" t="-155105" r="0" b="-155105"/>
+                <a:fillRect t="-155105" b="-155105"/>
               </a:stretch>
             </a:blipFill>
           </p:spPr>
         </p:sp>
         <p:sp>
           <p:nvSpPr>
-            <p:cNvPr name="TextBox 23" id="23"/>
-            <p:cNvSpPr txBox="true"/>
+            <p:cNvPr id="23" name="TextBox 23"/>
+            <p:cNvSpPr txBox="1"/>
             <p:nvPr/>
           </p:nvSpPr>
           <p:spPr>
@@ -9576,10 +8340,10 @@
             </a:prstGeom>
           </p:spPr>
           <p:txBody>
-            <a:bodyPr anchor="ctr" rtlCol="false" tIns="0" lIns="0" bIns="0" rIns="0"/>
+            <a:bodyPr lIns="0" tIns="0" rIns="0" bIns="0" rtlCol="0" anchor="ctr"/>
             <a:lstStyle/>
             <a:p>
-              <a:pPr algn="l" marL="554990" indent="-277495" lvl="1">
+              <a:pPr marL="554990" lvl="1" indent="-277495" algn="l">
                 <a:lnSpc>
                   <a:spcPts val="2760"/>
                 </a:lnSpc>
@@ -9604,12 +8368,12 @@
       </p:grpSp>
       <p:grpSp>
         <p:nvGrpSpPr>
-          <p:cNvPr name="Group 24" id="24"/>
+          <p:cNvPr id="24" name="Group 24"/>
           <p:cNvGrpSpPr/>
           <p:nvPr/>
         </p:nvGrpSpPr>
         <p:grpSpPr>
-          <a:xfrm rot="0">
+          <a:xfrm>
             <a:off x="1371600" y="6620256"/>
             <a:ext cx="7315200" cy="694944"/>
             <a:chOff x="0" y="0"/>
@@ -9618,12 +8382,12 @@
         </p:grpSpPr>
         <p:sp>
           <p:nvSpPr>
-            <p:cNvPr name="Freeform 25" id="25"/>
+            <p:cNvPr id="25" name="Freeform 25"/>
             <p:cNvSpPr/>
             <p:nvPr/>
           </p:nvSpPr>
           <p:spPr>
-            <a:xfrm flipH="false" flipV="false" rot="0">
+            <a:xfrm>
               <a:off x="0" y="0"/>
               <a:ext cx="9753600" cy="926592"/>
             </a:xfrm>
@@ -9632,9 +8396,9 @@
               <a:gdLst/>
               <a:ahLst/>
               <a:cxnLst/>
-              <a:rect r="r" b="b" t="t" l="l"/>
+              <a:rect l="l" t="t" r="r" b="b"/>
               <a:pathLst>
-                <a:path h="926592" w="9753600">
+                <a:path w="9753600" h="926592">
                   <a:moveTo>
                     <a:pt x="0" y="0"/>
                   </a:moveTo>
@@ -9656,15 +8420,15 @@
                 <a:alphaModFix amt="0"/>
               </a:blip>
               <a:stretch>
-                <a:fillRect l="0" t="-155105" r="0" b="-155105"/>
+                <a:fillRect t="-155105" b="-155105"/>
               </a:stretch>
             </a:blipFill>
           </p:spPr>
         </p:sp>
         <p:sp>
           <p:nvSpPr>
-            <p:cNvPr name="TextBox 26" id="26"/>
-            <p:cNvSpPr txBox="true"/>
+            <p:cNvPr id="26" name="TextBox 26"/>
+            <p:cNvSpPr txBox="1"/>
             <p:nvPr/>
           </p:nvSpPr>
           <p:spPr>
@@ -9677,10 +8441,10 @@
             </a:prstGeom>
           </p:spPr>
           <p:txBody>
-            <a:bodyPr anchor="ctr" rtlCol="false" tIns="0" lIns="0" bIns="0" rIns="0"/>
+            <a:bodyPr lIns="0" tIns="0" rIns="0" bIns="0" rtlCol="0" anchor="ctr"/>
             <a:lstStyle/>
             <a:p>
-              <a:pPr algn="l" marL="554990" indent="-277495" lvl="1">
+              <a:pPr marL="554990" lvl="1" indent="-277495" algn="l">
                 <a:lnSpc>
                   <a:spcPts val="2760"/>
                 </a:lnSpc>
@@ -9705,12 +8469,12 @@
       </p:grpSp>
       <p:grpSp>
         <p:nvGrpSpPr>
-          <p:cNvPr name="Group 27" id="27"/>
+          <p:cNvPr id="27" name="Group 27"/>
           <p:cNvGrpSpPr/>
           <p:nvPr/>
         </p:nvGrpSpPr>
         <p:grpSpPr>
-          <a:xfrm rot="0">
+          <a:xfrm>
             <a:off x="1371600" y="7406640"/>
             <a:ext cx="7315200" cy="694944"/>
             <a:chOff x="0" y="0"/>
@@ -9719,12 +8483,12 @@
         </p:grpSpPr>
         <p:sp>
           <p:nvSpPr>
-            <p:cNvPr name="Freeform 28" id="28"/>
+            <p:cNvPr id="28" name="Freeform 28"/>
             <p:cNvSpPr/>
             <p:nvPr/>
           </p:nvSpPr>
           <p:spPr>
-            <a:xfrm flipH="false" flipV="false" rot="0">
+            <a:xfrm>
               <a:off x="0" y="0"/>
               <a:ext cx="9753600" cy="926592"/>
             </a:xfrm>
@@ -9733,9 +8497,9 @@
               <a:gdLst/>
               <a:ahLst/>
               <a:cxnLst/>
-              <a:rect r="r" b="b" t="t" l="l"/>
+              <a:rect l="l" t="t" r="r" b="b"/>
               <a:pathLst>
-                <a:path h="926592" w="9753600">
+                <a:path w="9753600" h="926592">
                   <a:moveTo>
                     <a:pt x="0" y="0"/>
                   </a:moveTo>
@@ -9757,15 +8521,15 @@
                 <a:alphaModFix amt="0"/>
               </a:blip>
               <a:stretch>
-                <a:fillRect l="0" t="-155105" r="0" b="-155105"/>
+                <a:fillRect t="-155105" b="-155105"/>
               </a:stretch>
             </a:blipFill>
           </p:spPr>
         </p:sp>
         <p:sp>
           <p:nvSpPr>
-            <p:cNvPr name="TextBox 29" id="29"/>
-            <p:cNvSpPr txBox="true"/>
+            <p:cNvPr id="29" name="TextBox 29"/>
+            <p:cNvSpPr txBox="1"/>
             <p:nvPr/>
           </p:nvSpPr>
           <p:spPr>
@@ -9778,10 +8542,10 @@
             </a:prstGeom>
           </p:spPr>
           <p:txBody>
-            <a:bodyPr anchor="ctr" rtlCol="false" tIns="0" lIns="0" bIns="0" rIns="0"/>
+            <a:bodyPr lIns="0" tIns="0" rIns="0" bIns="0" rtlCol="0" anchor="ctr"/>
             <a:lstStyle/>
             <a:p>
-              <a:pPr algn="l" marL="554990" indent="-277495" lvl="1">
+              <a:pPr marL="554990" lvl="1" indent="-277495" algn="l">
                 <a:lnSpc>
                   <a:spcPts val="2760"/>
                 </a:lnSpc>
@@ -9806,12 +8570,12 @@
       </p:grpSp>
       <p:grpSp>
         <p:nvGrpSpPr>
-          <p:cNvPr name="Group 30" id="30"/>
+          <p:cNvPr id="30" name="Group 30"/>
           <p:cNvGrpSpPr/>
           <p:nvPr/>
         </p:nvGrpSpPr>
         <p:grpSpPr>
-          <a:xfrm rot="0">
+          <a:xfrm>
             <a:off x="1371600" y="8193024"/>
             <a:ext cx="7315200" cy="694944"/>
             <a:chOff x="0" y="0"/>
@@ -9820,12 +8584,12 @@
         </p:grpSpPr>
         <p:sp>
           <p:nvSpPr>
-            <p:cNvPr name="Freeform 31" id="31"/>
+            <p:cNvPr id="31" name="Freeform 31"/>
             <p:cNvSpPr/>
             <p:nvPr/>
           </p:nvSpPr>
           <p:spPr>
-            <a:xfrm flipH="false" flipV="false" rot="0">
+            <a:xfrm>
               <a:off x="0" y="0"/>
               <a:ext cx="9753600" cy="926592"/>
             </a:xfrm>
@@ -9834,9 +8598,9 @@
               <a:gdLst/>
               <a:ahLst/>
               <a:cxnLst/>
-              <a:rect r="r" b="b" t="t" l="l"/>
+              <a:rect l="l" t="t" r="r" b="b"/>
               <a:pathLst>
-                <a:path h="926592" w="9753600">
+                <a:path w="9753600" h="926592">
                   <a:moveTo>
                     <a:pt x="0" y="0"/>
                   </a:moveTo>
@@ -9858,15 +8622,15 @@
                 <a:alphaModFix amt="0"/>
               </a:blip>
               <a:stretch>
-                <a:fillRect l="0" t="-155105" r="0" b="-155105"/>
+                <a:fillRect t="-155105" b="-155105"/>
               </a:stretch>
             </a:blipFill>
           </p:spPr>
         </p:sp>
         <p:sp>
           <p:nvSpPr>
-            <p:cNvPr name="TextBox 32" id="32"/>
-            <p:cNvSpPr txBox="true"/>
+            <p:cNvPr id="32" name="TextBox 32"/>
+            <p:cNvSpPr txBox="1"/>
             <p:nvPr/>
           </p:nvSpPr>
           <p:spPr>
@@ -9879,10 +8643,10 @@
             </a:prstGeom>
           </p:spPr>
           <p:txBody>
-            <a:bodyPr anchor="ctr" rtlCol="false" tIns="0" lIns="0" bIns="0" rIns="0"/>
+            <a:bodyPr lIns="0" tIns="0" rIns="0" bIns="0" rtlCol="0" anchor="ctr"/>
             <a:lstStyle/>
             <a:p>
-              <a:pPr algn="l" marL="554990" indent="-277495" lvl="1">
+              <a:pPr marL="554990" lvl="1" indent="-277495" algn="l">
                 <a:lnSpc>
                   <a:spcPts val="2760"/>
                 </a:lnSpc>
@@ -9907,12 +8671,12 @@
       </p:grpSp>
       <p:grpSp>
         <p:nvGrpSpPr>
-          <p:cNvPr name="Group 33" id="33"/>
+          <p:cNvPr id="33" name="Group 33"/>
           <p:cNvGrpSpPr/>
           <p:nvPr/>
         </p:nvGrpSpPr>
         <p:grpSpPr>
-          <a:xfrm rot="0">
+          <a:xfrm>
             <a:off x="9497063" y="2181863"/>
             <a:ext cx="8255003" cy="7340603"/>
             <a:chOff x="0" y="0"/>
@@ -9921,12 +8685,12 @@
         </p:grpSpPr>
         <p:sp>
           <p:nvSpPr>
-            <p:cNvPr name="Freeform 34" id="34"/>
+            <p:cNvPr id="34" name="Freeform 34"/>
             <p:cNvSpPr/>
             <p:nvPr/>
           </p:nvSpPr>
           <p:spPr>
-            <a:xfrm flipH="false" flipV="false" rot="0">
+            <a:xfrm>
               <a:off x="0" y="0"/>
               <a:ext cx="11006709" cy="9787509"/>
             </a:xfrm>
@@ -9935,9 +8699,9 @@
               <a:gdLst/>
               <a:ahLst/>
               <a:cxnLst/>
-              <a:rect r="r" b="b" t="t" l="l"/>
+              <a:rect l="l" t="t" r="r" b="b"/>
               <a:pathLst>
-                <a:path h="9787509" w="11006709">
+                <a:path w="11006709" h="9787509">
                   <a:moveTo>
                     <a:pt x="0" y="293624"/>
                   </a:moveTo>
@@ -9989,12 +8753,12 @@
       </p:grpSp>
       <p:grpSp>
         <p:nvGrpSpPr>
-          <p:cNvPr name="Group 35" id="35"/>
+          <p:cNvPr id="35" name="Group 35"/>
           <p:cNvGrpSpPr/>
           <p:nvPr/>
         </p:nvGrpSpPr>
         <p:grpSpPr>
-          <a:xfrm rot="0">
+          <a:xfrm>
             <a:off x="9875520" y="2468880"/>
             <a:ext cx="7498080" cy="731520"/>
             <a:chOff x="0" y="0"/>
@@ -10003,12 +8767,12 @@
         </p:grpSpPr>
         <p:sp>
           <p:nvSpPr>
-            <p:cNvPr name="Freeform 36" id="36"/>
+            <p:cNvPr id="36" name="Freeform 36"/>
             <p:cNvSpPr/>
             <p:nvPr/>
           </p:nvSpPr>
           <p:spPr>
-            <a:xfrm flipH="false" flipV="false" rot="0">
+            <a:xfrm>
               <a:off x="0" y="0"/>
               <a:ext cx="9997440" cy="975360"/>
             </a:xfrm>
@@ -10017,9 +8781,9 @@
               <a:gdLst/>
               <a:ahLst/>
               <a:cxnLst/>
-              <a:rect r="r" b="b" t="t" l="l"/>
+              <a:rect l="l" t="t" r="r" b="b"/>
               <a:pathLst>
-                <a:path h="975360" w="9997440">
+                <a:path w="9997440" h="975360">
                   <a:moveTo>
                     <a:pt x="0" y="0"/>
                   </a:moveTo>
@@ -10041,15 +8805,15 @@
                 <a:alphaModFix amt="0"/>
               </a:blip>
               <a:stretch>
-                <a:fillRect l="0" t="-149721" r="0" b="-149721"/>
+                <a:fillRect t="-149721" b="-149721"/>
               </a:stretch>
             </a:blipFill>
           </p:spPr>
         </p:sp>
         <p:sp>
           <p:nvSpPr>
-            <p:cNvPr name="TextBox 37" id="37"/>
-            <p:cNvSpPr txBox="true"/>
+            <p:cNvPr id="37" name="TextBox 37"/>
+            <p:cNvSpPr txBox="1"/>
             <p:nvPr/>
           </p:nvSpPr>
           <p:spPr>
@@ -10062,7 +8826,7 @@
             </a:prstGeom>
           </p:spPr>
           <p:txBody>
-            <a:bodyPr anchor="ctr" rtlCol="false" tIns="0" lIns="0" bIns="0" rIns="0"/>
+            <a:bodyPr lIns="0" tIns="0" rIns="0" bIns="0" rtlCol="0" anchor="ctr"/>
             <a:lstStyle/>
             <a:p>
               <a:pPr algn="l">
@@ -10071,7 +8835,7 @@
                 </a:lnSpc>
               </a:pPr>
               <a:r>
-                <a:rPr lang="en-US" sz="2600" b="true">
+                <a:rPr lang="en-US" sz="2600" b="1">
                   <a:solidFill>
                     <a:srgbClr val="2563EB"/>
                   </a:solidFill>
@@ -10088,12 +8852,12 @@
       </p:grpSp>
       <p:grpSp>
         <p:nvGrpSpPr>
-          <p:cNvPr name="Group 38" id="38"/>
+          <p:cNvPr id="38" name="Group 38"/>
           <p:cNvGrpSpPr/>
           <p:nvPr/>
         </p:nvGrpSpPr>
         <p:grpSpPr>
-          <a:xfrm rot="0">
+          <a:xfrm>
             <a:off x="9771383" y="3425447"/>
             <a:ext cx="610619" cy="610619"/>
             <a:chOff x="0" y="0"/>
@@ -10102,12 +8866,12 @@
         </p:grpSpPr>
         <p:sp>
           <p:nvSpPr>
-            <p:cNvPr name="Freeform 39" id="39"/>
+            <p:cNvPr id="39" name="Freeform 39"/>
             <p:cNvSpPr/>
             <p:nvPr/>
           </p:nvSpPr>
           <p:spPr>
-            <a:xfrm flipH="false" flipV="false" rot="0">
+            <a:xfrm>
               <a:off x="0" y="0"/>
               <a:ext cx="814197" cy="814197"/>
             </a:xfrm>
@@ -10116,9 +8880,9 @@
               <a:gdLst/>
               <a:ahLst/>
               <a:cxnLst/>
-              <a:rect r="r" b="b" t="t" l="l"/>
+              <a:rect l="l" t="t" r="r" b="b"/>
               <a:pathLst>
-                <a:path h="814197" w="814197">
+                <a:path w="814197" h="814197">
                   <a:moveTo>
                     <a:pt x="0" y="407035"/>
                   </a:moveTo>
@@ -10161,12 +8925,12 @@
       </p:grpSp>
       <p:grpSp>
         <p:nvGrpSpPr>
-          <p:cNvPr name="Group 40" id="40"/>
+          <p:cNvPr id="40" name="Group 40"/>
           <p:cNvGrpSpPr/>
           <p:nvPr/>
         </p:nvGrpSpPr>
         <p:grpSpPr>
-          <a:xfrm rot="0">
+          <a:xfrm>
             <a:off x="9784080" y="3438144"/>
             <a:ext cx="585216" cy="585216"/>
             <a:chOff x="0" y="0"/>
@@ -10175,12 +8939,12 @@
         </p:grpSpPr>
         <p:sp>
           <p:nvSpPr>
-            <p:cNvPr name="Freeform 41" id="41"/>
+            <p:cNvPr id="41" name="Freeform 41"/>
             <p:cNvSpPr/>
             <p:nvPr/>
           </p:nvSpPr>
           <p:spPr>
-            <a:xfrm flipH="false" flipV="false" rot="0">
+            <a:xfrm>
               <a:off x="0" y="0"/>
               <a:ext cx="780288" cy="780288"/>
             </a:xfrm>
@@ -10189,9 +8953,9 @@
               <a:gdLst/>
               <a:ahLst/>
               <a:cxnLst/>
-              <a:rect r="r" b="b" t="t" l="l"/>
+              <a:rect l="l" t="t" r="r" b="b"/>
               <a:pathLst>
-                <a:path h="780288" w="780288">
+                <a:path w="780288" h="780288">
                   <a:moveTo>
                     <a:pt x="0" y="0"/>
                   </a:moveTo>
@@ -10213,15 +8977,15 @@
                 <a:alphaModFix amt="0"/>
               </a:blip>
               <a:stretch>
-                <a:fillRect l="-78303" t="0" r="-78303" b="0"/>
+                <a:fillRect l="-78303" r="-78303"/>
               </a:stretch>
             </a:blipFill>
           </p:spPr>
         </p:sp>
         <p:sp>
           <p:nvSpPr>
-            <p:cNvPr name="TextBox 42" id="42"/>
-            <p:cNvSpPr txBox="true"/>
+            <p:cNvPr id="42" name="TextBox 42"/>
+            <p:cNvSpPr txBox="1"/>
             <p:nvPr/>
           </p:nvSpPr>
           <p:spPr>
@@ -10234,7 +8998,7 @@
             </a:prstGeom>
           </p:spPr>
           <p:txBody>
-            <a:bodyPr anchor="ctr" rtlCol="false" tIns="0" lIns="0" bIns="0" rIns="0"/>
+            <a:bodyPr lIns="0" tIns="0" rIns="0" bIns="0" rtlCol="0" anchor="ctr"/>
             <a:lstStyle/>
             <a:p>
               <a:pPr algn="ctr">
@@ -10243,7 +9007,7 @@
                 </a:lnSpc>
               </a:pPr>
               <a:r>
-                <a:rPr lang="en-US" sz="2000" b="true">
+                <a:rPr lang="en-US" sz="2000" b="1">
                   <a:solidFill>
                     <a:srgbClr val="FFFFFF"/>
                   </a:solidFill>
@@ -10260,12 +9024,12 @@
       </p:grpSp>
       <p:grpSp>
         <p:nvGrpSpPr>
-          <p:cNvPr name="Group 43" id="43"/>
+          <p:cNvPr id="43" name="Group 43"/>
           <p:cNvGrpSpPr/>
           <p:nvPr/>
         </p:nvGrpSpPr>
         <p:grpSpPr>
-          <a:xfrm rot="0">
+          <a:xfrm>
             <a:off x="10515600" y="3438144"/>
             <a:ext cx="6858000" cy="822960"/>
             <a:chOff x="0" y="0"/>
@@ -10274,12 +9038,12 @@
         </p:grpSpPr>
         <p:sp>
           <p:nvSpPr>
-            <p:cNvPr name="Freeform 44" id="44"/>
+            <p:cNvPr id="44" name="Freeform 44"/>
             <p:cNvSpPr/>
             <p:nvPr/>
           </p:nvSpPr>
           <p:spPr>
-            <a:xfrm flipH="false" flipV="false" rot="0">
+            <a:xfrm>
               <a:off x="0" y="0"/>
               <a:ext cx="9144000" cy="1097280"/>
             </a:xfrm>
@@ -10288,9 +9052,9 @@
               <a:gdLst/>
               <a:ahLst/>
               <a:cxnLst/>
-              <a:rect r="r" b="b" t="t" l="l"/>
+              <a:rect l="l" t="t" r="r" b="b"/>
               <a:pathLst>
-                <a:path h="1097280" w="9144000">
+                <a:path w="9144000" h="1097280">
                   <a:moveTo>
                     <a:pt x="0" y="0"/>
                   </a:moveTo>
@@ -10312,15 +9076,15 @@
                 <a:alphaModFix amt="0"/>
               </a:blip>
               <a:stretch>
-                <a:fillRect l="0" t="-112375" r="0" b="-112375"/>
+                <a:fillRect t="-112375" b="-112375"/>
               </a:stretch>
             </a:blipFill>
           </p:spPr>
         </p:sp>
         <p:sp>
           <p:nvSpPr>
-            <p:cNvPr name="TextBox 45" id="45"/>
-            <p:cNvSpPr txBox="true"/>
+            <p:cNvPr id="45" name="TextBox 45"/>
+            <p:cNvSpPr txBox="1"/>
             <p:nvPr/>
           </p:nvSpPr>
           <p:spPr>
@@ -10333,7 +9097,7 @@
             </a:prstGeom>
           </p:spPr>
           <p:txBody>
-            <a:bodyPr anchor="ctr" rtlCol="false" tIns="0" lIns="0" bIns="0" rIns="0"/>
+            <a:bodyPr lIns="0" tIns="0" rIns="0" bIns="0" rtlCol="0" anchor="ctr"/>
             <a:lstStyle/>
             <a:p>
               <a:pPr algn="l">
@@ -10351,19 +9115,7 @@
                   <a:cs typeface="Calibri (MS)"/>
                   <a:sym typeface="Calibri (MS)"/>
                 </a:rPr>
-                <a:t>When student starts their exam</a:t>
-              </a:r>
-              <a:r>
-                <a:rPr lang="en-US" sz="2100">
-                  <a:solidFill>
-                    <a:srgbClr val="1A1A2E"/>
-                  </a:solidFill>
-                  <a:latin typeface="Calibri (MS)"/>
-                  <a:ea typeface="Calibri (MS)"/>
-                  <a:cs typeface="Calibri (MS)"/>
-                  <a:sym typeface="Calibri (MS)"/>
-                </a:rPr>
-                <a:t> session → lockdown activates simultaneously on their machines</a:t>
+                <a:t>When student starts their exam session → lockdown activates simultaneously on their machines</a:t>
               </a:r>
             </a:p>
           </p:txBody>
@@ -10371,12 +9123,12 @@
       </p:grpSp>
       <p:grpSp>
         <p:nvGrpSpPr>
-          <p:cNvPr name="Group 46" id="46"/>
+          <p:cNvPr id="46" name="Group 46"/>
           <p:cNvGrpSpPr/>
           <p:nvPr/>
         </p:nvGrpSpPr>
         <p:grpSpPr>
-          <a:xfrm rot="0">
+          <a:xfrm>
             <a:off x="9771383" y="4412999"/>
             <a:ext cx="610619" cy="610619"/>
             <a:chOff x="0" y="0"/>
@@ -10385,12 +9137,12 @@
         </p:grpSpPr>
         <p:sp>
           <p:nvSpPr>
-            <p:cNvPr name="Freeform 47" id="47"/>
+            <p:cNvPr id="47" name="Freeform 47"/>
             <p:cNvSpPr/>
             <p:nvPr/>
           </p:nvSpPr>
           <p:spPr>
-            <a:xfrm flipH="false" flipV="false" rot="0">
+            <a:xfrm>
               <a:off x="0" y="0"/>
               <a:ext cx="814197" cy="814197"/>
             </a:xfrm>
@@ -10399,9 +9151,9 @@
               <a:gdLst/>
               <a:ahLst/>
               <a:cxnLst/>
-              <a:rect r="r" b="b" t="t" l="l"/>
+              <a:rect l="l" t="t" r="r" b="b"/>
               <a:pathLst>
-                <a:path h="814197" w="814197">
+                <a:path w="814197" h="814197">
                   <a:moveTo>
                     <a:pt x="0" y="407035"/>
                   </a:moveTo>
@@ -10444,12 +9196,12 @@
       </p:grpSp>
       <p:grpSp>
         <p:nvGrpSpPr>
-          <p:cNvPr name="Group 48" id="48"/>
+          <p:cNvPr id="48" name="Group 48"/>
           <p:cNvGrpSpPr/>
           <p:nvPr/>
         </p:nvGrpSpPr>
         <p:grpSpPr>
-          <a:xfrm rot="0">
+          <a:xfrm>
             <a:off x="9784080" y="4425696"/>
             <a:ext cx="585216" cy="585216"/>
             <a:chOff x="0" y="0"/>
@@ -10458,12 +9210,12 @@
         </p:grpSpPr>
         <p:sp>
           <p:nvSpPr>
-            <p:cNvPr name="Freeform 49" id="49"/>
+            <p:cNvPr id="49" name="Freeform 49"/>
             <p:cNvSpPr/>
             <p:nvPr/>
           </p:nvSpPr>
           <p:spPr>
-            <a:xfrm flipH="false" flipV="false" rot="0">
+            <a:xfrm>
               <a:off x="0" y="0"/>
               <a:ext cx="780288" cy="780288"/>
             </a:xfrm>
@@ -10472,9 +9224,9 @@
               <a:gdLst/>
               <a:ahLst/>
               <a:cxnLst/>
-              <a:rect r="r" b="b" t="t" l="l"/>
+              <a:rect l="l" t="t" r="r" b="b"/>
               <a:pathLst>
-                <a:path h="780288" w="780288">
+                <a:path w="780288" h="780288">
                   <a:moveTo>
                     <a:pt x="0" y="0"/>
                   </a:moveTo>
@@ -10496,15 +9248,15 @@
                 <a:alphaModFix amt="0"/>
               </a:blip>
               <a:stretch>
-                <a:fillRect l="-78303" t="0" r="-78303" b="0"/>
+                <a:fillRect l="-78303" r="-78303"/>
               </a:stretch>
             </a:blipFill>
           </p:spPr>
         </p:sp>
         <p:sp>
           <p:nvSpPr>
-            <p:cNvPr name="TextBox 50" id="50"/>
-            <p:cNvSpPr txBox="true"/>
+            <p:cNvPr id="50" name="TextBox 50"/>
+            <p:cNvSpPr txBox="1"/>
             <p:nvPr/>
           </p:nvSpPr>
           <p:spPr>
@@ -10517,7 +9269,7 @@
             </a:prstGeom>
           </p:spPr>
           <p:txBody>
-            <a:bodyPr anchor="ctr" rtlCol="false" tIns="0" lIns="0" bIns="0" rIns="0"/>
+            <a:bodyPr lIns="0" tIns="0" rIns="0" bIns="0" rtlCol="0" anchor="ctr"/>
             <a:lstStyle/>
             <a:p>
               <a:pPr algn="ctr">
@@ -10526,7 +9278,7 @@
                 </a:lnSpc>
               </a:pPr>
               <a:r>
-                <a:rPr lang="en-US" sz="2000" b="true">
+                <a:rPr lang="en-US" sz="2000" b="1">
                   <a:solidFill>
                     <a:srgbClr val="FFFFFF"/>
                   </a:solidFill>
@@ -10543,12 +9295,12 @@
       </p:grpSp>
       <p:grpSp>
         <p:nvGrpSpPr>
-          <p:cNvPr name="Group 51" id="51"/>
+          <p:cNvPr id="51" name="Group 51"/>
           <p:cNvGrpSpPr/>
           <p:nvPr/>
         </p:nvGrpSpPr>
         <p:grpSpPr>
-          <a:xfrm rot="0">
+          <a:xfrm>
             <a:off x="10515600" y="4425696"/>
             <a:ext cx="6858000" cy="822960"/>
             <a:chOff x="0" y="0"/>
@@ -10557,12 +9309,12 @@
         </p:grpSpPr>
         <p:sp>
           <p:nvSpPr>
-            <p:cNvPr name="Freeform 52" id="52"/>
+            <p:cNvPr id="52" name="Freeform 52"/>
             <p:cNvSpPr/>
             <p:nvPr/>
           </p:nvSpPr>
           <p:spPr>
-            <a:xfrm flipH="false" flipV="false" rot="0">
+            <a:xfrm>
               <a:off x="0" y="0"/>
               <a:ext cx="9144000" cy="1097280"/>
             </a:xfrm>
@@ -10571,9 +9323,9 @@
               <a:gdLst/>
               <a:ahLst/>
               <a:cxnLst/>
-              <a:rect r="r" b="b" t="t" l="l"/>
+              <a:rect l="l" t="t" r="r" b="b"/>
               <a:pathLst>
-                <a:path h="1097280" w="9144000">
+                <a:path w="9144000" h="1097280">
                   <a:moveTo>
                     <a:pt x="0" y="0"/>
                   </a:moveTo>
@@ -10595,15 +9347,15 @@
                 <a:alphaModFix amt="0"/>
               </a:blip>
               <a:stretch>
-                <a:fillRect l="0" t="-112375" r="0" b="-112375"/>
+                <a:fillRect t="-112375" b="-112375"/>
               </a:stretch>
             </a:blipFill>
           </p:spPr>
         </p:sp>
         <p:sp>
           <p:nvSpPr>
-            <p:cNvPr name="TextBox 53" id="53"/>
-            <p:cNvSpPr txBox="true"/>
+            <p:cNvPr id="53" name="TextBox 53"/>
+            <p:cNvSpPr txBox="1"/>
             <p:nvPr/>
           </p:nvSpPr>
           <p:spPr>
@@ -10616,7 +9368,7 @@
             </a:prstGeom>
           </p:spPr>
           <p:txBody>
-            <a:bodyPr anchor="ctr" rtlCol="false" tIns="0" lIns="0" bIns="0" rIns="0"/>
+            <a:bodyPr lIns="0" tIns="0" rIns="0" bIns="0" rtlCol="0" anchor="ctr"/>
             <a:lstStyle/>
             <a:p>
               <a:pPr algn="l">
@@ -10642,12 +9394,12 @@
       </p:grpSp>
       <p:grpSp>
         <p:nvGrpSpPr>
-          <p:cNvPr name="Group 54" id="54"/>
+          <p:cNvPr id="54" name="Group 54"/>
           <p:cNvGrpSpPr/>
           <p:nvPr/>
         </p:nvGrpSpPr>
         <p:grpSpPr>
-          <a:xfrm rot="0">
+          <a:xfrm>
             <a:off x="9771383" y="5400551"/>
             <a:ext cx="610619" cy="610619"/>
             <a:chOff x="0" y="0"/>
@@ -10656,12 +9408,12 @@
         </p:grpSpPr>
         <p:sp>
           <p:nvSpPr>
-            <p:cNvPr name="Freeform 55" id="55"/>
+            <p:cNvPr id="55" name="Freeform 55"/>
             <p:cNvSpPr/>
             <p:nvPr/>
           </p:nvSpPr>
           <p:spPr>
-            <a:xfrm flipH="false" flipV="false" rot="0">
+            <a:xfrm>
               <a:off x="0" y="0"/>
               <a:ext cx="814197" cy="814197"/>
             </a:xfrm>
@@ -10670,9 +9422,9 @@
               <a:gdLst/>
               <a:ahLst/>
               <a:cxnLst/>
-              <a:rect r="r" b="b" t="t" l="l"/>
+              <a:rect l="l" t="t" r="r" b="b"/>
               <a:pathLst>
-                <a:path h="814197" w="814197">
+                <a:path w="814197" h="814197">
                   <a:moveTo>
                     <a:pt x="0" y="407035"/>
                   </a:moveTo>
@@ -10715,12 +9467,12 @@
       </p:grpSp>
       <p:grpSp>
         <p:nvGrpSpPr>
-          <p:cNvPr name="Group 56" id="56"/>
+          <p:cNvPr id="56" name="Group 56"/>
           <p:cNvGrpSpPr/>
           <p:nvPr/>
         </p:nvGrpSpPr>
         <p:grpSpPr>
-          <a:xfrm rot="0">
+          <a:xfrm>
             <a:off x="9784080" y="5413248"/>
             <a:ext cx="585216" cy="585216"/>
             <a:chOff x="0" y="0"/>
@@ -10729,12 +9481,12 @@
         </p:grpSpPr>
         <p:sp>
           <p:nvSpPr>
-            <p:cNvPr name="Freeform 57" id="57"/>
+            <p:cNvPr id="57" name="Freeform 57"/>
             <p:cNvSpPr/>
             <p:nvPr/>
           </p:nvSpPr>
           <p:spPr>
-            <a:xfrm flipH="false" flipV="false" rot="0">
+            <a:xfrm>
               <a:off x="0" y="0"/>
               <a:ext cx="780288" cy="780288"/>
             </a:xfrm>
@@ -10743,9 +9495,9 @@
               <a:gdLst/>
               <a:ahLst/>
               <a:cxnLst/>
-              <a:rect r="r" b="b" t="t" l="l"/>
+              <a:rect l="l" t="t" r="r" b="b"/>
               <a:pathLst>
-                <a:path h="780288" w="780288">
+                <a:path w="780288" h="780288">
                   <a:moveTo>
                     <a:pt x="0" y="0"/>
                   </a:moveTo>
@@ -10767,15 +9519,15 @@
                 <a:alphaModFix amt="0"/>
               </a:blip>
               <a:stretch>
-                <a:fillRect l="-78303" t="0" r="-78303" b="0"/>
+                <a:fillRect l="-78303" r="-78303"/>
               </a:stretch>
             </a:blipFill>
           </p:spPr>
         </p:sp>
         <p:sp>
           <p:nvSpPr>
-            <p:cNvPr name="TextBox 58" id="58"/>
-            <p:cNvSpPr txBox="true"/>
+            <p:cNvPr id="58" name="TextBox 58"/>
+            <p:cNvSpPr txBox="1"/>
             <p:nvPr/>
           </p:nvSpPr>
           <p:spPr>
@@ -10788,7 +9540,7 @@
             </a:prstGeom>
           </p:spPr>
           <p:txBody>
-            <a:bodyPr anchor="ctr" rtlCol="false" tIns="0" lIns="0" bIns="0" rIns="0"/>
+            <a:bodyPr lIns="0" tIns="0" rIns="0" bIns="0" rtlCol="0" anchor="ctr"/>
             <a:lstStyle/>
             <a:p>
               <a:pPr algn="ctr">
@@ -10797,7 +9549,7 @@
                 </a:lnSpc>
               </a:pPr>
               <a:r>
-                <a:rPr lang="en-US" sz="2000" b="true">
+                <a:rPr lang="en-US" sz="2000" b="1">
                   <a:solidFill>
                     <a:srgbClr val="FFFFFF"/>
                   </a:solidFill>
@@ -10814,12 +9566,12 @@
       </p:grpSp>
       <p:grpSp>
         <p:nvGrpSpPr>
-          <p:cNvPr name="Group 59" id="59"/>
+          <p:cNvPr id="59" name="Group 59"/>
           <p:cNvGrpSpPr/>
           <p:nvPr/>
         </p:nvGrpSpPr>
         <p:grpSpPr>
-          <a:xfrm rot="0">
+          <a:xfrm>
             <a:off x="10515600" y="5413248"/>
             <a:ext cx="6858000" cy="822960"/>
             <a:chOff x="0" y="0"/>
@@ -10828,12 +9580,12 @@
         </p:grpSpPr>
         <p:sp>
           <p:nvSpPr>
-            <p:cNvPr name="Freeform 60" id="60"/>
+            <p:cNvPr id="60" name="Freeform 60"/>
             <p:cNvSpPr/>
             <p:nvPr/>
           </p:nvSpPr>
           <p:spPr>
-            <a:xfrm flipH="false" flipV="false" rot="0">
+            <a:xfrm>
               <a:off x="0" y="0"/>
               <a:ext cx="9144000" cy="1097280"/>
             </a:xfrm>
@@ -10842,9 +9594,9 @@
               <a:gdLst/>
               <a:ahLst/>
               <a:cxnLst/>
-              <a:rect r="r" b="b" t="t" l="l"/>
+              <a:rect l="l" t="t" r="r" b="b"/>
               <a:pathLst>
-                <a:path h="1097280" w="9144000">
+                <a:path w="9144000" h="1097280">
                   <a:moveTo>
                     <a:pt x="0" y="0"/>
                   </a:moveTo>
@@ -10866,15 +9618,15 @@
                 <a:alphaModFix amt="0"/>
               </a:blip>
               <a:stretch>
-                <a:fillRect l="0" t="-112375" r="0" b="-112375"/>
+                <a:fillRect t="-112375" b="-112375"/>
               </a:stretch>
             </a:blipFill>
           </p:spPr>
         </p:sp>
         <p:sp>
           <p:nvSpPr>
-            <p:cNvPr name="TextBox 61" id="61"/>
-            <p:cNvSpPr txBox="true"/>
+            <p:cNvPr id="61" name="TextBox 61"/>
+            <p:cNvSpPr txBox="1"/>
             <p:nvPr/>
           </p:nvSpPr>
           <p:spPr>
@@ -10887,7 +9639,7 @@
             </a:prstGeom>
           </p:spPr>
           <p:txBody>
-            <a:bodyPr anchor="ctr" rtlCol="false" tIns="0" lIns="0" bIns="0" rIns="0"/>
+            <a:bodyPr lIns="0" tIns="0" rIns="0" bIns="0" rtlCol="0" anchor="ctr"/>
             <a:lstStyle/>
             <a:p>
               <a:pPr algn="l">
@@ -10913,12 +9665,12 @@
       </p:grpSp>
       <p:grpSp>
         <p:nvGrpSpPr>
-          <p:cNvPr name="Group 62" id="62"/>
+          <p:cNvPr id="62" name="Group 62"/>
           <p:cNvGrpSpPr/>
           <p:nvPr/>
         </p:nvGrpSpPr>
         <p:grpSpPr>
-          <a:xfrm rot="0">
+          <a:xfrm>
             <a:off x="9771383" y="6388103"/>
             <a:ext cx="610619" cy="610619"/>
             <a:chOff x="0" y="0"/>
@@ -10927,12 +9679,12 @@
         </p:grpSpPr>
         <p:sp>
           <p:nvSpPr>
-            <p:cNvPr name="Freeform 63" id="63"/>
+            <p:cNvPr id="63" name="Freeform 63"/>
             <p:cNvSpPr/>
             <p:nvPr/>
           </p:nvSpPr>
           <p:spPr>
-            <a:xfrm flipH="false" flipV="false" rot="0">
+            <a:xfrm>
               <a:off x="0" y="0"/>
               <a:ext cx="814197" cy="814197"/>
             </a:xfrm>
@@ -10941,9 +9693,9 @@
               <a:gdLst/>
               <a:ahLst/>
               <a:cxnLst/>
-              <a:rect r="r" b="b" t="t" l="l"/>
+              <a:rect l="l" t="t" r="r" b="b"/>
               <a:pathLst>
-                <a:path h="814197" w="814197">
+                <a:path w="814197" h="814197">
                   <a:moveTo>
                     <a:pt x="0" y="407035"/>
                   </a:moveTo>
@@ -10986,12 +9738,12 @@
       </p:grpSp>
       <p:grpSp>
         <p:nvGrpSpPr>
-          <p:cNvPr name="Group 64" id="64"/>
+          <p:cNvPr id="64" name="Group 64"/>
           <p:cNvGrpSpPr/>
           <p:nvPr/>
         </p:nvGrpSpPr>
         <p:grpSpPr>
-          <a:xfrm rot="0">
+          <a:xfrm>
             <a:off x="9784080" y="6400800"/>
             <a:ext cx="585216" cy="585216"/>
             <a:chOff x="0" y="0"/>
@@ -11000,12 +9752,12 @@
         </p:grpSpPr>
         <p:sp>
           <p:nvSpPr>
-            <p:cNvPr name="Freeform 65" id="65"/>
+            <p:cNvPr id="65" name="Freeform 65"/>
             <p:cNvSpPr/>
             <p:nvPr/>
           </p:nvSpPr>
           <p:spPr>
-            <a:xfrm flipH="false" flipV="false" rot="0">
+            <a:xfrm>
               <a:off x="0" y="0"/>
               <a:ext cx="780288" cy="780288"/>
             </a:xfrm>
@@ -11014,9 +9766,9 @@
               <a:gdLst/>
               <a:ahLst/>
               <a:cxnLst/>
-              <a:rect r="r" b="b" t="t" l="l"/>
+              <a:rect l="l" t="t" r="r" b="b"/>
               <a:pathLst>
-                <a:path h="780288" w="780288">
+                <a:path w="780288" h="780288">
                   <a:moveTo>
                     <a:pt x="0" y="0"/>
                   </a:moveTo>
@@ -11038,15 +9790,15 @@
                 <a:alphaModFix amt="0"/>
               </a:blip>
               <a:stretch>
-                <a:fillRect l="-78303" t="0" r="-78303" b="0"/>
+                <a:fillRect l="-78303" r="-78303"/>
               </a:stretch>
             </a:blipFill>
           </p:spPr>
         </p:sp>
         <p:sp>
           <p:nvSpPr>
-            <p:cNvPr name="TextBox 66" id="66"/>
-            <p:cNvSpPr txBox="true"/>
+            <p:cNvPr id="66" name="TextBox 66"/>
+            <p:cNvSpPr txBox="1"/>
             <p:nvPr/>
           </p:nvSpPr>
           <p:spPr>
@@ -11059,7 +9811,7 @@
             </a:prstGeom>
           </p:spPr>
           <p:txBody>
-            <a:bodyPr anchor="ctr" rtlCol="false" tIns="0" lIns="0" bIns="0" rIns="0"/>
+            <a:bodyPr lIns="0" tIns="0" rIns="0" bIns="0" rtlCol="0" anchor="ctr"/>
             <a:lstStyle/>
             <a:p>
               <a:pPr algn="ctr">
@@ -11068,7 +9820,7 @@
                 </a:lnSpc>
               </a:pPr>
               <a:r>
-                <a:rPr lang="en-US" sz="2000" b="true">
+                <a:rPr lang="en-US" sz="2000" b="1">
                   <a:solidFill>
                     <a:srgbClr val="FFFFFF"/>
                   </a:solidFill>
@@ -11085,12 +9837,12 @@
       </p:grpSp>
       <p:grpSp>
         <p:nvGrpSpPr>
-          <p:cNvPr name="Group 67" id="67"/>
+          <p:cNvPr id="67" name="Group 67"/>
           <p:cNvGrpSpPr/>
           <p:nvPr/>
         </p:nvGrpSpPr>
         <p:grpSpPr>
-          <a:xfrm rot="0">
+          <a:xfrm>
             <a:off x="10515600" y="6400800"/>
             <a:ext cx="6858000" cy="822960"/>
             <a:chOff x="0" y="0"/>
@@ -11099,12 +9851,12 @@
         </p:grpSpPr>
         <p:sp>
           <p:nvSpPr>
-            <p:cNvPr name="Freeform 68" id="68"/>
+            <p:cNvPr id="68" name="Freeform 68"/>
             <p:cNvSpPr/>
             <p:nvPr/>
           </p:nvSpPr>
           <p:spPr>
-            <a:xfrm flipH="false" flipV="false" rot="0">
+            <a:xfrm>
               <a:off x="0" y="0"/>
               <a:ext cx="9144000" cy="1097280"/>
             </a:xfrm>
@@ -11113,9 +9865,9 @@
               <a:gdLst/>
               <a:ahLst/>
               <a:cxnLst/>
-              <a:rect r="r" b="b" t="t" l="l"/>
+              <a:rect l="l" t="t" r="r" b="b"/>
               <a:pathLst>
-                <a:path h="1097280" w="9144000">
+                <a:path w="9144000" h="1097280">
                   <a:moveTo>
                     <a:pt x="0" y="0"/>
                   </a:moveTo>
@@ -11137,15 +9889,15 @@
                 <a:alphaModFix amt="0"/>
               </a:blip>
               <a:stretch>
-                <a:fillRect l="0" t="-112375" r="0" b="-112375"/>
+                <a:fillRect t="-112375" b="-112375"/>
               </a:stretch>
             </a:blipFill>
           </p:spPr>
         </p:sp>
         <p:sp>
           <p:nvSpPr>
-            <p:cNvPr name="TextBox 69" id="69"/>
-            <p:cNvSpPr txBox="true"/>
+            <p:cNvPr id="69" name="TextBox 69"/>
+            <p:cNvSpPr txBox="1"/>
             <p:nvPr/>
           </p:nvSpPr>
           <p:spPr>
@@ -11158,7 +9910,7 @@
             </a:prstGeom>
           </p:spPr>
           <p:txBody>
-            <a:bodyPr anchor="ctr" rtlCol="false" tIns="0" lIns="0" bIns="0" rIns="0"/>
+            <a:bodyPr lIns="0" tIns="0" rIns="0" bIns="0" rtlCol="0" anchor="ctr"/>
             <a:lstStyle/>
             <a:p>
               <a:pPr algn="l">
@@ -11184,12 +9936,12 @@
       </p:grpSp>
       <p:grpSp>
         <p:nvGrpSpPr>
-          <p:cNvPr name="Group 70" id="70"/>
+          <p:cNvPr id="70" name="Group 70"/>
           <p:cNvGrpSpPr/>
           <p:nvPr/>
         </p:nvGrpSpPr>
         <p:grpSpPr>
-          <a:xfrm rot="0">
+          <a:xfrm>
             <a:off x="9771383" y="7375655"/>
             <a:ext cx="610619" cy="610619"/>
             <a:chOff x="0" y="0"/>
@@ -11198,12 +9950,12 @@
         </p:grpSpPr>
         <p:sp>
           <p:nvSpPr>
-            <p:cNvPr name="Freeform 71" id="71"/>
+            <p:cNvPr id="71" name="Freeform 71"/>
             <p:cNvSpPr/>
             <p:nvPr/>
           </p:nvSpPr>
           <p:spPr>
-            <a:xfrm flipH="false" flipV="false" rot="0">
+            <a:xfrm>
               <a:off x="0" y="0"/>
               <a:ext cx="814197" cy="814197"/>
             </a:xfrm>
@@ -11212,9 +9964,9 @@
               <a:gdLst/>
               <a:ahLst/>
               <a:cxnLst/>
-              <a:rect r="r" b="b" t="t" l="l"/>
+              <a:rect l="l" t="t" r="r" b="b"/>
               <a:pathLst>
-                <a:path h="814197" w="814197">
+                <a:path w="814197" h="814197">
                   <a:moveTo>
                     <a:pt x="0" y="407035"/>
                   </a:moveTo>
@@ -11257,12 +10009,12 @@
       </p:grpSp>
       <p:grpSp>
         <p:nvGrpSpPr>
-          <p:cNvPr name="Group 72" id="72"/>
+          <p:cNvPr id="72" name="Group 72"/>
           <p:cNvGrpSpPr/>
           <p:nvPr/>
         </p:nvGrpSpPr>
         <p:grpSpPr>
-          <a:xfrm rot="0">
+          <a:xfrm>
             <a:off x="9784080" y="7388352"/>
             <a:ext cx="585216" cy="585216"/>
             <a:chOff x="0" y="0"/>
@@ -11271,12 +10023,12 @@
         </p:grpSpPr>
         <p:sp>
           <p:nvSpPr>
-            <p:cNvPr name="Freeform 73" id="73"/>
+            <p:cNvPr id="73" name="Freeform 73"/>
             <p:cNvSpPr/>
             <p:nvPr/>
           </p:nvSpPr>
           <p:spPr>
-            <a:xfrm flipH="false" flipV="false" rot="0">
+            <a:xfrm>
               <a:off x="0" y="0"/>
               <a:ext cx="780288" cy="780288"/>
             </a:xfrm>
@@ -11285,9 +10037,9 @@
               <a:gdLst/>
               <a:ahLst/>
               <a:cxnLst/>
-              <a:rect r="r" b="b" t="t" l="l"/>
+              <a:rect l="l" t="t" r="r" b="b"/>
               <a:pathLst>
-                <a:path h="780288" w="780288">
+                <a:path w="780288" h="780288">
                   <a:moveTo>
                     <a:pt x="0" y="0"/>
                   </a:moveTo>
@@ -11309,15 +10061,15 @@
                 <a:alphaModFix amt="0"/>
               </a:blip>
               <a:stretch>
-                <a:fillRect l="-78303" t="0" r="-78303" b="0"/>
+                <a:fillRect l="-78303" r="-78303"/>
               </a:stretch>
             </a:blipFill>
           </p:spPr>
         </p:sp>
         <p:sp>
           <p:nvSpPr>
-            <p:cNvPr name="TextBox 74" id="74"/>
-            <p:cNvSpPr txBox="true"/>
+            <p:cNvPr id="74" name="TextBox 74"/>
+            <p:cNvSpPr txBox="1"/>
             <p:nvPr/>
           </p:nvSpPr>
           <p:spPr>
@@ -11330,7 +10082,7 @@
             </a:prstGeom>
           </p:spPr>
           <p:txBody>
-            <a:bodyPr anchor="ctr" rtlCol="false" tIns="0" lIns="0" bIns="0" rIns="0"/>
+            <a:bodyPr lIns="0" tIns="0" rIns="0" bIns="0" rtlCol="0" anchor="ctr"/>
             <a:lstStyle/>
             <a:p>
               <a:pPr algn="ctr">
@@ -11339,7 +10091,7 @@
                 </a:lnSpc>
               </a:pPr>
               <a:r>
-                <a:rPr lang="en-US" sz="2000" b="true">
+                <a:rPr lang="en-US" sz="2000" b="1">
                   <a:solidFill>
                     <a:srgbClr val="FFFFFF"/>
                   </a:solidFill>
@@ -11356,12 +10108,12 @@
       </p:grpSp>
       <p:grpSp>
         <p:nvGrpSpPr>
-          <p:cNvPr name="Group 75" id="75"/>
+          <p:cNvPr id="75" name="Group 75"/>
           <p:cNvGrpSpPr/>
           <p:nvPr/>
         </p:nvGrpSpPr>
         <p:grpSpPr>
-          <a:xfrm rot="0">
+          <a:xfrm>
             <a:off x="10515600" y="7388352"/>
             <a:ext cx="6858000" cy="822960"/>
             <a:chOff x="0" y="0"/>
@@ -11370,12 +10122,12 @@
         </p:grpSpPr>
         <p:sp>
           <p:nvSpPr>
-            <p:cNvPr name="Freeform 76" id="76"/>
+            <p:cNvPr id="76" name="Freeform 76"/>
             <p:cNvSpPr/>
             <p:nvPr/>
           </p:nvSpPr>
           <p:spPr>
-            <a:xfrm flipH="false" flipV="false" rot="0">
+            <a:xfrm>
               <a:off x="0" y="0"/>
               <a:ext cx="9144000" cy="1097280"/>
             </a:xfrm>
@@ -11384,9 +10136,9 @@
               <a:gdLst/>
               <a:ahLst/>
               <a:cxnLst/>
-              <a:rect r="r" b="b" t="t" l="l"/>
+              <a:rect l="l" t="t" r="r" b="b"/>
               <a:pathLst>
-                <a:path h="1097280" w="9144000">
+                <a:path w="9144000" h="1097280">
                   <a:moveTo>
                     <a:pt x="0" y="0"/>
                   </a:moveTo>
@@ -11408,15 +10160,15 @@
                 <a:alphaModFix amt="0"/>
               </a:blip>
               <a:stretch>
-                <a:fillRect l="0" t="-112375" r="0" b="-112375"/>
+                <a:fillRect t="-112375" b="-112375"/>
               </a:stretch>
             </a:blipFill>
           </p:spPr>
         </p:sp>
         <p:sp>
           <p:nvSpPr>
-            <p:cNvPr name="TextBox 77" id="77"/>
-            <p:cNvSpPr txBox="true"/>
+            <p:cNvPr id="77" name="TextBox 77"/>
+            <p:cNvSpPr txBox="1"/>
             <p:nvPr/>
           </p:nvSpPr>
           <p:spPr>
@@ -11429,7 +10181,7 @@
             </a:prstGeom>
           </p:spPr>
           <p:txBody>
-            <a:bodyPr anchor="ctr" rtlCol="false" tIns="0" lIns="0" bIns="0" rIns="0"/>
+            <a:bodyPr lIns="0" tIns="0" rIns="0" bIns="0" rtlCol="0" anchor="ctr"/>
             <a:lstStyle/>
             <a:p>
               <a:pPr algn="l">
@@ -11455,12 +10207,12 @@
       </p:grpSp>
       <p:grpSp>
         <p:nvGrpSpPr>
-          <p:cNvPr name="Group 78" id="78"/>
+          <p:cNvPr id="78" name="Group 78"/>
           <p:cNvGrpSpPr/>
           <p:nvPr/>
         </p:nvGrpSpPr>
         <p:grpSpPr>
-          <a:xfrm rot="0">
+          <a:xfrm>
             <a:off x="9771383" y="8363207"/>
             <a:ext cx="610619" cy="610619"/>
             <a:chOff x="0" y="0"/>
@@ -11469,12 +10221,12 @@
         </p:grpSpPr>
         <p:sp>
           <p:nvSpPr>
-            <p:cNvPr name="Freeform 79" id="79"/>
+            <p:cNvPr id="79" name="Freeform 79"/>
             <p:cNvSpPr/>
             <p:nvPr/>
           </p:nvSpPr>
           <p:spPr>
-            <a:xfrm flipH="false" flipV="false" rot="0">
+            <a:xfrm>
               <a:off x="0" y="0"/>
               <a:ext cx="814197" cy="814197"/>
             </a:xfrm>
@@ -11483,9 +10235,9 @@
               <a:gdLst/>
               <a:ahLst/>
               <a:cxnLst/>
-              <a:rect r="r" b="b" t="t" l="l"/>
+              <a:rect l="l" t="t" r="r" b="b"/>
               <a:pathLst>
-                <a:path h="814197" w="814197">
+                <a:path w="814197" h="814197">
                   <a:moveTo>
                     <a:pt x="0" y="407035"/>
                   </a:moveTo>
@@ -11528,12 +10280,12 @@
       </p:grpSp>
       <p:grpSp>
         <p:nvGrpSpPr>
-          <p:cNvPr name="Group 80" id="80"/>
+          <p:cNvPr id="80" name="Group 80"/>
           <p:cNvGrpSpPr/>
           <p:nvPr/>
         </p:nvGrpSpPr>
         <p:grpSpPr>
-          <a:xfrm rot="0">
+          <a:xfrm>
             <a:off x="9784080" y="8375904"/>
             <a:ext cx="585216" cy="585216"/>
             <a:chOff x="0" y="0"/>
@@ -11542,12 +10294,12 @@
         </p:grpSpPr>
         <p:sp>
           <p:nvSpPr>
-            <p:cNvPr name="Freeform 81" id="81"/>
+            <p:cNvPr id="81" name="Freeform 81"/>
             <p:cNvSpPr/>
             <p:nvPr/>
           </p:nvSpPr>
           <p:spPr>
-            <a:xfrm flipH="false" flipV="false" rot="0">
+            <a:xfrm>
               <a:off x="0" y="0"/>
               <a:ext cx="780288" cy="780288"/>
             </a:xfrm>
@@ -11556,9 +10308,9 @@
               <a:gdLst/>
               <a:ahLst/>
               <a:cxnLst/>
-              <a:rect r="r" b="b" t="t" l="l"/>
+              <a:rect l="l" t="t" r="r" b="b"/>
               <a:pathLst>
-                <a:path h="780288" w="780288">
+                <a:path w="780288" h="780288">
                   <a:moveTo>
                     <a:pt x="0" y="0"/>
                   </a:moveTo>
@@ -11580,15 +10332,15 @@
                 <a:alphaModFix amt="0"/>
               </a:blip>
               <a:stretch>
-                <a:fillRect l="-78303" t="0" r="-78303" b="0"/>
+                <a:fillRect l="-78303" r="-78303"/>
               </a:stretch>
             </a:blipFill>
           </p:spPr>
         </p:sp>
         <p:sp>
           <p:nvSpPr>
-            <p:cNvPr name="TextBox 82" id="82"/>
-            <p:cNvSpPr txBox="true"/>
+            <p:cNvPr id="82" name="TextBox 82"/>
+            <p:cNvSpPr txBox="1"/>
             <p:nvPr/>
           </p:nvSpPr>
           <p:spPr>
@@ -11601,7 +10353,7 @@
             </a:prstGeom>
           </p:spPr>
           <p:txBody>
-            <a:bodyPr anchor="ctr" rtlCol="false" tIns="0" lIns="0" bIns="0" rIns="0"/>
+            <a:bodyPr lIns="0" tIns="0" rIns="0" bIns="0" rtlCol="0" anchor="ctr"/>
             <a:lstStyle/>
             <a:p>
               <a:pPr algn="ctr">
@@ -11610,7 +10362,7 @@
                 </a:lnSpc>
               </a:pPr>
               <a:r>
-                <a:rPr lang="en-US" sz="2000" b="true">
+                <a:rPr lang="en-US" sz="2000" b="1">
                   <a:solidFill>
                     <a:srgbClr val="FFFFFF"/>
                   </a:solidFill>
@@ -11627,12 +10379,12 @@
       </p:grpSp>
       <p:grpSp>
         <p:nvGrpSpPr>
-          <p:cNvPr name="Group 83" id="83"/>
+          <p:cNvPr id="83" name="Group 83"/>
           <p:cNvGrpSpPr/>
           <p:nvPr/>
         </p:nvGrpSpPr>
         <p:grpSpPr>
-          <a:xfrm rot="0">
+          <a:xfrm>
             <a:off x="10515600" y="8375904"/>
             <a:ext cx="6858000" cy="822960"/>
             <a:chOff x="0" y="0"/>
@@ -11641,12 +10393,12 @@
         </p:grpSpPr>
         <p:sp>
           <p:nvSpPr>
-            <p:cNvPr name="Freeform 84" id="84"/>
+            <p:cNvPr id="84" name="Freeform 84"/>
             <p:cNvSpPr/>
             <p:nvPr/>
           </p:nvSpPr>
           <p:spPr>
-            <a:xfrm flipH="false" flipV="false" rot="0">
+            <a:xfrm>
               <a:off x="0" y="0"/>
               <a:ext cx="9144000" cy="1097280"/>
             </a:xfrm>
@@ -11655,9 +10407,9 @@
               <a:gdLst/>
               <a:ahLst/>
               <a:cxnLst/>
-              <a:rect r="r" b="b" t="t" l="l"/>
+              <a:rect l="l" t="t" r="r" b="b"/>
               <a:pathLst>
-                <a:path h="1097280" w="9144000">
+                <a:path w="9144000" h="1097280">
                   <a:moveTo>
                     <a:pt x="0" y="0"/>
                   </a:moveTo>
@@ -11679,15 +10431,15 @@
                 <a:alphaModFix amt="0"/>
               </a:blip>
               <a:stretch>
-                <a:fillRect l="0" t="-112375" r="0" b="-112375"/>
+                <a:fillRect t="-112375" b="-112375"/>
               </a:stretch>
             </a:blipFill>
           </p:spPr>
         </p:sp>
         <p:sp>
           <p:nvSpPr>
-            <p:cNvPr name="TextBox 85" id="85"/>
-            <p:cNvSpPr txBox="true"/>
+            <p:cNvPr id="85" name="TextBox 85"/>
+            <p:cNvSpPr txBox="1"/>
             <p:nvPr/>
           </p:nvSpPr>
           <p:spPr>
@@ -11700,7 +10452,7 @@
             </a:prstGeom>
           </p:spPr>
           <p:txBody>
-            <a:bodyPr anchor="ctr" rtlCol="false" tIns="0" lIns="0" bIns="0" rIns="0"/>
+            <a:bodyPr lIns="0" tIns="0" rIns="0" bIns="0" rtlCol="0" anchor="ctr"/>
             <a:lstStyle/>
             <a:p>
               <a:pPr algn="l">
@@ -11732,8 +10484,8 @@
 </p:sld>
 </file>
 
-<file path=ppt/slides/slide6.xml><?xml version="1.0" encoding="utf-8"?>
-<p:sld xmlns:p="http://schemas.openxmlformats.org/presentationml/2006/main" xmlns:a="http://schemas.openxmlformats.org/drawingml/2006/main" xmlns:r="http://schemas.openxmlformats.org/officeDocument/2006/relationships">
+<file path=ppt/slides/slide5.xml><?xml version="1.0" encoding="utf-8"?>
+<p:sld xmlns:a="http://schemas.openxmlformats.org/drawingml/2006/main" xmlns:r="http://schemas.openxmlformats.org/officeDocument/2006/relationships" xmlns:p="http://schemas.openxmlformats.org/presentationml/2006/main">
   <p:cSld>
     <p:spTree>
       <p:nvGrpSpPr>
@@ -11751,12 +10503,12 @@
       </p:grpSpPr>
       <p:grpSp>
         <p:nvGrpSpPr>
-          <p:cNvPr name="Group 2" id="2"/>
+          <p:cNvPr id="2" name="Group 2"/>
           <p:cNvGrpSpPr/>
           <p:nvPr/>
         </p:nvGrpSpPr>
         <p:grpSpPr>
-          <a:xfrm rot="0">
+          <a:xfrm>
             <a:off x="914400" y="548640"/>
             <a:ext cx="16459200" cy="1280160"/>
             <a:chOff x="0" y="0"/>
@@ -11765,12 +10517,12 @@
         </p:grpSpPr>
         <p:sp>
           <p:nvSpPr>
-            <p:cNvPr name="Freeform 3" id="3"/>
+            <p:cNvPr id="3" name="Freeform 3"/>
             <p:cNvSpPr/>
             <p:nvPr/>
           </p:nvSpPr>
           <p:spPr>
-            <a:xfrm flipH="false" flipV="false" rot="0">
+            <a:xfrm>
               <a:off x="0" y="0"/>
               <a:ext cx="21945600" cy="1706880"/>
             </a:xfrm>
@@ -11779,9 +10531,9 @@
               <a:gdLst/>
               <a:ahLst/>
               <a:cxnLst/>
-              <a:rect r="r" b="b" t="t" l="l"/>
+              <a:rect l="l" t="t" r="r" b="b"/>
               <a:pathLst>
-                <a:path h="1706880" w="21945600">
+                <a:path w="21945600" h="1706880">
                   <a:moveTo>
                     <a:pt x="0" y="0"/>
                   </a:moveTo>
@@ -11803,15 +10555,15 @@
                 <a:alphaModFix amt="0"/>
               </a:blip>
               <a:stretch>
-                <a:fillRect l="0" t="-200521" r="0" b="-200521"/>
+                <a:fillRect t="-200521" b="-200521"/>
               </a:stretch>
             </a:blipFill>
           </p:spPr>
         </p:sp>
         <p:sp>
           <p:nvSpPr>
-            <p:cNvPr name="TextBox 4" id="4"/>
-            <p:cNvSpPr txBox="true"/>
+            <p:cNvPr id="4" name="TextBox 4"/>
+            <p:cNvSpPr txBox="1"/>
             <p:nvPr/>
           </p:nvSpPr>
           <p:spPr>
@@ -11824,7 +10576,7 @@
             </a:prstGeom>
           </p:spPr>
           <p:txBody>
-            <a:bodyPr anchor="ctr" rtlCol="false" tIns="0" lIns="0" bIns="0" rIns="0"/>
+            <a:bodyPr lIns="0" tIns="0" rIns="0" bIns="0" rtlCol="0" anchor="ctr"/>
             <a:lstStyle/>
             <a:p>
               <a:pPr algn="l">
@@ -11833,7 +10585,7 @@
                 </a:lnSpc>
               </a:pPr>
               <a:r>
-                <a:rPr lang="en-US" sz="6400" b="true">
+                <a:rPr lang="en-US" sz="6400" b="1">
                   <a:solidFill>
                     <a:srgbClr val="1A1A2E"/>
                   </a:solidFill>
@@ -11850,12 +10602,12 @@
       </p:grpSp>
       <p:grpSp>
         <p:nvGrpSpPr>
-          <p:cNvPr name="Group 5" id="5"/>
+          <p:cNvPr id="5" name="Group 5"/>
           <p:cNvGrpSpPr/>
           <p:nvPr/>
         </p:nvGrpSpPr>
         <p:grpSpPr>
-          <a:xfrm rot="0">
+          <a:xfrm>
             <a:off x="901703" y="1962407"/>
             <a:ext cx="16484603" cy="98555"/>
             <a:chOff x="0" y="0"/>
@@ -11864,12 +10616,12 @@
         </p:grpSpPr>
         <p:sp>
           <p:nvSpPr>
-            <p:cNvPr name="Freeform 6" id="6"/>
+            <p:cNvPr id="6" name="Freeform 6"/>
             <p:cNvSpPr/>
             <p:nvPr/>
           </p:nvSpPr>
           <p:spPr>
-            <a:xfrm flipH="false" flipV="false" rot="0">
+            <a:xfrm>
               <a:off x="0" y="0"/>
               <a:ext cx="21979510" cy="131445"/>
             </a:xfrm>
@@ -11878,9 +10630,9 @@
               <a:gdLst/>
               <a:ahLst/>
               <a:cxnLst/>
-              <a:rect r="r" b="b" t="t" l="l"/>
+              <a:rect l="l" t="t" r="r" b="b"/>
               <a:pathLst>
-                <a:path h="131445" w="21979510">
+                <a:path w="21979510" h="131445">
                   <a:moveTo>
                     <a:pt x="0" y="0"/>
                   </a:moveTo>
@@ -11912,12 +10664,12 @@
       </p:grpSp>
       <p:grpSp>
         <p:nvGrpSpPr>
-          <p:cNvPr name="Group 7" id="7"/>
+          <p:cNvPr id="7" name="Group 7"/>
           <p:cNvGrpSpPr/>
           <p:nvPr/>
         </p:nvGrpSpPr>
         <p:grpSpPr>
-          <a:xfrm rot="0">
+          <a:xfrm>
             <a:off x="627383" y="2273303"/>
             <a:ext cx="5328923" cy="3134363"/>
             <a:chOff x="0" y="0"/>
@@ -11926,12 +10678,12 @@
         </p:grpSpPr>
         <p:sp>
           <p:nvSpPr>
-            <p:cNvPr name="Freeform 8" id="8"/>
+            <p:cNvPr id="8" name="Freeform 8"/>
             <p:cNvSpPr/>
             <p:nvPr/>
           </p:nvSpPr>
           <p:spPr>
-            <a:xfrm flipH="false" flipV="false" rot="0">
+            <a:xfrm>
               <a:off x="0" y="0"/>
               <a:ext cx="7105269" cy="4179189"/>
             </a:xfrm>
@@ -11940,9 +10692,9 @@
               <a:gdLst/>
               <a:ahLst/>
               <a:cxnLst/>
-              <a:rect r="r" b="b" t="t" l="l"/>
+              <a:rect l="l" t="t" r="r" b="b"/>
               <a:pathLst>
-                <a:path h="4179189" w="7105269">
+                <a:path w="7105269" h="4179189">
                   <a:moveTo>
                     <a:pt x="0" y="295021"/>
                   </a:moveTo>
@@ -11994,12 +10746,12 @@
       </p:grpSp>
       <p:grpSp>
         <p:nvGrpSpPr>
-          <p:cNvPr name="Group 9" id="9"/>
+          <p:cNvPr id="9" name="Group 9"/>
           <p:cNvGrpSpPr/>
           <p:nvPr/>
         </p:nvGrpSpPr>
         <p:grpSpPr>
-          <a:xfrm rot="0">
+          <a:xfrm>
             <a:off x="901703" y="2547623"/>
             <a:ext cx="793499" cy="793499"/>
             <a:chOff x="0" y="0"/>
@@ -12008,12 +10760,12 @@
         </p:grpSpPr>
         <p:sp>
           <p:nvSpPr>
-            <p:cNvPr name="Freeform 10" id="10"/>
+            <p:cNvPr id="10" name="Freeform 10"/>
             <p:cNvSpPr/>
             <p:nvPr/>
           </p:nvSpPr>
           <p:spPr>
-            <a:xfrm flipH="false" flipV="false" rot="0">
+            <a:xfrm>
               <a:off x="0" y="0"/>
               <a:ext cx="1058037" cy="1058037"/>
             </a:xfrm>
@@ -12022,9 +10774,9 @@
               <a:gdLst/>
               <a:ahLst/>
               <a:cxnLst/>
-              <a:rect r="r" b="b" t="t" l="l"/>
+              <a:rect l="l" t="t" r="r" b="b"/>
               <a:pathLst>
-                <a:path h="1058037" w="1058037">
+                <a:path w="1058037" h="1058037">
                   <a:moveTo>
                     <a:pt x="0" y="528955"/>
                   </a:moveTo>
@@ -12067,12 +10819,12 @@
       </p:grpSp>
       <p:grpSp>
         <p:nvGrpSpPr>
-          <p:cNvPr name="Group 11" id="11"/>
+          <p:cNvPr id="11" name="Group 11"/>
           <p:cNvGrpSpPr/>
           <p:nvPr/>
         </p:nvGrpSpPr>
         <p:grpSpPr>
-          <a:xfrm rot="0">
+          <a:xfrm>
             <a:off x="914400" y="2560320"/>
             <a:ext cx="768096" cy="768096"/>
             <a:chOff x="0" y="0"/>
@@ -12081,12 +10833,12 @@
         </p:grpSpPr>
         <p:sp>
           <p:nvSpPr>
-            <p:cNvPr name="Freeform 12" id="12"/>
+            <p:cNvPr id="12" name="Freeform 12"/>
             <p:cNvSpPr/>
             <p:nvPr/>
           </p:nvSpPr>
           <p:spPr>
-            <a:xfrm flipH="false" flipV="false" rot="0">
+            <a:xfrm>
               <a:off x="0" y="0"/>
               <a:ext cx="1024128" cy="1024128"/>
             </a:xfrm>
@@ -12095,9 +10847,9 @@
               <a:gdLst/>
               <a:ahLst/>
               <a:cxnLst/>
-              <a:rect r="r" b="b" t="t" l="l"/>
+              <a:rect l="l" t="t" r="r" b="b"/>
               <a:pathLst>
-                <a:path h="1024128" w="1024128">
+                <a:path w="1024128" h="1024128">
                   <a:moveTo>
                     <a:pt x="0" y="0"/>
                   </a:moveTo>
@@ -12119,15 +10871,15 @@
                 <a:alphaModFix amt="0"/>
               </a:blip>
               <a:stretch>
-                <a:fillRect l="-78303" t="0" r="-78303" b="0"/>
+                <a:fillRect l="-78303" r="-78303"/>
               </a:stretch>
             </a:blipFill>
           </p:spPr>
         </p:sp>
         <p:sp>
           <p:nvSpPr>
-            <p:cNvPr name="TextBox 13" id="13"/>
-            <p:cNvSpPr txBox="true"/>
+            <p:cNvPr id="13" name="TextBox 13"/>
+            <p:cNvSpPr txBox="1"/>
             <p:nvPr/>
           </p:nvSpPr>
           <p:spPr>
@@ -12140,7 +10892,7 @@
             </a:prstGeom>
           </p:spPr>
           <p:txBody>
-            <a:bodyPr anchor="ctr" rtlCol="false" tIns="0" lIns="0" bIns="0" rIns="0"/>
+            <a:bodyPr lIns="0" tIns="0" rIns="0" bIns="0" rtlCol="0" anchor="ctr"/>
             <a:lstStyle/>
             <a:p>
               <a:pPr algn="ctr">
@@ -12149,7 +10901,7 @@
                 </a:lnSpc>
               </a:pPr>
               <a:r>
-                <a:rPr lang="en-US" sz="2799" b="true">
+                <a:rPr lang="en-US" sz="2799" b="1">
                   <a:solidFill>
                     <a:srgbClr val="FFFFFF"/>
                   </a:solidFill>
@@ -12166,12 +10918,12 @@
       </p:grpSp>
       <p:grpSp>
         <p:nvGrpSpPr>
-          <p:cNvPr name="Group 14" id="14"/>
+          <p:cNvPr id="14" name="Group 14"/>
           <p:cNvGrpSpPr/>
           <p:nvPr/>
         </p:nvGrpSpPr>
         <p:grpSpPr>
-          <a:xfrm rot="0">
+          <a:xfrm>
             <a:off x="914400" y="3529584"/>
             <a:ext cx="4754880" cy="822960"/>
             <a:chOff x="0" y="0"/>
@@ -12180,12 +10932,12 @@
         </p:grpSpPr>
         <p:sp>
           <p:nvSpPr>
-            <p:cNvPr name="Freeform 15" id="15"/>
+            <p:cNvPr id="15" name="Freeform 15"/>
             <p:cNvSpPr/>
             <p:nvPr/>
           </p:nvSpPr>
           <p:spPr>
-            <a:xfrm flipH="false" flipV="false" rot="0">
+            <a:xfrm>
               <a:off x="0" y="0"/>
               <a:ext cx="6339840" cy="1097280"/>
             </a:xfrm>
@@ -12194,9 +10946,9 @@
               <a:gdLst/>
               <a:ahLst/>
               <a:cxnLst/>
-              <a:rect r="r" b="b" t="t" l="l"/>
+              <a:rect l="l" t="t" r="r" b="b"/>
               <a:pathLst>
-                <a:path h="1097280" w="6339840">
+                <a:path w="6339840" h="1097280">
                   <a:moveTo>
                     <a:pt x="0" y="0"/>
                   </a:moveTo>
@@ -12218,15 +10970,15 @@
                 <a:alphaModFix amt="0"/>
               </a:blip>
               <a:stretch>
-                <a:fillRect l="0" t="-62580" r="0" b="-62580"/>
+                <a:fillRect t="-62580" b="-62580"/>
               </a:stretch>
             </a:blipFill>
           </p:spPr>
         </p:sp>
         <p:sp>
           <p:nvSpPr>
-            <p:cNvPr name="TextBox 16" id="16"/>
-            <p:cNvSpPr txBox="true"/>
+            <p:cNvPr id="16" name="TextBox 16"/>
+            <p:cNvSpPr txBox="1"/>
             <p:nvPr/>
           </p:nvSpPr>
           <p:spPr>
@@ -12239,7 +10991,7 @@
             </a:prstGeom>
           </p:spPr>
           <p:txBody>
-            <a:bodyPr anchor="ctr" rtlCol="false" tIns="0" lIns="0" bIns="0" rIns="0"/>
+            <a:bodyPr lIns="0" tIns="0" rIns="0" bIns="0" rtlCol="0" anchor="ctr"/>
             <a:lstStyle/>
             <a:p>
               <a:pPr algn="ctr">
@@ -12248,7 +11000,7 @@
                 </a:lnSpc>
               </a:pPr>
               <a:r>
-                <a:rPr lang="en-US" sz="2499" b="true">
+                <a:rPr lang="en-US" sz="2499" b="1">
                   <a:solidFill>
                     <a:srgbClr val="1A1A2E"/>
                   </a:solidFill>
@@ -12265,12 +11017,12 @@
       </p:grpSp>
       <p:grpSp>
         <p:nvGrpSpPr>
-          <p:cNvPr name="Group 17" id="17"/>
+          <p:cNvPr id="17" name="Group 17"/>
           <p:cNvGrpSpPr/>
           <p:nvPr/>
         </p:nvGrpSpPr>
         <p:grpSpPr>
-          <a:xfrm rot="0">
+          <a:xfrm>
             <a:off x="914400" y="4389120"/>
             <a:ext cx="4754880" cy="731520"/>
             <a:chOff x="0" y="0"/>
@@ -12279,12 +11031,12 @@
         </p:grpSpPr>
         <p:sp>
           <p:nvSpPr>
-            <p:cNvPr name="Freeform 18" id="18"/>
+            <p:cNvPr id="18" name="Freeform 18"/>
             <p:cNvSpPr/>
             <p:nvPr/>
           </p:nvSpPr>
           <p:spPr>
-            <a:xfrm flipH="false" flipV="false" rot="0">
+            <a:xfrm>
               <a:off x="0" y="0"/>
               <a:ext cx="6339840" cy="975360"/>
             </a:xfrm>
@@ -12293,9 +11045,9 @@
               <a:gdLst/>
               <a:ahLst/>
               <a:cxnLst/>
-              <a:rect r="r" b="b" t="t" l="l"/>
+              <a:rect l="l" t="t" r="r" b="b"/>
               <a:pathLst>
-                <a:path h="975360" w="6339840">
+                <a:path w="6339840" h="975360">
                   <a:moveTo>
                     <a:pt x="0" y="0"/>
                   </a:moveTo>
@@ -12317,15 +11069,15 @@
                 <a:alphaModFix amt="0"/>
               </a:blip>
               <a:stretch>
-                <a:fillRect l="0" t="-76652" r="0" b="-76652"/>
+                <a:fillRect t="-76652" b="-76652"/>
               </a:stretch>
             </a:blipFill>
           </p:spPr>
         </p:sp>
         <p:sp>
           <p:nvSpPr>
-            <p:cNvPr name="TextBox 19" id="19"/>
-            <p:cNvSpPr txBox="true"/>
+            <p:cNvPr id="19" name="TextBox 19"/>
+            <p:cNvSpPr txBox="1"/>
             <p:nvPr/>
           </p:nvSpPr>
           <p:spPr>
@@ -12338,7 +11090,7 @@
             </a:prstGeom>
           </p:spPr>
           <p:txBody>
-            <a:bodyPr anchor="ctr" rtlCol="false" tIns="0" lIns="0" bIns="0" rIns="0"/>
+            <a:bodyPr lIns="0" tIns="0" rIns="0" bIns="0" rtlCol="0" anchor="ctr"/>
             <a:lstStyle/>
             <a:p>
               <a:pPr algn="ctr">
@@ -12364,12 +11116,12 @@
       </p:grpSp>
       <p:grpSp>
         <p:nvGrpSpPr>
-          <p:cNvPr name="Group 20" id="20"/>
+          <p:cNvPr id="20" name="Group 20"/>
           <p:cNvGrpSpPr/>
           <p:nvPr/>
         </p:nvGrpSpPr>
         <p:grpSpPr>
-          <a:xfrm rot="0">
+          <a:xfrm>
             <a:off x="5924550" y="3821430"/>
             <a:ext cx="495300" cy="38100"/>
             <a:chOff x="0" y="0"/>
@@ -12378,12 +11130,12 @@
         </p:grpSpPr>
         <p:sp>
           <p:nvSpPr>
-            <p:cNvPr name="Freeform 21" id="21"/>
+            <p:cNvPr id="21" name="Freeform 21"/>
             <p:cNvSpPr/>
             <p:nvPr/>
           </p:nvSpPr>
           <p:spPr>
-            <a:xfrm flipH="false" flipV="false" rot="0">
+            <a:xfrm>
               <a:off x="0" y="0"/>
               <a:ext cx="660400" cy="50800"/>
             </a:xfrm>
@@ -12392,9 +11144,9 @@
               <a:gdLst/>
               <a:ahLst/>
               <a:cxnLst/>
-              <a:rect r="r" b="b" t="t" l="l"/>
+              <a:rect l="l" t="t" r="r" b="b"/>
               <a:pathLst>
-                <a:path h="50800" w="660400">
+                <a:path w="660400" h="50800">
                   <a:moveTo>
                     <a:pt x="0" y="0"/>
                   </a:moveTo>
@@ -12409,7 +11161,7 @@
                 <a:alphaModFix amt="0"/>
               </a:blip>
               <a:stretch>
-                <a:fillRect l="0" t="-203305" r="0" b="-203305"/>
+                <a:fillRect t="-203305" b="-203305"/>
               </a:stretch>
             </a:blipFill>
             <a:ln w="38100" cap="sq">
@@ -12424,12 +11176,12 @@
       </p:grpSp>
       <p:grpSp>
         <p:nvGrpSpPr>
-          <p:cNvPr name="Group 22" id="22"/>
+          <p:cNvPr id="22" name="Group 22"/>
           <p:cNvGrpSpPr/>
           <p:nvPr/>
         </p:nvGrpSpPr>
         <p:grpSpPr>
-          <a:xfrm rot="0">
+          <a:xfrm>
             <a:off x="12145647" y="2292348"/>
             <a:ext cx="5328923" cy="3134363"/>
             <a:chOff x="0" y="0"/>
@@ -12438,12 +11190,12 @@
         </p:grpSpPr>
         <p:grpSp>
           <p:nvGrpSpPr>
-            <p:cNvPr name="Group 23" id="23"/>
+            <p:cNvPr id="23" name="Group 23"/>
             <p:cNvGrpSpPr/>
             <p:nvPr/>
           </p:nvGrpSpPr>
           <p:grpSpPr>
-            <a:xfrm rot="0">
+            <a:xfrm>
               <a:off x="0" y="0"/>
               <a:ext cx="7105231" cy="4179151"/>
               <a:chOff x="0" y="0"/>
@@ -12452,12 +11204,12 @@
           </p:grpSpPr>
           <p:sp>
             <p:nvSpPr>
-              <p:cNvPr name="Freeform 24" id="24"/>
+              <p:cNvPr id="24" name="Freeform 24"/>
               <p:cNvSpPr/>
               <p:nvPr/>
             </p:nvSpPr>
             <p:spPr>
-              <a:xfrm flipH="false" flipV="false" rot="0">
+              <a:xfrm>
                 <a:off x="0" y="0"/>
                 <a:ext cx="7105269" cy="4179189"/>
               </a:xfrm>
@@ -12466,9 +11218,9 @@
                 <a:gdLst/>
                 <a:ahLst/>
                 <a:cxnLst/>
-                <a:rect r="r" b="b" t="t" l="l"/>
+                <a:rect l="l" t="t" r="r" b="b"/>
                 <a:pathLst>
-                  <a:path h="4179189" w="7105269">
+                  <a:path w="7105269" h="4179189">
                     <a:moveTo>
                       <a:pt x="0" y="295021"/>
                     </a:moveTo>
@@ -12520,12 +11272,12 @@
         </p:grpSp>
         <p:grpSp>
           <p:nvGrpSpPr>
-            <p:cNvPr name="Group 25" id="25"/>
+            <p:cNvPr id="25" name="Group 25"/>
             <p:cNvGrpSpPr/>
             <p:nvPr/>
           </p:nvGrpSpPr>
           <p:grpSpPr>
-            <a:xfrm rot="0">
+            <a:xfrm>
               <a:off x="365760" y="365760"/>
               <a:ext cx="1057999" cy="1057999"/>
               <a:chOff x="0" y="0"/>
@@ -12534,12 +11286,12 @@
           </p:grpSpPr>
           <p:sp>
             <p:nvSpPr>
-              <p:cNvPr name="Freeform 26" id="26"/>
+              <p:cNvPr id="26" name="Freeform 26"/>
               <p:cNvSpPr/>
               <p:nvPr/>
             </p:nvSpPr>
             <p:spPr>
-              <a:xfrm flipH="false" flipV="false" rot="0">
+              <a:xfrm>
                 <a:off x="0" y="0"/>
                 <a:ext cx="1058037" cy="1058037"/>
               </a:xfrm>
@@ -12548,9 +11300,9 @@
                 <a:gdLst/>
                 <a:ahLst/>
                 <a:cxnLst/>
-                <a:rect r="r" b="b" t="t" l="l"/>
+                <a:rect l="l" t="t" r="r" b="b"/>
                 <a:pathLst>
-                  <a:path h="1058037" w="1058037">
+                  <a:path w="1058037" h="1058037">
                     <a:moveTo>
                       <a:pt x="0" y="528955"/>
                     </a:moveTo>
@@ -12593,12 +11345,12 @@
         </p:grpSp>
         <p:grpSp>
           <p:nvGrpSpPr>
-            <p:cNvPr name="Group 27" id="27"/>
+            <p:cNvPr id="27" name="Group 27"/>
             <p:cNvGrpSpPr/>
             <p:nvPr/>
           </p:nvGrpSpPr>
           <p:grpSpPr>
-            <a:xfrm rot="0">
+            <a:xfrm>
               <a:off x="382689" y="382689"/>
               <a:ext cx="1024128" cy="1024128"/>
               <a:chOff x="0" y="0"/>
@@ -12607,12 +11359,12 @@
           </p:grpSpPr>
           <p:sp>
             <p:nvSpPr>
-              <p:cNvPr name="Freeform 28" id="28"/>
+              <p:cNvPr id="28" name="Freeform 28"/>
               <p:cNvSpPr/>
               <p:nvPr/>
             </p:nvSpPr>
             <p:spPr>
-              <a:xfrm flipH="false" flipV="false" rot="0">
+              <a:xfrm>
                 <a:off x="0" y="0"/>
                 <a:ext cx="1024128" cy="1024128"/>
               </a:xfrm>
@@ -12621,9 +11373,9 @@
                 <a:gdLst/>
                 <a:ahLst/>
                 <a:cxnLst/>
-                <a:rect r="r" b="b" t="t" l="l"/>
+                <a:rect l="l" t="t" r="r" b="b"/>
                 <a:pathLst>
-                  <a:path h="1024128" w="1024128">
+                  <a:path w="1024128" h="1024128">
                     <a:moveTo>
                       <a:pt x="0" y="0"/>
                     </a:moveTo>
@@ -12645,15 +11397,15 @@
                   <a:alphaModFix amt="0"/>
                 </a:blip>
                 <a:stretch>
-                  <a:fillRect l="-78303" t="0" r="-78303" b="0"/>
+                  <a:fillRect l="-78303" r="-78303"/>
                 </a:stretch>
               </a:blipFill>
             </p:spPr>
           </p:sp>
           <p:sp>
             <p:nvSpPr>
-              <p:cNvPr name="TextBox 29" id="29"/>
-              <p:cNvSpPr txBox="true"/>
+              <p:cNvPr id="29" name="TextBox 29"/>
+              <p:cNvSpPr txBox="1"/>
               <p:nvPr/>
             </p:nvSpPr>
             <p:spPr>
@@ -12666,7 +11418,7 @@
               </a:prstGeom>
             </p:spPr>
             <p:txBody>
-              <a:bodyPr anchor="ctr" rtlCol="false" tIns="0" lIns="0" bIns="0" rIns="0"/>
+              <a:bodyPr lIns="0" tIns="0" rIns="0" bIns="0" rtlCol="0" anchor="ctr"/>
               <a:lstStyle/>
               <a:p>
                 <a:pPr algn="ctr">
@@ -12675,7 +11427,7 @@
                   </a:lnSpc>
                 </a:pPr>
                 <a:r>
-                  <a:rPr lang="en-US" sz="2799" b="true">
+                  <a:rPr lang="en-US" sz="2799" b="1">
                     <a:solidFill>
                       <a:srgbClr val="FFFFFF"/>
                     </a:solidFill>
@@ -12692,12 +11444,12 @@
         </p:grpSp>
         <p:grpSp>
           <p:nvGrpSpPr>
-            <p:cNvPr name="Group 30" id="30"/>
+            <p:cNvPr id="30" name="Group 30"/>
             <p:cNvGrpSpPr/>
             <p:nvPr/>
           </p:nvGrpSpPr>
           <p:grpSpPr>
-            <a:xfrm rot="0">
+            <a:xfrm>
               <a:off x="382689" y="1675041"/>
               <a:ext cx="6339840" cy="1097280"/>
               <a:chOff x="0" y="0"/>
@@ -12706,12 +11458,12 @@
           </p:grpSpPr>
           <p:sp>
             <p:nvSpPr>
-              <p:cNvPr name="Freeform 31" id="31"/>
+              <p:cNvPr id="31" name="Freeform 31"/>
               <p:cNvSpPr/>
               <p:nvPr/>
             </p:nvSpPr>
             <p:spPr>
-              <a:xfrm flipH="false" flipV="false" rot="0">
+              <a:xfrm>
                 <a:off x="0" y="0"/>
                 <a:ext cx="6339840" cy="1097280"/>
               </a:xfrm>
@@ -12720,9 +11472,9 @@
                 <a:gdLst/>
                 <a:ahLst/>
                 <a:cxnLst/>
-                <a:rect r="r" b="b" t="t" l="l"/>
+                <a:rect l="l" t="t" r="r" b="b"/>
                 <a:pathLst>
-                  <a:path h="1097280" w="6339840">
+                  <a:path w="6339840" h="1097280">
                     <a:moveTo>
                       <a:pt x="0" y="0"/>
                     </a:moveTo>
@@ -12744,15 +11496,15 @@
                   <a:alphaModFix amt="0"/>
                 </a:blip>
                 <a:stretch>
-                  <a:fillRect l="0" t="-62580" r="0" b="-62580"/>
+                  <a:fillRect t="-62580" b="-62580"/>
                 </a:stretch>
               </a:blipFill>
             </p:spPr>
           </p:sp>
           <p:sp>
             <p:nvSpPr>
-              <p:cNvPr name="TextBox 32" id="32"/>
-              <p:cNvSpPr txBox="true"/>
+              <p:cNvPr id="32" name="TextBox 32"/>
+              <p:cNvSpPr txBox="1"/>
               <p:nvPr/>
             </p:nvSpPr>
             <p:spPr>
@@ -12765,7 +11517,7 @@
               </a:prstGeom>
             </p:spPr>
             <p:txBody>
-              <a:bodyPr anchor="ctr" rtlCol="false" tIns="0" lIns="0" bIns="0" rIns="0"/>
+              <a:bodyPr lIns="0" tIns="0" rIns="0" bIns="0" rtlCol="0" anchor="ctr"/>
               <a:lstStyle/>
               <a:p>
                 <a:pPr algn="ctr">
@@ -12774,7 +11526,7 @@
                   </a:lnSpc>
                 </a:pPr>
                 <a:r>
-                  <a:rPr lang="en-US" sz="2499" b="true">
+                  <a:rPr lang="en-US" sz="2499" b="1">
                     <a:solidFill>
                       <a:srgbClr val="1A1A2E"/>
                     </a:solidFill>
@@ -12791,12 +11543,12 @@
         </p:grpSp>
         <p:grpSp>
           <p:nvGrpSpPr>
-            <p:cNvPr name="Group 33" id="33"/>
+            <p:cNvPr id="33" name="Group 33"/>
             <p:cNvGrpSpPr/>
             <p:nvPr/>
           </p:nvGrpSpPr>
           <p:grpSpPr>
-            <a:xfrm rot="0">
+            <a:xfrm>
               <a:off x="382689" y="2821089"/>
               <a:ext cx="6339840" cy="975360"/>
               <a:chOff x="0" y="0"/>
@@ -12805,12 +11557,12 @@
           </p:grpSpPr>
           <p:sp>
             <p:nvSpPr>
-              <p:cNvPr name="Freeform 34" id="34"/>
+              <p:cNvPr id="34" name="Freeform 34"/>
               <p:cNvSpPr/>
               <p:nvPr/>
             </p:nvSpPr>
             <p:spPr>
-              <a:xfrm flipH="false" flipV="false" rot="0">
+              <a:xfrm>
                 <a:off x="0" y="0"/>
                 <a:ext cx="6339840" cy="975360"/>
               </a:xfrm>
@@ -12819,9 +11571,9 @@
                 <a:gdLst/>
                 <a:ahLst/>
                 <a:cxnLst/>
-                <a:rect r="r" b="b" t="t" l="l"/>
+                <a:rect l="l" t="t" r="r" b="b"/>
                 <a:pathLst>
-                  <a:path h="975360" w="6339840">
+                  <a:path w="6339840" h="975360">
                     <a:moveTo>
                       <a:pt x="0" y="0"/>
                     </a:moveTo>
@@ -12843,15 +11595,15 @@
                   <a:alphaModFix amt="0"/>
                 </a:blip>
                 <a:stretch>
-                  <a:fillRect l="0" t="-76652" r="0" b="-76652"/>
+                  <a:fillRect t="-76652" b="-76652"/>
                 </a:stretch>
               </a:blipFill>
             </p:spPr>
           </p:sp>
           <p:sp>
             <p:nvSpPr>
-              <p:cNvPr name="TextBox 35" id="35"/>
-              <p:cNvSpPr txBox="true"/>
+              <p:cNvPr id="35" name="TextBox 35"/>
+              <p:cNvSpPr txBox="1"/>
               <p:nvPr/>
             </p:nvSpPr>
             <p:spPr>
@@ -12864,7 +11616,7 @@
               </a:prstGeom>
             </p:spPr>
             <p:txBody>
-              <a:bodyPr anchor="ctr" rtlCol="false" tIns="0" lIns="0" bIns="0" rIns="0"/>
+              <a:bodyPr lIns="0" tIns="0" rIns="0" bIns="0" rtlCol="0" anchor="ctr"/>
               <a:lstStyle/>
               <a:p>
                 <a:pPr algn="ctr">
@@ -12891,12 +11643,12 @@
       </p:grpSp>
       <p:grpSp>
         <p:nvGrpSpPr>
-          <p:cNvPr name="Group 36" id="36"/>
+          <p:cNvPr id="36" name="Group 36"/>
           <p:cNvGrpSpPr/>
           <p:nvPr/>
         </p:nvGrpSpPr>
         <p:grpSpPr>
-          <a:xfrm rot="0">
+          <a:xfrm>
             <a:off x="11685270" y="3821430"/>
             <a:ext cx="495300" cy="38100"/>
             <a:chOff x="0" y="0"/>
@@ -12905,12 +11657,12 @@
         </p:grpSpPr>
         <p:sp>
           <p:nvSpPr>
-            <p:cNvPr name="Freeform 37" id="37"/>
+            <p:cNvPr id="37" name="Freeform 37"/>
             <p:cNvSpPr/>
             <p:nvPr/>
           </p:nvSpPr>
           <p:spPr>
-            <a:xfrm flipH="false" flipV="false" rot="0">
+            <a:xfrm>
               <a:off x="0" y="0"/>
               <a:ext cx="660400" cy="50800"/>
             </a:xfrm>
@@ -12919,9 +11671,9 @@
               <a:gdLst/>
               <a:ahLst/>
               <a:cxnLst/>
-              <a:rect r="r" b="b" t="t" l="l"/>
+              <a:rect l="l" t="t" r="r" b="b"/>
               <a:pathLst>
-                <a:path h="50800" w="660400">
+                <a:path w="660400" h="50800">
                   <a:moveTo>
                     <a:pt x="0" y="0"/>
                   </a:moveTo>
@@ -12936,7 +11688,7 @@
                 <a:alphaModFix amt="0"/>
               </a:blip>
               <a:stretch>
-                <a:fillRect l="0" t="-203305" r="0" b="-203305"/>
+                <a:fillRect t="-203305" b="-203305"/>
               </a:stretch>
             </a:blipFill>
             <a:ln w="38100" cap="sq">
@@ -12951,12 +11703,12 @@
       </p:grpSp>
       <p:grpSp>
         <p:nvGrpSpPr>
-          <p:cNvPr name="Group 38" id="38"/>
+          <p:cNvPr id="38" name="Group 38"/>
           <p:cNvGrpSpPr/>
           <p:nvPr/>
         </p:nvGrpSpPr>
         <p:grpSpPr>
-          <a:xfrm rot="0">
+          <a:xfrm>
             <a:off x="6419850" y="6122922"/>
             <a:ext cx="5328923" cy="3134363"/>
             <a:chOff x="0" y="0"/>
@@ -12965,12 +11717,12 @@
         </p:grpSpPr>
         <p:grpSp>
           <p:nvGrpSpPr>
-            <p:cNvPr name="Group 39" id="39"/>
+            <p:cNvPr id="39" name="Group 39"/>
             <p:cNvGrpSpPr/>
             <p:nvPr/>
           </p:nvGrpSpPr>
           <p:grpSpPr>
-            <a:xfrm rot="0">
+            <a:xfrm>
               <a:off x="0" y="0"/>
               <a:ext cx="7105231" cy="4179151"/>
               <a:chOff x="0" y="0"/>
@@ -12979,12 +11731,12 @@
           </p:grpSpPr>
           <p:sp>
             <p:nvSpPr>
-              <p:cNvPr name="Freeform 40" id="40"/>
+              <p:cNvPr id="40" name="Freeform 40"/>
               <p:cNvSpPr/>
               <p:nvPr/>
             </p:nvSpPr>
             <p:spPr>
-              <a:xfrm flipH="false" flipV="false" rot="0">
+              <a:xfrm>
                 <a:off x="0" y="0"/>
                 <a:ext cx="7105269" cy="4179189"/>
               </a:xfrm>
@@ -12993,9 +11745,9 @@
                 <a:gdLst/>
                 <a:ahLst/>
                 <a:cxnLst/>
-                <a:rect r="r" b="b" t="t" l="l"/>
+                <a:rect l="l" t="t" r="r" b="b"/>
                 <a:pathLst>
-                  <a:path h="4179189" w="7105269">
+                  <a:path w="7105269" h="4179189">
                     <a:moveTo>
                       <a:pt x="0" y="295021"/>
                     </a:moveTo>
@@ -13047,12 +11799,12 @@
         </p:grpSp>
         <p:grpSp>
           <p:nvGrpSpPr>
-            <p:cNvPr name="Group 41" id="41"/>
+            <p:cNvPr id="41" name="Group 41"/>
             <p:cNvGrpSpPr/>
             <p:nvPr/>
           </p:nvGrpSpPr>
           <p:grpSpPr>
-            <a:xfrm rot="0">
+            <a:xfrm>
               <a:off x="365760" y="365760"/>
               <a:ext cx="1057999" cy="1057999"/>
               <a:chOff x="0" y="0"/>
@@ -13061,12 +11813,12 @@
           </p:grpSpPr>
           <p:sp>
             <p:nvSpPr>
-              <p:cNvPr name="Freeform 42" id="42"/>
+              <p:cNvPr id="42" name="Freeform 42"/>
               <p:cNvSpPr/>
               <p:nvPr/>
             </p:nvSpPr>
             <p:spPr>
-              <a:xfrm flipH="false" flipV="false" rot="0">
+              <a:xfrm>
                 <a:off x="0" y="0"/>
                 <a:ext cx="1058037" cy="1058037"/>
               </a:xfrm>
@@ -13075,9 +11827,9 @@
                 <a:gdLst/>
                 <a:ahLst/>
                 <a:cxnLst/>
-                <a:rect r="r" b="b" t="t" l="l"/>
+                <a:rect l="l" t="t" r="r" b="b"/>
                 <a:pathLst>
-                  <a:path h="1058037" w="1058037">
+                  <a:path w="1058037" h="1058037">
                     <a:moveTo>
                       <a:pt x="0" y="528955"/>
                     </a:moveTo>
@@ -13120,12 +11872,12 @@
         </p:grpSp>
         <p:grpSp>
           <p:nvGrpSpPr>
-            <p:cNvPr name="Group 43" id="43"/>
+            <p:cNvPr id="43" name="Group 43"/>
             <p:cNvGrpSpPr/>
             <p:nvPr/>
           </p:nvGrpSpPr>
           <p:grpSpPr>
-            <a:xfrm rot="0">
+            <a:xfrm>
               <a:off x="382689" y="382689"/>
               <a:ext cx="1024128" cy="1024128"/>
               <a:chOff x="0" y="0"/>
@@ -13134,12 +11886,12 @@
           </p:grpSpPr>
           <p:sp>
             <p:nvSpPr>
-              <p:cNvPr name="Freeform 44" id="44"/>
+              <p:cNvPr id="44" name="Freeform 44"/>
               <p:cNvSpPr/>
               <p:nvPr/>
             </p:nvSpPr>
             <p:spPr>
-              <a:xfrm flipH="false" flipV="false" rot="0">
+              <a:xfrm>
                 <a:off x="0" y="0"/>
                 <a:ext cx="1024128" cy="1024128"/>
               </a:xfrm>
@@ -13148,9 +11900,9 @@
                 <a:gdLst/>
                 <a:ahLst/>
                 <a:cxnLst/>
-                <a:rect r="r" b="b" t="t" l="l"/>
+                <a:rect l="l" t="t" r="r" b="b"/>
                 <a:pathLst>
-                  <a:path h="1024128" w="1024128">
+                  <a:path w="1024128" h="1024128">
                     <a:moveTo>
                       <a:pt x="0" y="0"/>
                     </a:moveTo>
@@ -13172,15 +11924,15 @@
                   <a:alphaModFix amt="0"/>
                 </a:blip>
                 <a:stretch>
-                  <a:fillRect l="-78303" t="0" r="-78303" b="0"/>
+                  <a:fillRect l="-78303" r="-78303"/>
                 </a:stretch>
               </a:blipFill>
             </p:spPr>
           </p:sp>
           <p:sp>
             <p:nvSpPr>
-              <p:cNvPr name="TextBox 45" id="45"/>
-              <p:cNvSpPr txBox="true"/>
+              <p:cNvPr id="45" name="TextBox 45"/>
+              <p:cNvSpPr txBox="1"/>
               <p:nvPr/>
             </p:nvSpPr>
             <p:spPr>
@@ -13193,7 +11945,7 @@
               </a:prstGeom>
             </p:spPr>
             <p:txBody>
-              <a:bodyPr anchor="ctr" rtlCol="false" tIns="0" lIns="0" bIns="0" rIns="0"/>
+              <a:bodyPr lIns="0" tIns="0" rIns="0" bIns="0" rtlCol="0" anchor="ctr"/>
               <a:lstStyle/>
               <a:p>
                 <a:pPr algn="ctr">
@@ -13202,7 +11954,7 @@
                   </a:lnSpc>
                 </a:pPr>
                 <a:r>
-                  <a:rPr lang="en-US" sz="2799" b="true">
+                  <a:rPr lang="en-US" sz="2799" b="1">
                     <a:solidFill>
                       <a:srgbClr val="FFFFFF"/>
                     </a:solidFill>
@@ -13219,12 +11971,12 @@
         </p:grpSp>
         <p:grpSp>
           <p:nvGrpSpPr>
-            <p:cNvPr name="Group 46" id="46"/>
+            <p:cNvPr id="46" name="Group 46"/>
             <p:cNvGrpSpPr/>
             <p:nvPr/>
           </p:nvGrpSpPr>
           <p:grpSpPr>
-            <a:xfrm rot="0">
+            <a:xfrm>
               <a:off x="382689" y="1675041"/>
               <a:ext cx="6339840" cy="1097280"/>
               <a:chOff x="0" y="0"/>
@@ -13233,12 +11985,12 @@
           </p:grpSpPr>
           <p:sp>
             <p:nvSpPr>
-              <p:cNvPr name="Freeform 47" id="47"/>
+              <p:cNvPr id="47" name="Freeform 47"/>
               <p:cNvSpPr/>
               <p:nvPr/>
             </p:nvSpPr>
             <p:spPr>
-              <a:xfrm flipH="false" flipV="false" rot="0">
+              <a:xfrm>
                 <a:off x="0" y="0"/>
                 <a:ext cx="6339840" cy="1097280"/>
               </a:xfrm>
@@ -13247,9 +11999,9 @@
                 <a:gdLst/>
                 <a:ahLst/>
                 <a:cxnLst/>
-                <a:rect r="r" b="b" t="t" l="l"/>
+                <a:rect l="l" t="t" r="r" b="b"/>
                 <a:pathLst>
-                  <a:path h="1097280" w="6339840">
+                  <a:path w="6339840" h="1097280">
                     <a:moveTo>
                       <a:pt x="0" y="0"/>
                     </a:moveTo>
@@ -13271,15 +12023,15 @@
                   <a:alphaModFix amt="0"/>
                 </a:blip>
                 <a:stretch>
-                  <a:fillRect l="0" t="-62580" r="0" b="-62580"/>
+                  <a:fillRect t="-62580" b="-62580"/>
                 </a:stretch>
               </a:blipFill>
             </p:spPr>
           </p:sp>
           <p:sp>
             <p:nvSpPr>
-              <p:cNvPr name="TextBox 48" id="48"/>
-              <p:cNvSpPr txBox="true"/>
+              <p:cNvPr id="48" name="TextBox 48"/>
+              <p:cNvSpPr txBox="1"/>
               <p:nvPr/>
             </p:nvSpPr>
             <p:spPr>
@@ -13292,7 +12044,7 @@
               </a:prstGeom>
             </p:spPr>
             <p:txBody>
-              <a:bodyPr anchor="ctr" rtlCol="false" tIns="0" lIns="0" bIns="0" rIns="0"/>
+              <a:bodyPr lIns="0" tIns="0" rIns="0" bIns="0" rtlCol="0" anchor="ctr"/>
               <a:lstStyle/>
               <a:p>
                 <a:pPr algn="ctr">
@@ -13301,7 +12053,7 @@
                   </a:lnSpc>
                 </a:pPr>
                 <a:r>
-                  <a:rPr lang="en-US" sz="2499" b="true">
+                  <a:rPr lang="en-US" sz="2499" b="1">
                     <a:solidFill>
                       <a:srgbClr val="1A1A2E"/>
                     </a:solidFill>
@@ -13318,12 +12070,12 @@
         </p:grpSp>
         <p:grpSp>
           <p:nvGrpSpPr>
-            <p:cNvPr name="Group 49" id="49"/>
+            <p:cNvPr id="49" name="Group 49"/>
             <p:cNvGrpSpPr/>
             <p:nvPr/>
           </p:nvGrpSpPr>
           <p:grpSpPr>
-            <a:xfrm rot="0">
+            <a:xfrm>
               <a:off x="382689" y="2821089"/>
               <a:ext cx="6339840" cy="975360"/>
               <a:chOff x="0" y="0"/>
@@ -13332,12 +12084,12 @@
           </p:grpSpPr>
           <p:sp>
             <p:nvSpPr>
-              <p:cNvPr name="Freeform 50" id="50"/>
+              <p:cNvPr id="50" name="Freeform 50"/>
               <p:cNvSpPr/>
               <p:nvPr/>
             </p:nvSpPr>
             <p:spPr>
-              <a:xfrm flipH="false" flipV="false" rot="0">
+              <a:xfrm>
                 <a:off x="0" y="0"/>
                 <a:ext cx="6339840" cy="975360"/>
               </a:xfrm>
@@ -13346,9 +12098,9 @@
                 <a:gdLst/>
                 <a:ahLst/>
                 <a:cxnLst/>
-                <a:rect r="r" b="b" t="t" l="l"/>
+                <a:rect l="l" t="t" r="r" b="b"/>
                 <a:pathLst>
-                  <a:path h="975360" w="6339840">
+                  <a:path w="6339840" h="975360">
                     <a:moveTo>
                       <a:pt x="0" y="0"/>
                     </a:moveTo>
@@ -13370,15 +12122,15 @@
                   <a:alphaModFix amt="0"/>
                 </a:blip>
                 <a:stretch>
-                  <a:fillRect l="0" t="-76652" r="0" b="-76652"/>
+                  <a:fillRect t="-76652" b="-76652"/>
                 </a:stretch>
               </a:blipFill>
             </p:spPr>
           </p:sp>
           <p:sp>
             <p:nvSpPr>
-              <p:cNvPr name="TextBox 51" id="51"/>
-              <p:cNvSpPr txBox="true"/>
+              <p:cNvPr id="51" name="TextBox 51"/>
+              <p:cNvSpPr txBox="1"/>
               <p:nvPr/>
             </p:nvSpPr>
             <p:spPr>
@@ -13391,7 +12143,7 @@
               </a:prstGeom>
             </p:spPr>
             <p:txBody>
-              <a:bodyPr anchor="ctr" rtlCol="false" tIns="0" lIns="0" bIns="0" rIns="0"/>
+              <a:bodyPr lIns="0" tIns="0" rIns="0" bIns="0" rtlCol="0" anchor="ctr"/>
               <a:lstStyle/>
               <a:p>
                 <a:pPr algn="ctr">
@@ -13418,12 +12170,12 @@
       </p:grpSp>
       <p:grpSp>
         <p:nvGrpSpPr>
-          <p:cNvPr name="Group 52" id="52"/>
+          <p:cNvPr id="52" name="Group 52"/>
           <p:cNvGrpSpPr/>
           <p:nvPr/>
         </p:nvGrpSpPr>
         <p:grpSpPr>
-          <a:xfrm rot="0">
+          <a:xfrm>
             <a:off x="6388098" y="2273303"/>
             <a:ext cx="5328923" cy="3134363"/>
             <a:chOff x="0" y="0"/>
@@ -13432,12 +12184,12 @@
         </p:grpSpPr>
         <p:grpSp>
           <p:nvGrpSpPr>
-            <p:cNvPr name="Group 53" id="53"/>
+            <p:cNvPr id="53" name="Group 53"/>
             <p:cNvGrpSpPr/>
             <p:nvPr/>
           </p:nvGrpSpPr>
           <p:grpSpPr>
-            <a:xfrm rot="0">
+            <a:xfrm>
               <a:off x="0" y="0"/>
               <a:ext cx="7105231" cy="4179151"/>
               <a:chOff x="0" y="0"/>
@@ -13446,12 +12198,12 @@
           </p:grpSpPr>
           <p:sp>
             <p:nvSpPr>
-              <p:cNvPr name="Freeform 54" id="54"/>
+              <p:cNvPr id="54" name="Freeform 54"/>
               <p:cNvSpPr/>
               <p:nvPr/>
             </p:nvSpPr>
             <p:spPr>
-              <a:xfrm flipH="false" flipV="false" rot="0">
+              <a:xfrm>
                 <a:off x="0" y="0"/>
                 <a:ext cx="7105269" cy="4179189"/>
               </a:xfrm>
@@ -13460,9 +12212,9 @@
                 <a:gdLst/>
                 <a:ahLst/>
                 <a:cxnLst/>
-                <a:rect r="r" b="b" t="t" l="l"/>
+                <a:rect l="l" t="t" r="r" b="b"/>
                 <a:pathLst>
-                  <a:path h="4179189" w="7105269">
+                  <a:path w="7105269" h="4179189">
                     <a:moveTo>
                       <a:pt x="0" y="295021"/>
                     </a:moveTo>
@@ -13514,12 +12266,12 @@
         </p:grpSp>
         <p:grpSp>
           <p:nvGrpSpPr>
-            <p:cNvPr name="Group 55" id="55"/>
+            <p:cNvPr id="55" name="Group 55"/>
             <p:cNvGrpSpPr/>
             <p:nvPr/>
           </p:nvGrpSpPr>
           <p:grpSpPr>
-            <a:xfrm rot="0">
+            <a:xfrm>
               <a:off x="365760" y="365760"/>
               <a:ext cx="1057999" cy="1057999"/>
               <a:chOff x="0" y="0"/>
@@ -13528,12 +12280,12 @@
           </p:grpSpPr>
           <p:sp>
             <p:nvSpPr>
-              <p:cNvPr name="Freeform 56" id="56"/>
+              <p:cNvPr id="56" name="Freeform 56"/>
               <p:cNvSpPr/>
               <p:nvPr/>
             </p:nvSpPr>
             <p:spPr>
-              <a:xfrm flipH="false" flipV="false" rot="0">
+              <a:xfrm>
                 <a:off x="0" y="0"/>
                 <a:ext cx="1058037" cy="1058037"/>
               </a:xfrm>
@@ -13542,9 +12294,9 @@
                 <a:gdLst/>
                 <a:ahLst/>
                 <a:cxnLst/>
-                <a:rect r="r" b="b" t="t" l="l"/>
+                <a:rect l="l" t="t" r="r" b="b"/>
                 <a:pathLst>
-                  <a:path h="1058037" w="1058037">
+                  <a:path w="1058037" h="1058037">
                     <a:moveTo>
                       <a:pt x="0" y="528955"/>
                     </a:moveTo>
@@ -13587,12 +12339,12 @@
         </p:grpSp>
         <p:grpSp>
           <p:nvGrpSpPr>
-            <p:cNvPr name="Group 57" id="57"/>
+            <p:cNvPr id="57" name="Group 57"/>
             <p:cNvGrpSpPr/>
             <p:nvPr/>
           </p:nvGrpSpPr>
           <p:grpSpPr>
-            <a:xfrm rot="0">
+            <a:xfrm>
               <a:off x="382689" y="382689"/>
               <a:ext cx="1024128" cy="1024128"/>
               <a:chOff x="0" y="0"/>
@@ -13601,12 +12353,12 @@
           </p:grpSpPr>
           <p:sp>
             <p:nvSpPr>
-              <p:cNvPr name="Freeform 58" id="58"/>
+              <p:cNvPr id="58" name="Freeform 58"/>
               <p:cNvSpPr/>
               <p:nvPr/>
             </p:nvSpPr>
             <p:spPr>
-              <a:xfrm flipH="false" flipV="false" rot="0">
+              <a:xfrm>
                 <a:off x="0" y="0"/>
                 <a:ext cx="1024128" cy="1024128"/>
               </a:xfrm>
@@ -13615,9 +12367,9 @@
                 <a:gdLst/>
                 <a:ahLst/>
                 <a:cxnLst/>
-                <a:rect r="r" b="b" t="t" l="l"/>
+                <a:rect l="l" t="t" r="r" b="b"/>
                 <a:pathLst>
-                  <a:path h="1024128" w="1024128">
+                  <a:path w="1024128" h="1024128">
                     <a:moveTo>
                       <a:pt x="0" y="0"/>
                     </a:moveTo>
@@ -13639,15 +12391,15 @@
                   <a:alphaModFix amt="0"/>
                 </a:blip>
                 <a:stretch>
-                  <a:fillRect l="-78303" t="0" r="-78303" b="0"/>
+                  <a:fillRect l="-78303" r="-78303"/>
                 </a:stretch>
               </a:blipFill>
             </p:spPr>
           </p:sp>
           <p:sp>
             <p:nvSpPr>
-              <p:cNvPr name="TextBox 59" id="59"/>
-              <p:cNvSpPr txBox="true"/>
+              <p:cNvPr id="59" name="TextBox 59"/>
+              <p:cNvSpPr txBox="1"/>
               <p:nvPr/>
             </p:nvSpPr>
             <p:spPr>
@@ -13660,7 +12412,7 @@
               </a:prstGeom>
             </p:spPr>
             <p:txBody>
-              <a:bodyPr anchor="ctr" rtlCol="false" tIns="0" lIns="0" bIns="0" rIns="0"/>
+              <a:bodyPr lIns="0" tIns="0" rIns="0" bIns="0" rtlCol="0" anchor="ctr"/>
               <a:lstStyle/>
               <a:p>
                 <a:pPr algn="ctr">
@@ -13669,7 +12421,7 @@
                   </a:lnSpc>
                 </a:pPr>
                 <a:r>
-                  <a:rPr lang="en-US" sz="2799" b="true">
+                  <a:rPr lang="en-US" sz="2799" b="1">
                     <a:solidFill>
                       <a:srgbClr val="FFFFFF"/>
                     </a:solidFill>
@@ -13686,12 +12438,12 @@
         </p:grpSp>
         <p:grpSp>
           <p:nvGrpSpPr>
-            <p:cNvPr name="Group 60" id="60"/>
+            <p:cNvPr id="60" name="Group 60"/>
             <p:cNvGrpSpPr/>
             <p:nvPr/>
           </p:nvGrpSpPr>
           <p:grpSpPr>
-            <a:xfrm rot="0">
+            <a:xfrm>
               <a:off x="382689" y="1675041"/>
               <a:ext cx="6339840" cy="1097280"/>
               <a:chOff x="0" y="0"/>
@@ -13700,12 +12452,12 @@
           </p:grpSpPr>
           <p:sp>
             <p:nvSpPr>
-              <p:cNvPr name="Freeform 61" id="61"/>
+              <p:cNvPr id="61" name="Freeform 61"/>
               <p:cNvSpPr/>
               <p:nvPr/>
             </p:nvSpPr>
             <p:spPr>
-              <a:xfrm flipH="false" flipV="false" rot="0">
+              <a:xfrm>
                 <a:off x="0" y="0"/>
                 <a:ext cx="6339840" cy="1097280"/>
               </a:xfrm>
@@ -13714,9 +12466,9 @@
                 <a:gdLst/>
                 <a:ahLst/>
                 <a:cxnLst/>
-                <a:rect r="r" b="b" t="t" l="l"/>
+                <a:rect l="l" t="t" r="r" b="b"/>
                 <a:pathLst>
-                  <a:path h="1097280" w="6339840">
+                  <a:path w="6339840" h="1097280">
                     <a:moveTo>
                       <a:pt x="0" y="0"/>
                     </a:moveTo>
@@ -13738,15 +12490,15 @@
                   <a:alphaModFix amt="0"/>
                 </a:blip>
                 <a:stretch>
-                  <a:fillRect l="0" t="-62580" r="0" b="-62580"/>
+                  <a:fillRect t="-62580" b="-62580"/>
                 </a:stretch>
               </a:blipFill>
             </p:spPr>
           </p:sp>
           <p:sp>
             <p:nvSpPr>
-              <p:cNvPr name="TextBox 62" id="62"/>
-              <p:cNvSpPr txBox="true"/>
+              <p:cNvPr id="62" name="TextBox 62"/>
+              <p:cNvSpPr txBox="1"/>
               <p:nvPr/>
             </p:nvSpPr>
             <p:spPr>
@@ -13759,7 +12511,7 @@
               </a:prstGeom>
             </p:spPr>
             <p:txBody>
-              <a:bodyPr anchor="ctr" rtlCol="false" tIns="0" lIns="0" bIns="0" rIns="0"/>
+              <a:bodyPr lIns="0" tIns="0" rIns="0" bIns="0" rtlCol="0" anchor="ctr"/>
               <a:lstStyle/>
               <a:p>
                 <a:pPr algn="ctr">
@@ -13768,7 +12520,7 @@
                   </a:lnSpc>
                 </a:pPr>
                 <a:r>
-                  <a:rPr lang="en-US" sz="2499" b="true">
+                  <a:rPr lang="en-US" sz="2499" b="1">
                     <a:solidFill>
                       <a:srgbClr val="1A1A2E"/>
                     </a:solidFill>
@@ -13785,12 +12537,12 @@
         </p:grpSp>
         <p:grpSp>
           <p:nvGrpSpPr>
-            <p:cNvPr name="Group 63" id="63"/>
+            <p:cNvPr id="63" name="Group 63"/>
             <p:cNvGrpSpPr/>
             <p:nvPr/>
           </p:nvGrpSpPr>
           <p:grpSpPr>
-            <a:xfrm rot="0">
+            <a:xfrm>
               <a:off x="382689" y="2821089"/>
               <a:ext cx="6339840" cy="975360"/>
               <a:chOff x="0" y="0"/>
@@ -13799,12 +12551,12 @@
           </p:grpSpPr>
           <p:sp>
             <p:nvSpPr>
-              <p:cNvPr name="Freeform 64" id="64"/>
+              <p:cNvPr id="64" name="Freeform 64"/>
               <p:cNvSpPr/>
               <p:nvPr/>
             </p:nvSpPr>
             <p:spPr>
-              <a:xfrm flipH="false" flipV="false" rot="0">
+              <a:xfrm>
                 <a:off x="0" y="0"/>
                 <a:ext cx="6339840" cy="975360"/>
               </a:xfrm>
@@ -13813,9 +12565,9 @@
                 <a:gdLst/>
                 <a:ahLst/>
                 <a:cxnLst/>
-                <a:rect r="r" b="b" t="t" l="l"/>
+                <a:rect l="l" t="t" r="r" b="b"/>
                 <a:pathLst>
-                  <a:path h="975360" w="6339840">
+                  <a:path w="6339840" h="975360">
                     <a:moveTo>
                       <a:pt x="0" y="0"/>
                     </a:moveTo>
@@ -13837,15 +12589,15 @@
                   <a:alphaModFix amt="0"/>
                 </a:blip>
                 <a:stretch>
-                  <a:fillRect l="0" t="-76652" r="0" b="-76652"/>
+                  <a:fillRect t="-76652" b="-76652"/>
                 </a:stretch>
               </a:blipFill>
             </p:spPr>
           </p:sp>
           <p:sp>
             <p:nvSpPr>
-              <p:cNvPr name="TextBox 65" id="65"/>
-              <p:cNvSpPr txBox="true"/>
+              <p:cNvPr id="65" name="TextBox 65"/>
+              <p:cNvSpPr txBox="1"/>
               <p:nvPr/>
             </p:nvSpPr>
             <p:spPr>
@@ -13858,7 +12610,7 @@
               </a:prstGeom>
             </p:spPr>
             <p:txBody>
-              <a:bodyPr anchor="ctr" rtlCol="false" tIns="0" lIns="0" bIns="0" rIns="0"/>
+              <a:bodyPr lIns="0" tIns="0" rIns="0" bIns="0" rtlCol="0" anchor="ctr"/>
               <a:lstStyle/>
               <a:p>
                 <a:pPr algn="ctr">
@@ -13885,12 +12637,12 @@
       </p:grpSp>
       <p:grpSp>
         <p:nvGrpSpPr>
-          <p:cNvPr name="Group 66" id="66"/>
+          <p:cNvPr id="66" name="Group 66"/>
           <p:cNvGrpSpPr/>
           <p:nvPr/>
         </p:nvGrpSpPr>
         <p:grpSpPr>
-          <a:xfrm rot="0">
+          <a:xfrm>
             <a:off x="5924550" y="7570470"/>
             <a:ext cx="495300" cy="38100"/>
             <a:chOff x="0" y="0"/>
@@ -13899,12 +12651,12 @@
         </p:grpSpPr>
         <p:sp>
           <p:nvSpPr>
-            <p:cNvPr name="Freeform 67" id="67"/>
+            <p:cNvPr id="67" name="Freeform 67"/>
             <p:cNvSpPr/>
             <p:nvPr/>
           </p:nvSpPr>
           <p:spPr>
-            <a:xfrm flipH="false" flipV="false" rot="0">
+            <a:xfrm>
               <a:off x="0" y="0"/>
               <a:ext cx="660400" cy="50800"/>
             </a:xfrm>
@@ -13913,9 +12665,9 @@
               <a:gdLst/>
               <a:ahLst/>
               <a:cxnLst/>
-              <a:rect r="r" b="b" t="t" l="l"/>
+              <a:rect l="l" t="t" r="r" b="b"/>
               <a:pathLst>
-                <a:path h="50800" w="660400">
+                <a:path w="660400" h="50800">
                   <a:moveTo>
                     <a:pt x="0" y="0"/>
                   </a:moveTo>
@@ -13930,7 +12682,7 @@
                 <a:alphaModFix amt="0"/>
               </a:blip>
               <a:stretch>
-                <a:fillRect l="0" t="-203305" r="0" b="-203305"/>
+                <a:fillRect t="-203305" b="-203305"/>
               </a:stretch>
             </a:blipFill>
             <a:ln w="38100" cap="sq">
@@ -13945,12 +12697,12 @@
       </p:grpSp>
       <p:grpSp>
         <p:nvGrpSpPr>
-          <p:cNvPr name="Group 68" id="68"/>
+          <p:cNvPr id="68" name="Group 68"/>
           <p:cNvGrpSpPr/>
           <p:nvPr/>
         </p:nvGrpSpPr>
         <p:grpSpPr>
-          <a:xfrm rot="0">
+          <a:xfrm>
             <a:off x="12145647" y="6122922"/>
             <a:ext cx="5328923" cy="3134363"/>
             <a:chOff x="0" y="0"/>
@@ -13959,12 +12711,12 @@
         </p:grpSpPr>
         <p:grpSp>
           <p:nvGrpSpPr>
-            <p:cNvPr name="Group 69" id="69"/>
+            <p:cNvPr id="69" name="Group 69"/>
             <p:cNvGrpSpPr/>
             <p:nvPr/>
           </p:nvGrpSpPr>
           <p:grpSpPr>
-            <a:xfrm rot="0">
+            <a:xfrm>
               <a:off x="0" y="0"/>
               <a:ext cx="7105231" cy="4179151"/>
               <a:chOff x="0" y="0"/>
@@ -13973,12 +12725,12 @@
           </p:grpSpPr>
           <p:sp>
             <p:nvSpPr>
-              <p:cNvPr name="Freeform 70" id="70"/>
+              <p:cNvPr id="70" name="Freeform 70"/>
               <p:cNvSpPr/>
               <p:nvPr/>
             </p:nvSpPr>
             <p:spPr>
-              <a:xfrm flipH="false" flipV="false" rot="0">
+              <a:xfrm>
                 <a:off x="0" y="0"/>
                 <a:ext cx="7105269" cy="4179189"/>
               </a:xfrm>
@@ -13987,9 +12739,9 @@
                 <a:gdLst/>
                 <a:ahLst/>
                 <a:cxnLst/>
-                <a:rect r="r" b="b" t="t" l="l"/>
+                <a:rect l="l" t="t" r="r" b="b"/>
                 <a:pathLst>
-                  <a:path h="4179189" w="7105269">
+                  <a:path w="7105269" h="4179189">
                     <a:moveTo>
                       <a:pt x="0" y="295021"/>
                     </a:moveTo>
@@ -14041,12 +12793,12 @@
         </p:grpSp>
         <p:grpSp>
           <p:nvGrpSpPr>
-            <p:cNvPr name="Group 71" id="71"/>
+            <p:cNvPr id="71" name="Group 71"/>
             <p:cNvGrpSpPr/>
             <p:nvPr/>
           </p:nvGrpSpPr>
           <p:grpSpPr>
-            <a:xfrm rot="0">
+            <a:xfrm>
               <a:off x="365760" y="365760"/>
               <a:ext cx="1057999" cy="1057999"/>
               <a:chOff x="0" y="0"/>
@@ -14055,12 +12807,12 @@
           </p:grpSpPr>
           <p:sp>
             <p:nvSpPr>
-              <p:cNvPr name="Freeform 72" id="72"/>
+              <p:cNvPr id="72" name="Freeform 72"/>
               <p:cNvSpPr/>
               <p:nvPr/>
             </p:nvSpPr>
             <p:spPr>
-              <a:xfrm flipH="false" flipV="false" rot="0">
+              <a:xfrm>
                 <a:off x="0" y="0"/>
                 <a:ext cx="1058037" cy="1058037"/>
               </a:xfrm>
@@ -14069,9 +12821,9 @@
                 <a:gdLst/>
                 <a:ahLst/>
                 <a:cxnLst/>
-                <a:rect r="r" b="b" t="t" l="l"/>
+                <a:rect l="l" t="t" r="r" b="b"/>
                 <a:pathLst>
-                  <a:path h="1058037" w="1058037">
+                  <a:path w="1058037" h="1058037">
                     <a:moveTo>
                       <a:pt x="0" y="528955"/>
                     </a:moveTo>
@@ -14114,12 +12866,12 @@
         </p:grpSp>
         <p:grpSp>
           <p:nvGrpSpPr>
-            <p:cNvPr name="Group 73" id="73"/>
+            <p:cNvPr id="73" name="Group 73"/>
             <p:cNvGrpSpPr/>
             <p:nvPr/>
           </p:nvGrpSpPr>
           <p:grpSpPr>
-            <a:xfrm rot="0">
+            <a:xfrm>
               <a:off x="382689" y="382689"/>
               <a:ext cx="1024128" cy="1024128"/>
               <a:chOff x="0" y="0"/>
@@ -14128,12 +12880,12 @@
           </p:grpSpPr>
           <p:sp>
             <p:nvSpPr>
-              <p:cNvPr name="Freeform 74" id="74"/>
+              <p:cNvPr id="74" name="Freeform 74"/>
               <p:cNvSpPr/>
               <p:nvPr/>
             </p:nvSpPr>
             <p:spPr>
-              <a:xfrm flipH="false" flipV="false" rot="0">
+              <a:xfrm>
                 <a:off x="0" y="0"/>
                 <a:ext cx="1024128" cy="1024128"/>
               </a:xfrm>
@@ -14142,9 +12894,9 @@
                 <a:gdLst/>
                 <a:ahLst/>
                 <a:cxnLst/>
-                <a:rect r="r" b="b" t="t" l="l"/>
+                <a:rect l="l" t="t" r="r" b="b"/>
                 <a:pathLst>
-                  <a:path h="1024128" w="1024128">
+                  <a:path w="1024128" h="1024128">
                     <a:moveTo>
                       <a:pt x="0" y="0"/>
                     </a:moveTo>
@@ -14166,15 +12918,15 @@
                   <a:alphaModFix amt="0"/>
                 </a:blip>
                 <a:stretch>
-                  <a:fillRect l="-78303" t="0" r="-78303" b="0"/>
+                  <a:fillRect l="-78303" r="-78303"/>
                 </a:stretch>
               </a:blipFill>
             </p:spPr>
           </p:sp>
           <p:sp>
             <p:nvSpPr>
-              <p:cNvPr name="TextBox 75" id="75"/>
-              <p:cNvSpPr txBox="true"/>
+              <p:cNvPr id="75" name="TextBox 75"/>
+              <p:cNvSpPr txBox="1"/>
               <p:nvPr/>
             </p:nvSpPr>
             <p:spPr>
@@ -14187,7 +12939,7 @@
               </a:prstGeom>
             </p:spPr>
             <p:txBody>
-              <a:bodyPr anchor="ctr" rtlCol="false" tIns="0" lIns="0" bIns="0" rIns="0"/>
+              <a:bodyPr lIns="0" tIns="0" rIns="0" bIns="0" rtlCol="0" anchor="ctr"/>
               <a:lstStyle/>
               <a:p>
                 <a:pPr algn="ctr">
@@ -14196,7 +12948,7 @@
                   </a:lnSpc>
                 </a:pPr>
                 <a:r>
-                  <a:rPr lang="en-US" sz="2799" b="true">
+                  <a:rPr lang="en-US" sz="2799" b="1">
                     <a:solidFill>
                       <a:srgbClr val="FFFFFF"/>
                     </a:solidFill>
@@ -14213,12 +12965,12 @@
         </p:grpSp>
         <p:grpSp>
           <p:nvGrpSpPr>
-            <p:cNvPr name="Group 76" id="76"/>
+            <p:cNvPr id="76" name="Group 76"/>
             <p:cNvGrpSpPr/>
             <p:nvPr/>
           </p:nvGrpSpPr>
           <p:grpSpPr>
-            <a:xfrm rot="0">
+            <a:xfrm>
               <a:off x="382689" y="1675041"/>
               <a:ext cx="6339840" cy="1097280"/>
               <a:chOff x="0" y="0"/>
@@ -14227,12 +12979,12 @@
           </p:grpSpPr>
           <p:sp>
             <p:nvSpPr>
-              <p:cNvPr name="Freeform 77" id="77"/>
+              <p:cNvPr id="77" name="Freeform 77"/>
               <p:cNvSpPr/>
               <p:nvPr/>
             </p:nvSpPr>
             <p:spPr>
-              <a:xfrm flipH="false" flipV="false" rot="0">
+              <a:xfrm>
                 <a:off x="0" y="0"/>
                 <a:ext cx="6339840" cy="1097280"/>
               </a:xfrm>
@@ -14241,9 +12993,9 @@
                 <a:gdLst/>
                 <a:ahLst/>
                 <a:cxnLst/>
-                <a:rect r="r" b="b" t="t" l="l"/>
+                <a:rect l="l" t="t" r="r" b="b"/>
                 <a:pathLst>
-                  <a:path h="1097280" w="6339840">
+                  <a:path w="6339840" h="1097280">
                     <a:moveTo>
                       <a:pt x="0" y="0"/>
                     </a:moveTo>
@@ -14265,15 +13017,15 @@
                   <a:alphaModFix amt="0"/>
                 </a:blip>
                 <a:stretch>
-                  <a:fillRect l="0" t="-62580" r="0" b="-62580"/>
+                  <a:fillRect t="-62580" b="-62580"/>
                 </a:stretch>
               </a:blipFill>
             </p:spPr>
           </p:sp>
           <p:sp>
             <p:nvSpPr>
-              <p:cNvPr name="TextBox 78" id="78"/>
-              <p:cNvSpPr txBox="true"/>
+              <p:cNvPr id="78" name="TextBox 78"/>
+              <p:cNvSpPr txBox="1"/>
               <p:nvPr/>
             </p:nvSpPr>
             <p:spPr>
@@ -14286,7 +13038,7 @@
               </a:prstGeom>
             </p:spPr>
             <p:txBody>
-              <a:bodyPr anchor="ctr" rtlCol="false" tIns="0" lIns="0" bIns="0" rIns="0"/>
+              <a:bodyPr lIns="0" tIns="0" rIns="0" bIns="0" rtlCol="0" anchor="ctr"/>
               <a:lstStyle/>
               <a:p>
                 <a:pPr algn="ctr">
@@ -14295,7 +13047,7 @@
                   </a:lnSpc>
                 </a:pPr>
                 <a:r>
-                  <a:rPr lang="en-US" sz="2499" b="true">
+                  <a:rPr lang="en-US" sz="2499" b="1">
                     <a:solidFill>
                       <a:srgbClr val="1A1A2E"/>
                     </a:solidFill>
@@ -14312,12 +13064,12 @@
         </p:grpSp>
         <p:grpSp>
           <p:nvGrpSpPr>
-            <p:cNvPr name="Group 79" id="79"/>
+            <p:cNvPr id="79" name="Group 79"/>
             <p:cNvGrpSpPr/>
             <p:nvPr/>
           </p:nvGrpSpPr>
           <p:grpSpPr>
-            <a:xfrm rot="0">
+            <a:xfrm>
               <a:off x="382689" y="2821089"/>
               <a:ext cx="6339840" cy="975360"/>
               <a:chOff x="0" y="0"/>
@@ -14326,12 +13078,12 @@
           </p:grpSpPr>
           <p:sp>
             <p:nvSpPr>
-              <p:cNvPr name="Freeform 80" id="80"/>
+              <p:cNvPr id="80" name="Freeform 80"/>
               <p:cNvSpPr/>
               <p:nvPr/>
             </p:nvSpPr>
             <p:spPr>
-              <a:xfrm flipH="false" flipV="false" rot="0">
+              <a:xfrm>
                 <a:off x="0" y="0"/>
                 <a:ext cx="6339840" cy="975360"/>
               </a:xfrm>
@@ -14340,9 +13092,9 @@
                 <a:gdLst/>
                 <a:ahLst/>
                 <a:cxnLst/>
-                <a:rect r="r" b="b" t="t" l="l"/>
+                <a:rect l="l" t="t" r="r" b="b"/>
                 <a:pathLst>
-                  <a:path h="975360" w="6339840">
+                  <a:path w="6339840" h="975360">
                     <a:moveTo>
                       <a:pt x="0" y="0"/>
                     </a:moveTo>
@@ -14364,15 +13116,15 @@
                   <a:alphaModFix amt="0"/>
                 </a:blip>
                 <a:stretch>
-                  <a:fillRect l="0" t="-76652" r="0" b="-76652"/>
+                  <a:fillRect t="-76652" b="-76652"/>
                 </a:stretch>
               </a:blipFill>
             </p:spPr>
           </p:sp>
           <p:sp>
             <p:nvSpPr>
-              <p:cNvPr name="TextBox 81" id="81"/>
-              <p:cNvSpPr txBox="true"/>
+              <p:cNvPr id="81" name="TextBox 81"/>
+              <p:cNvSpPr txBox="1"/>
               <p:nvPr/>
             </p:nvSpPr>
             <p:spPr>
@@ -14385,7 +13137,7 @@
               </a:prstGeom>
             </p:spPr>
             <p:txBody>
-              <a:bodyPr anchor="ctr" rtlCol="false" tIns="0" lIns="0" bIns="0" rIns="0"/>
+              <a:bodyPr lIns="0" tIns="0" rIns="0" bIns="0" rtlCol="0" anchor="ctr"/>
               <a:lstStyle/>
               <a:p>
                 <a:pPr algn="ctr">
@@ -14412,12 +13164,12 @@
       </p:grpSp>
       <p:grpSp>
         <p:nvGrpSpPr>
-          <p:cNvPr name="Group 82" id="82"/>
+          <p:cNvPr id="82" name="Group 82"/>
           <p:cNvGrpSpPr/>
           <p:nvPr/>
         </p:nvGrpSpPr>
         <p:grpSpPr>
-          <a:xfrm rot="0">
+          <a:xfrm>
             <a:off x="11685270" y="7570470"/>
             <a:ext cx="495300" cy="38100"/>
             <a:chOff x="0" y="0"/>
@@ -14426,12 +13178,12 @@
         </p:grpSpPr>
         <p:sp>
           <p:nvSpPr>
-            <p:cNvPr name="Freeform 83" id="83"/>
+            <p:cNvPr id="83" name="Freeform 83"/>
             <p:cNvSpPr/>
             <p:nvPr/>
           </p:nvSpPr>
           <p:spPr>
-            <a:xfrm flipH="false" flipV="false" rot="0">
+            <a:xfrm>
               <a:off x="0" y="0"/>
               <a:ext cx="660400" cy="50800"/>
             </a:xfrm>
@@ -14440,9 +13192,9 @@
               <a:gdLst/>
               <a:ahLst/>
               <a:cxnLst/>
-              <a:rect r="r" b="b" t="t" l="l"/>
+              <a:rect l="l" t="t" r="r" b="b"/>
               <a:pathLst>
-                <a:path h="50800" w="660400">
+                <a:path w="660400" h="50800">
                   <a:moveTo>
                     <a:pt x="0" y="0"/>
                   </a:moveTo>
@@ -14457,7 +13209,7 @@
                 <a:alphaModFix amt="0"/>
               </a:blip>
               <a:stretch>
-                <a:fillRect l="0" t="-203305" r="0" b="-203305"/>
+                <a:fillRect t="-203305" b="-203305"/>
               </a:stretch>
             </a:blipFill>
             <a:ln w="38100" cap="sq">
@@ -14472,12 +13224,12 @@
       </p:grpSp>
       <p:grpSp>
         <p:nvGrpSpPr>
-          <p:cNvPr name="Group 84" id="84"/>
+          <p:cNvPr id="84" name="Group 84"/>
           <p:cNvGrpSpPr/>
           <p:nvPr/>
         </p:nvGrpSpPr>
         <p:grpSpPr>
-          <a:xfrm rot="0">
+          <a:xfrm>
             <a:off x="627378" y="6022343"/>
             <a:ext cx="5328923" cy="3134363"/>
             <a:chOff x="0" y="0"/>
@@ -14486,12 +13238,12 @@
         </p:grpSpPr>
         <p:grpSp>
           <p:nvGrpSpPr>
-            <p:cNvPr name="Group 85" id="85"/>
+            <p:cNvPr id="85" name="Group 85"/>
             <p:cNvGrpSpPr/>
             <p:nvPr/>
           </p:nvGrpSpPr>
           <p:grpSpPr>
-            <a:xfrm rot="0">
+            <a:xfrm>
               <a:off x="0" y="0"/>
               <a:ext cx="7105231" cy="4179151"/>
               <a:chOff x="0" y="0"/>
@@ -14500,12 +13252,12 @@
           </p:grpSpPr>
           <p:sp>
             <p:nvSpPr>
-              <p:cNvPr name="Freeform 86" id="86"/>
+              <p:cNvPr id="86" name="Freeform 86"/>
               <p:cNvSpPr/>
               <p:nvPr/>
             </p:nvSpPr>
             <p:spPr>
-              <a:xfrm flipH="false" flipV="false" rot="0">
+              <a:xfrm>
                 <a:off x="0" y="0"/>
                 <a:ext cx="7105269" cy="4179189"/>
               </a:xfrm>
@@ -14514,9 +13266,9 @@
                 <a:gdLst/>
                 <a:ahLst/>
                 <a:cxnLst/>
-                <a:rect r="r" b="b" t="t" l="l"/>
+                <a:rect l="l" t="t" r="r" b="b"/>
                 <a:pathLst>
-                  <a:path h="4179189" w="7105269">
+                  <a:path w="7105269" h="4179189">
                     <a:moveTo>
                       <a:pt x="0" y="295021"/>
                     </a:moveTo>
@@ -14568,12 +13320,12 @@
         </p:grpSp>
         <p:grpSp>
           <p:nvGrpSpPr>
-            <p:cNvPr name="Group 87" id="87"/>
+            <p:cNvPr id="87" name="Group 87"/>
             <p:cNvGrpSpPr/>
             <p:nvPr/>
           </p:nvGrpSpPr>
           <p:grpSpPr>
-            <a:xfrm rot="0">
+            <a:xfrm>
               <a:off x="365760" y="365760"/>
               <a:ext cx="1057999" cy="1057999"/>
               <a:chOff x="0" y="0"/>
@@ -14582,12 +13334,12 @@
           </p:grpSpPr>
           <p:sp>
             <p:nvSpPr>
-              <p:cNvPr name="Freeform 88" id="88"/>
+              <p:cNvPr id="88" name="Freeform 88"/>
               <p:cNvSpPr/>
               <p:nvPr/>
             </p:nvSpPr>
             <p:spPr>
-              <a:xfrm flipH="false" flipV="false" rot="0">
+              <a:xfrm>
                 <a:off x="0" y="0"/>
                 <a:ext cx="1058037" cy="1058037"/>
               </a:xfrm>
@@ -14596,9 +13348,9 @@
                 <a:gdLst/>
                 <a:ahLst/>
                 <a:cxnLst/>
-                <a:rect r="r" b="b" t="t" l="l"/>
+                <a:rect l="l" t="t" r="r" b="b"/>
                 <a:pathLst>
-                  <a:path h="1058037" w="1058037">
+                  <a:path w="1058037" h="1058037">
                     <a:moveTo>
                       <a:pt x="0" y="528955"/>
                     </a:moveTo>
@@ -14641,12 +13393,12 @@
         </p:grpSp>
         <p:grpSp>
           <p:nvGrpSpPr>
-            <p:cNvPr name="Group 89" id="89"/>
+            <p:cNvPr id="89" name="Group 89"/>
             <p:cNvGrpSpPr/>
             <p:nvPr/>
           </p:nvGrpSpPr>
           <p:grpSpPr>
-            <a:xfrm rot="0">
+            <a:xfrm>
               <a:off x="382689" y="382689"/>
               <a:ext cx="1024128" cy="1024128"/>
               <a:chOff x="0" y="0"/>
@@ -14655,12 +13407,12 @@
           </p:grpSpPr>
           <p:sp>
             <p:nvSpPr>
-              <p:cNvPr name="Freeform 90" id="90"/>
+              <p:cNvPr id="90" name="Freeform 90"/>
               <p:cNvSpPr/>
               <p:nvPr/>
             </p:nvSpPr>
             <p:spPr>
-              <a:xfrm flipH="false" flipV="false" rot="0">
+              <a:xfrm>
                 <a:off x="0" y="0"/>
                 <a:ext cx="1024128" cy="1024128"/>
               </a:xfrm>
@@ -14669,9 +13421,9 @@
                 <a:gdLst/>
                 <a:ahLst/>
                 <a:cxnLst/>
-                <a:rect r="r" b="b" t="t" l="l"/>
+                <a:rect l="l" t="t" r="r" b="b"/>
                 <a:pathLst>
-                  <a:path h="1024128" w="1024128">
+                  <a:path w="1024128" h="1024128">
                     <a:moveTo>
                       <a:pt x="0" y="0"/>
                     </a:moveTo>
@@ -14693,15 +13445,15 @@
                   <a:alphaModFix amt="0"/>
                 </a:blip>
                 <a:stretch>
-                  <a:fillRect l="-78303" t="0" r="-78303" b="0"/>
+                  <a:fillRect l="-78303" r="-78303"/>
                 </a:stretch>
               </a:blipFill>
             </p:spPr>
           </p:sp>
           <p:sp>
             <p:nvSpPr>
-              <p:cNvPr name="TextBox 91" id="91"/>
-              <p:cNvSpPr txBox="true"/>
+              <p:cNvPr id="91" name="TextBox 91"/>
+              <p:cNvSpPr txBox="1"/>
               <p:nvPr/>
             </p:nvSpPr>
             <p:spPr>
@@ -14714,7 +13466,7 @@
               </a:prstGeom>
             </p:spPr>
             <p:txBody>
-              <a:bodyPr anchor="ctr" rtlCol="false" tIns="0" lIns="0" bIns="0" rIns="0"/>
+              <a:bodyPr lIns="0" tIns="0" rIns="0" bIns="0" rtlCol="0" anchor="ctr"/>
               <a:lstStyle/>
               <a:p>
                 <a:pPr algn="ctr">
@@ -14723,7 +13475,7 @@
                   </a:lnSpc>
                 </a:pPr>
                 <a:r>
-                  <a:rPr lang="en-US" sz="2799" b="true">
+                  <a:rPr lang="en-US" sz="2799" b="1">
                     <a:solidFill>
                       <a:srgbClr val="FFFFFF"/>
                     </a:solidFill>
@@ -14740,12 +13492,12 @@
         </p:grpSp>
         <p:grpSp>
           <p:nvGrpSpPr>
-            <p:cNvPr name="Group 92" id="92"/>
+            <p:cNvPr id="92" name="Group 92"/>
             <p:cNvGrpSpPr/>
             <p:nvPr/>
           </p:nvGrpSpPr>
           <p:grpSpPr>
-            <a:xfrm rot="0">
+            <a:xfrm>
               <a:off x="382689" y="1675041"/>
               <a:ext cx="6339840" cy="1097280"/>
               <a:chOff x="0" y="0"/>
@@ -14754,12 +13506,12 @@
           </p:grpSpPr>
           <p:sp>
             <p:nvSpPr>
-              <p:cNvPr name="Freeform 93" id="93"/>
+              <p:cNvPr id="93" name="Freeform 93"/>
               <p:cNvSpPr/>
               <p:nvPr/>
             </p:nvSpPr>
             <p:spPr>
-              <a:xfrm flipH="false" flipV="false" rot="0">
+              <a:xfrm>
                 <a:off x="0" y="0"/>
                 <a:ext cx="6339840" cy="1097280"/>
               </a:xfrm>
@@ -14768,9 +13520,9 @@
                 <a:gdLst/>
                 <a:ahLst/>
                 <a:cxnLst/>
-                <a:rect r="r" b="b" t="t" l="l"/>
+                <a:rect l="l" t="t" r="r" b="b"/>
                 <a:pathLst>
-                  <a:path h="1097280" w="6339840">
+                  <a:path w="6339840" h="1097280">
                     <a:moveTo>
                       <a:pt x="0" y="0"/>
                     </a:moveTo>
@@ -14792,15 +13544,15 @@
                   <a:alphaModFix amt="0"/>
                 </a:blip>
                 <a:stretch>
-                  <a:fillRect l="0" t="-62580" r="0" b="-62580"/>
+                  <a:fillRect t="-62580" b="-62580"/>
                 </a:stretch>
               </a:blipFill>
             </p:spPr>
           </p:sp>
           <p:sp>
             <p:nvSpPr>
-              <p:cNvPr name="TextBox 94" id="94"/>
-              <p:cNvSpPr txBox="true"/>
+              <p:cNvPr id="94" name="TextBox 94"/>
+              <p:cNvSpPr txBox="1"/>
               <p:nvPr/>
             </p:nvSpPr>
             <p:spPr>
@@ -14813,7 +13565,7 @@
               </a:prstGeom>
             </p:spPr>
             <p:txBody>
-              <a:bodyPr anchor="ctr" rtlCol="false" tIns="0" lIns="0" bIns="0" rIns="0"/>
+              <a:bodyPr lIns="0" tIns="0" rIns="0" bIns="0" rtlCol="0" anchor="ctr"/>
               <a:lstStyle/>
               <a:p>
                 <a:pPr algn="ctr">
@@ -14822,7 +13574,7 @@
                   </a:lnSpc>
                 </a:pPr>
                 <a:r>
-                  <a:rPr lang="en-US" sz="2499" b="true">
+                  <a:rPr lang="en-US" sz="2499" b="1">
                     <a:solidFill>
                       <a:srgbClr val="1A1A2E"/>
                     </a:solidFill>
@@ -14839,12 +13591,12 @@
         </p:grpSp>
         <p:grpSp>
           <p:nvGrpSpPr>
-            <p:cNvPr name="Group 95" id="95"/>
+            <p:cNvPr id="95" name="Group 95"/>
             <p:cNvGrpSpPr/>
             <p:nvPr/>
           </p:nvGrpSpPr>
           <p:grpSpPr>
-            <a:xfrm rot="0">
+            <a:xfrm>
               <a:off x="382689" y="2821089"/>
               <a:ext cx="6339840" cy="975360"/>
               <a:chOff x="0" y="0"/>
@@ -14853,12 +13605,12 @@
           </p:grpSpPr>
           <p:sp>
             <p:nvSpPr>
-              <p:cNvPr name="Freeform 96" id="96"/>
+              <p:cNvPr id="96" name="Freeform 96"/>
               <p:cNvSpPr/>
               <p:nvPr/>
             </p:nvSpPr>
             <p:spPr>
-              <a:xfrm flipH="false" flipV="false" rot="0">
+              <a:xfrm>
                 <a:off x="0" y="0"/>
                 <a:ext cx="6339840" cy="975360"/>
               </a:xfrm>
@@ -14867,9 +13619,9 @@
                 <a:gdLst/>
                 <a:ahLst/>
                 <a:cxnLst/>
-                <a:rect r="r" b="b" t="t" l="l"/>
+                <a:rect l="l" t="t" r="r" b="b"/>
                 <a:pathLst>
-                  <a:path h="975360" w="6339840">
+                  <a:path w="6339840" h="975360">
                     <a:moveTo>
                       <a:pt x="0" y="0"/>
                     </a:moveTo>
@@ -14891,15 +13643,15 @@
                   <a:alphaModFix amt="0"/>
                 </a:blip>
                 <a:stretch>
-                  <a:fillRect l="0" t="-76652" r="0" b="-76652"/>
+                  <a:fillRect t="-76652" b="-76652"/>
                 </a:stretch>
               </a:blipFill>
             </p:spPr>
           </p:sp>
           <p:sp>
             <p:nvSpPr>
-              <p:cNvPr name="TextBox 97" id="97"/>
-              <p:cNvSpPr txBox="true"/>
+              <p:cNvPr id="97" name="TextBox 97"/>
+              <p:cNvSpPr txBox="1"/>
               <p:nvPr/>
             </p:nvSpPr>
             <p:spPr>
@@ -14912,7 +13664,7 @@
               </a:prstGeom>
             </p:spPr>
             <p:txBody>
-              <a:bodyPr anchor="ctr" rtlCol="false" tIns="0" lIns="0" bIns="0" rIns="0"/>
+              <a:bodyPr lIns="0" tIns="0" rIns="0" bIns="0" rtlCol="0" anchor="ctr"/>
               <a:lstStyle/>
               <a:p>
                 <a:pPr algn="ctr">
@@ -14939,7 +13691,7 @@
       </p:grpSp>
       <p:sp>
         <p:nvSpPr>
-          <p:cNvPr name="AutoShape 98" id="98"/>
+          <p:cNvPr id="98" name="AutoShape 98"/>
           <p:cNvSpPr/>
           <p:nvPr/>
         </p:nvSpPr>
@@ -14951,19 +13703,19 @@
           <a:prstGeom prst="line">
             <a:avLst/>
           </a:prstGeom>
-          <a:ln cap="flat" w="38100">
+          <a:ln w="38100" cap="flat">
             <a:solidFill>
               <a:srgbClr val="000000"/>
             </a:solidFill>
             <a:prstDash val="solid"/>
-            <a:headEnd type="none" len="sm" w="sm"/>
-            <a:tailEnd type="triangle" len="med" w="lg"/>
+            <a:headEnd type="none" w="sm" len="sm"/>
+            <a:tailEnd type="triangle" w="lg" len="med"/>
           </a:ln>
         </p:spPr>
       </p:sp>
       <p:sp>
         <p:nvSpPr>
-          <p:cNvPr name="AutoShape 99" id="99"/>
+          <p:cNvPr id="99" name="AutoShape 99"/>
           <p:cNvSpPr/>
           <p:nvPr/>
         </p:nvSpPr>
@@ -14975,67 +13727,67 @@
           <a:prstGeom prst="line">
             <a:avLst/>
           </a:prstGeom>
-          <a:ln cap="flat" w="38100">
+          <a:ln w="38100" cap="flat">
             <a:solidFill>
               <a:srgbClr val="000000"/>
             </a:solidFill>
             <a:prstDash val="solid"/>
-            <a:headEnd type="none" len="sm" w="sm"/>
-            <a:tailEnd type="triangle" len="med" w="lg"/>
+            <a:headEnd type="none" w="sm" len="sm"/>
+            <a:tailEnd type="triangle" w="lg" len="med"/>
           </a:ln>
         </p:spPr>
       </p:sp>
       <p:sp>
         <p:nvSpPr>
-          <p:cNvPr name="AutoShape 100" id="100"/>
+          <p:cNvPr id="100" name="AutoShape 100"/>
           <p:cNvSpPr/>
           <p:nvPr/>
         </p:nvSpPr>
         <p:spPr>
-          <a:xfrm flipH="true">
+          <a:xfrm flipH="1">
             <a:off x="11717026" y="7690104"/>
             <a:ext cx="431797" cy="0"/>
           </a:xfrm>
           <a:prstGeom prst="line">
             <a:avLst/>
           </a:prstGeom>
-          <a:ln cap="flat" w="38100">
+          <a:ln w="38100" cap="flat">
             <a:solidFill>
               <a:srgbClr val="000000"/>
             </a:solidFill>
             <a:prstDash val="solid"/>
-            <a:headEnd type="none" len="sm" w="sm"/>
-            <a:tailEnd type="triangle" len="med" w="lg"/>
+            <a:headEnd type="none" w="sm" len="sm"/>
+            <a:tailEnd type="triangle" w="lg" len="med"/>
           </a:ln>
         </p:spPr>
       </p:sp>
       <p:sp>
         <p:nvSpPr>
-          <p:cNvPr name="AutoShape 101" id="101"/>
+          <p:cNvPr id="101" name="AutoShape 101"/>
           <p:cNvSpPr/>
           <p:nvPr/>
         </p:nvSpPr>
         <p:spPr>
-          <a:xfrm flipH="true">
+          <a:xfrm flipH="1">
             <a:off x="5956302" y="7709154"/>
             <a:ext cx="431797" cy="0"/>
           </a:xfrm>
           <a:prstGeom prst="line">
             <a:avLst/>
           </a:prstGeom>
-          <a:ln cap="flat" w="38100">
+          <a:ln w="38100" cap="flat">
             <a:solidFill>
               <a:srgbClr val="000000"/>
             </a:solidFill>
             <a:prstDash val="solid"/>
-            <a:headEnd type="none" len="sm" w="sm"/>
-            <a:tailEnd type="triangle" len="med" w="lg"/>
+            <a:headEnd type="none" w="sm" len="sm"/>
+            <a:tailEnd type="triangle" w="lg" len="med"/>
           </a:ln>
         </p:spPr>
       </p:sp>
       <p:sp>
         <p:nvSpPr>
-          <p:cNvPr name="AutoShape 102" id="102"/>
+          <p:cNvPr id="102" name="AutoShape 102"/>
           <p:cNvSpPr/>
           <p:nvPr/>
         </p:nvSpPr>
@@ -15047,13 +13799,13 @@
           <a:prstGeom prst="line">
             <a:avLst/>
           </a:prstGeom>
-          <a:ln cap="flat" w="38100">
+          <a:ln w="38100" cap="flat">
             <a:solidFill>
               <a:srgbClr val="000000"/>
             </a:solidFill>
             <a:prstDash val="solid"/>
-            <a:headEnd type="none" len="sm" w="sm"/>
-            <a:tailEnd type="triangle" len="med" w="lg"/>
+            <a:headEnd type="none" w="sm" len="sm"/>
+            <a:tailEnd type="triangle" w="lg" len="med"/>
           </a:ln>
         </p:spPr>
       </p:sp>
